--- a/课件/part1.HTML:CSS:JavaScript/第0章-高级Web编程.pptx
+++ b/课件/part1.HTML:CSS:JavaScript/第0章-高级Web编程.pptx
@@ -7,14 +7,16 @@
   <p:sldIdLst>
     <p:sldId id="256" r:id="rId2"/>
     <p:sldId id="260" r:id="rId3"/>
-    <p:sldId id="267" r:id="rId4"/>
-    <p:sldId id="268" r:id="rId5"/>
-    <p:sldId id="257" r:id="rId6"/>
-    <p:sldId id="266" r:id="rId7"/>
-    <p:sldId id="263" r:id="rId8"/>
-    <p:sldId id="258" r:id="rId9"/>
-    <p:sldId id="261" r:id="rId10"/>
-    <p:sldId id="262" r:id="rId11"/>
+    <p:sldId id="268" r:id="rId4"/>
+    <p:sldId id="257" r:id="rId5"/>
+    <p:sldId id="266" r:id="rId6"/>
+    <p:sldId id="263" r:id="rId7"/>
+    <p:sldId id="269" r:id="rId8"/>
+    <p:sldId id="270" r:id="rId9"/>
+    <p:sldId id="271" r:id="rId10"/>
+    <p:sldId id="258" r:id="rId11"/>
+    <p:sldId id="261" r:id="rId12"/>
+    <p:sldId id="262" r:id="rId13"/>
   </p:sldIdLst>
   <p:sldSz cx="12192000" cy="6858000"/>
   <p:notesSz cx="7104063" cy="10234613"/>
@@ -1716,25 +1718,18 @@
         <a:lstStyle/>
         <a:p>
           <a:r>
-            <a:rPr lang="en-US" dirty="0"/>
-            <a:t>Spring</a:t>
+            <a:rPr lang="en-US" altLang="zh-CN" dirty="0"/>
+            <a:t>Vibe</a:t>
           </a:r>
           <a:r>
             <a:rPr lang="zh-CN" altLang="en-US" dirty="0"/>
             <a:t> </a:t>
           </a:r>
           <a:r>
-            <a:rPr lang="en-US" dirty="0"/>
-            <a:t>&amp;</a:t>
+            <a:rPr lang="en-US" altLang="zh-CN" dirty="0"/>
+            <a:t>Coding</a:t>
           </a:r>
-          <a:r>
-            <a:rPr lang="zh-CN" altLang="en-US" dirty="0"/>
-            <a:t> </a:t>
-          </a:r>
-          <a:r>
-            <a:rPr lang="en-US" dirty="0"/>
-            <a:t>Spring MVC</a:t>
-          </a:r>
+          <a:endParaRPr lang="en-US" dirty="0"/>
         </a:p>
       </dgm:t>
     </dgm:pt>
@@ -1768,9 +1763,10 @@
         <a:lstStyle/>
         <a:p>
           <a:r>
-            <a:rPr lang="en-US"/>
+            <a:rPr lang="en-US" dirty="0" err="1"/>
             <a:t>SpringBoot</a:t>
           </a:r>
+          <a:endParaRPr lang="en-US" dirty="0"/>
         </a:p>
       </dgm:t>
     </dgm:pt>
@@ -1828,7 +1824,7 @@
       <dgm:spPr/>
     </dgm:pt>
     <dgm:pt modelId="{B86237D5-15E6-4944-8A57-4EAD616868C8}" type="pres">
-      <dgm:prSet presAssocID="{9DDEC28B-582C-4DB2-94C2-0FDAB8A31D6A}" presName="parentText" presStyleLbl="node1" presStyleIdx="1" presStyleCnt="3">
+      <dgm:prSet presAssocID="{9DDEC28B-582C-4DB2-94C2-0FDAB8A31D6A}" presName="parentText" presStyleLbl="node1" presStyleIdx="1" presStyleCnt="3" custLinFactY="11064" custLinFactNeighborX="-722" custLinFactNeighborY="100000">
         <dgm:presLayoutVars>
           <dgm:chMax val="1"/>
           <dgm:bulletEnabled val="1"/>
@@ -1845,7 +1841,7 @@
       <dgm:spPr/>
     </dgm:pt>
     <dgm:pt modelId="{7EC3E5CF-73FD-0145-BE24-43B287DC518A}" type="pres">
-      <dgm:prSet presAssocID="{C077E0E9-A425-44BA-A50B-BDA150594D93}" presName="parentText" presStyleLbl="node1" presStyleIdx="2" presStyleCnt="3">
+      <dgm:prSet presAssocID="{C077E0E9-A425-44BA-A50B-BDA150594D93}" presName="parentText" presStyleLbl="node1" presStyleIdx="2" presStyleCnt="3" custLinFactNeighborX="-722" custLinFactNeighborY="-97187">
         <dgm:presLayoutVars>
           <dgm:chMax val="1"/>
           <dgm:bulletEnabled val="1"/>
@@ -1875,7 +1871,7 @@
   <dgm:whole/>
   <dgm:extLst>
     <a:ext uri="http://schemas.microsoft.com/office/drawing/2008/diagram">
-      <dsp:dataModelExt xmlns:dsp="http://schemas.microsoft.com/office/drawing/2008/diagram" relId="rId6" minVer="http://schemas.openxmlformats.org/drawingml/2006/diagram"/>
+      <dsp:dataModelExt xmlns:dsp="http://schemas.microsoft.com/office/drawing/2008/diagram" relId="rId8" minVer="http://schemas.openxmlformats.org/drawingml/2006/diagram"/>
     </a:ext>
   </dgm:extLst>
 </dgm:dataModel>
@@ -1968,10 +1964,18 @@
         <a:lstStyle/>
         <a:p>
           <a:r>
-            <a:rPr lang="zh-CN"/>
-            <a:t>偏重于后端的框架讲解</a:t>
+            <a:rPr lang="zh-CN" dirty="0"/>
+            <a:t>偏重于</a:t>
           </a:r>
-          <a:endParaRPr lang="en-US"/>
+          <a:r>
+            <a:rPr lang="zh-CN" altLang="en-US" dirty="0"/>
+            <a:t>前</a:t>
+          </a:r>
+          <a:r>
+            <a:rPr lang="zh-CN" dirty="0"/>
+            <a:t>后端的框架讲解</a:t>
+          </a:r>
+          <a:endParaRPr lang="en-US" dirty="0"/>
         </a:p>
       </dgm:t>
     </dgm:pt>
@@ -2246,8 +2250,8 @@
       </dsp:nvSpPr>
       <dsp:spPr>
         <a:xfrm>
-          <a:off x="2287523" y="2256"/>
-          <a:ext cx="2573464" cy="1489273"/>
+          <a:off x="1415977" y="1157"/>
+          <a:ext cx="1592974" cy="764003"/>
         </a:xfrm>
         <a:prstGeom prst="roundRect">
           <a:avLst/>
@@ -2310,12 +2314,12 @@
         </a:fontRef>
       </dsp:style>
       <dsp:txBody>
-        <a:bodyPr spcFirstLastPara="0" vert="horz" wrap="square" lIns="133350" tIns="66675" rIns="133350" bIns="66675" numCol="1" spcCol="1270" anchor="ctr" anchorCtr="0">
+        <a:bodyPr spcFirstLastPara="0" vert="horz" wrap="square" lIns="80010" tIns="40005" rIns="80010" bIns="40005" numCol="1" spcCol="1270" anchor="ctr" anchorCtr="0">
           <a:noAutofit/>
         </a:bodyPr>
         <a:lstStyle/>
         <a:p>
-          <a:pPr marL="0" lvl="0" indent="0" algn="ctr" defTabSz="1555750">
+          <a:pPr marL="0" lvl="0" indent="0" algn="ctr" defTabSz="933450">
             <a:lnSpc>
               <a:spcPct val="90000"/>
             </a:lnSpc>
@@ -2328,19 +2332,19 @@
             <a:buNone/>
           </a:pPr>
           <a:r>
-            <a:rPr lang="en-US" altLang="zh-CN" sz="3500" kern="1200" dirty="0"/>
+            <a:rPr lang="en-US" altLang="zh-CN" sz="2100" kern="1200" dirty="0"/>
             <a:t>Vue </a:t>
           </a:r>
           <a:r>
-            <a:rPr lang="zh-CN" sz="3500" kern="1200" dirty="0"/>
+            <a:rPr lang="zh-CN" sz="2100" kern="1200" dirty="0"/>
             <a:t>编程</a:t>
           </a:r>
-          <a:endParaRPr lang="en-US" sz="3500" kern="1200" dirty="0"/>
+          <a:endParaRPr lang="en-US" sz="2100" kern="1200" dirty="0"/>
         </a:p>
       </dsp:txBody>
       <dsp:txXfrm>
-        <a:off x="2360223" y="74956"/>
-        <a:ext cx="2428064" cy="1343873"/>
+        <a:off x="1453273" y="38453"/>
+        <a:ext cx="1518382" cy="689411"/>
       </dsp:txXfrm>
     </dsp:sp>
     <dsp:sp modelId="{B86237D5-15E6-4944-8A57-4EAD616868C8}">
@@ -2350,8 +2354,8 @@
       </dsp:nvSpPr>
       <dsp:spPr>
         <a:xfrm>
-          <a:off x="2287523" y="1565993"/>
-          <a:ext cx="2573464" cy="1489273"/>
+          <a:off x="1404476" y="1606722"/>
+          <a:ext cx="1592974" cy="764003"/>
         </a:xfrm>
         <a:prstGeom prst="roundRect">
           <a:avLst/>
@@ -2414,12 +2418,12 @@
         </a:fontRef>
       </dsp:style>
       <dsp:txBody>
-        <a:bodyPr spcFirstLastPara="0" vert="horz" wrap="square" lIns="133350" tIns="66675" rIns="133350" bIns="66675" numCol="1" spcCol="1270" anchor="ctr" anchorCtr="0">
+        <a:bodyPr spcFirstLastPara="0" vert="horz" wrap="square" lIns="80010" tIns="40005" rIns="80010" bIns="40005" numCol="1" spcCol="1270" anchor="ctr" anchorCtr="0">
           <a:noAutofit/>
         </a:bodyPr>
         <a:lstStyle/>
         <a:p>
-          <a:pPr marL="0" lvl="0" indent="0" algn="ctr" defTabSz="1555750">
+          <a:pPr marL="0" lvl="0" indent="0" algn="ctr" defTabSz="933450">
             <a:lnSpc>
               <a:spcPct val="90000"/>
             </a:lnSpc>
@@ -2432,30 +2436,23 @@
             <a:buNone/>
           </a:pPr>
           <a:r>
-            <a:rPr lang="en-US" sz="3500" kern="1200" dirty="0"/>
-            <a:t>Spring</a:t>
+            <a:rPr lang="en-US" altLang="zh-CN" sz="2100" kern="1200" dirty="0"/>
+            <a:t>Vibe</a:t>
           </a:r>
           <a:r>
-            <a:rPr lang="zh-CN" altLang="en-US" sz="3500" kern="1200" dirty="0"/>
+            <a:rPr lang="zh-CN" altLang="en-US" sz="2100" kern="1200" dirty="0"/>
             <a:t> </a:t>
           </a:r>
           <a:r>
-            <a:rPr lang="en-US" sz="3500" kern="1200" dirty="0"/>
-            <a:t>&amp;</a:t>
+            <a:rPr lang="en-US" altLang="zh-CN" sz="2100" kern="1200" dirty="0"/>
+            <a:t>Coding</a:t>
           </a:r>
-          <a:r>
-            <a:rPr lang="zh-CN" altLang="en-US" sz="3500" kern="1200" dirty="0"/>
-            <a:t> </a:t>
-          </a:r>
-          <a:r>
-            <a:rPr lang="en-US" sz="3500" kern="1200" dirty="0"/>
-            <a:t>Spring MVC</a:t>
-          </a:r>
+          <a:endParaRPr lang="en-US" sz="2100" kern="1200" dirty="0"/>
         </a:p>
       </dsp:txBody>
       <dsp:txXfrm>
-        <a:off x="2360223" y="1638693"/>
-        <a:ext cx="2428064" cy="1343873"/>
+        <a:off x="1441772" y="1644018"/>
+        <a:ext cx="1518382" cy="689411"/>
       </dsp:txXfrm>
     </dsp:sp>
     <dsp:sp modelId="{7EC3E5CF-73FD-0145-BE24-43B287DC518A}">
@@ -2465,8 +2462,8 @@
       </dsp:nvSpPr>
       <dsp:spPr>
         <a:xfrm>
-          <a:off x="2287523" y="3129730"/>
-          <a:ext cx="2573464" cy="1489273"/>
+          <a:off x="1404476" y="863052"/>
+          <a:ext cx="1592974" cy="764003"/>
         </a:xfrm>
         <a:prstGeom prst="roundRect">
           <a:avLst/>
@@ -2529,12 +2526,12 @@
         </a:fontRef>
       </dsp:style>
       <dsp:txBody>
-        <a:bodyPr spcFirstLastPara="0" vert="horz" wrap="square" lIns="133350" tIns="66675" rIns="133350" bIns="66675" numCol="1" spcCol="1270" anchor="ctr" anchorCtr="0">
+        <a:bodyPr spcFirstLastPara="0" vert="horz" wrap="square" lIns="80010" tIns="40005" rIns="80010" bIns="40005" numCol="1" spcCol="1270" anchor="ctr" anchorCtr="0">
           <a:noAutofit/>
         </a:bodyPr>
         <a:lstStyle/>
         <a:p>
-          <a:pPr marL="0" lvl="0" indent="0" algn="ctr" defTabSz="1555750">
+          <a:pPr marL="0" lvl="0" indent="0" algn="ctr" defTabSz="933450">
             <a:lnSpc>
               <a:spcPct val="90000"/>
             </a:lnSpc>
@@ -2547,14 +2544,15 @@
             <a:buNone/>
           </a:pPr>
           <a:r>
-            <a:rPr lang="en-US" sz="3500" kern="1200"/>
+            <a:rPr lang="en-US" sz="2100" kern="1200" dirty="0" err="1"/>
             <a:t>SpringBoot</a:t>
           </a:r>
+          <a:endParaRPr lang="en-US" sz="2100" kern="1200" dirty="0"/>
         </a:p>
       </dsp:txBody>
       <dsp:txXfrm>
-        <a:off x="2360223" y="3202430"/>
-        <a:ext cx="2428064" cy="1343873"/>
+        <a:off x="1441772" y="900348"/>
+        <a:ext cx="1518382" cy="689411"/>
       </dsp:txXfrm>
     </dsp:sp>
   </dsp:spTree>
@@ -2744,10 +2742,18 @@
             <a:buNone/>
           </a:pPr>
           <a:r>
-            <a:rPr lang="zh-CN" sz="3400" kern="1200"/>
-            <a:t>偏重于后端的框架讲解</a:t>
+            <a:rPr lang="zh-CN" sz="3400" kern="1200" dirty="0"/>
+            <a:t>偏重于</a:t>
           </a:r>
-          <a:endParaRPr lang="en-US" sz="3400" kern="1200"/>
+          <a:r>
+            <a:rPr lang="zh-CN" altLang="en-US" sz="3400" kern="1200" dirty="0"/>
+            <a:t>前</a:t>
+          </a:r>
+          <a:r>
+            <a:rPr lang="zh-CN" sz="3400" kern="1200" dirty="0"/>
+            <a:t>后端的框架讲解</a:t>
+          </a:r>
+          <a:endParaRPr lang="en-US" sz="3400" kern="1200" dirty="0"/>
         </a:p>
       </dsp:txBody>
       <dsp:txXfrm>
@@ -5511,7 +5517,7 @@
           <a:p>
             <a:fld id="{FDE934FF-F4E1-47C5-9CA5-30A81DDE2BE4}" type="datetimeFigureOut">
               <a:rPr lang="en-US" smtClean="0"/>
-              <a:t>3/25/24</a:t>
+              <a:t>3/1/26</a:t>
             </a:fld>
             <a:endParaRPr lang="en-US"/>
           </a:p>
@@ -5657,7 +5663,7 @@
           <a:p>
             <a:fld id="{FDE934FF-F4E1-47C5-9CA5-30A81DDE2BE4}" type="datetimeFigureOut">
               <a:rPr lang="en-US" smtClean="0"/>
-              <a:t>3/25/24</a:t>
+              <a:t>3/1/26</a:t>
             </a:fld>
             <a:endParaRPr lang="en-US"/>
           </a:p>
@@ -5820,7 +5826,7 @@
           <a:p>
             <a:fld id="{FDE934FF-F4E1-47C5-9CA5-30A81DDE2BE4}" type="datetimeFigureOut">
               <a:rPr lang="en-US" smtClean="0"/>
-              <a:t>3/25/24</a:t>
+              <a:t>3/1/26</a:t>
             </a:fld>
             <a:endParaRPr lang="en-US"/>
           </a:p>
@@ -6060,7 +6066,7 @@
           <a:p>
             <a:fld id="{FDE934FF-F4E1-47C5-9CA5-30A81DDE2BE4}" type="datetimeFigureOut">
               <a:rPr lang="en-US" smtClean="0"/>
-              <a:t>3/25/24</a:t>
+              <a:t>3/1/26</a:t>
             </a:fld>
             <a:endParaRPr lang="en-US"/>
           </a:p>
@@ -6284,7 +6290,7 @@
           <a:p>
             <a:fld id="{FDE934FF-F4E1-47C5-9CA5-30A81DDE2BE4}" type="datetimeFigureOut">
               <a:rPr lang="en-US" smtClean="0"/>
-              <a:t>3/25/24</a:t>
+              <a:t>3/1/26</a:t>
             </a:fld>
             <a:endParaRPr lang="en-US"/>
           </a:p>
@@ -6643,7 +6649,7 @@
           <a:p>
             <a:fld id="{FDE934FF-F4E1-47C5-9CA5-30A81DDE2BE4}" type="datetimeFigureOut">
               <a:rPr lang="en-US" smtClean="0"/>
-              <a:t>3/25/24</a:t>
+              <a:t>3/1/26</a:t>
             </a:fld>
             <a:endParaRPr lang="en-US"/>
           </a:p>
@@ -6755,7 +6761,7 @@
           <a:p>
             <a:fld id="{FDE934FF-F4E1-47C5-9CA5-30A81DDE2BE4}" type="datetimeFigureOut">
               <a:rPr lang="en-US" smtClean="0"/>
-              <a:t>3/25/24</a:t>
+              <a:t>3/1/26</a:t>
             </a:fld>
             <a:endParaRPr lang="en-US"/>
           </a:p>
@@ -6845,7 +6851,7 @@
           <a:p>
             <a:fld id="{FDE934FF-F4E1-47C5-9CA5-30A81DDE2BE4}" type="datetimeFigureOut">
               <a:rPr lang="en-US" smtClean="0"/>
-              <a:t>3/25/24</a:t>
+              <a:t>3/1/26</a:t>
             </a:fld>
             <a:endParaRPr lang="en-US"/>
           </a:p>
@@ -7092,7 +7098,7 @@
           <a:p>
             <a:fld id="{FDE934FF-F4E1-47C5-9CA5-30A81DDE2BE4}" type="datetimeFigureOut">
               <a:rPr lang="en-US" smtClean="0"/>
-              <a:t>3/25/24</a:t>
+              <a:t>3/1/26</a:t>
             </a:fld>
             <a:endParaRPr lang="en-US"/>
           </a:p>
@@ -7265,7 +7271,7 @@
           <a:p>
             <a:fld id="{FDE934FF-F4E1-47C5-9CA5-30A81DDE2BE4}" type="datetimeFigureOut">
               <a:rPr lang="en-US" smtClean="0"/>
-              <a:t>3/25/24</a:t>
+              <a:t>3/1/26</a:t>
             </a:fld>
             <a:endParaRPr lang="en-US"/>
           </a:p>
@@ -7471,7 +7477,7 @@
           <a:p>
             <a:fld id="{FDE934FF-F4E1-47C5-9CA5-30A81DDE2BE4}" type="datetimeFigureOut">
               <a:rPr lang="en-US" smtClean="0"/>
-              <a:t>3/25/24</a:t>
+              <a:t>3/1/26</a:t>
             </a:fld>
             <a:endParaRPr lang="en-US"/>
           </a:p>
@@ -8691,7 +8697,7 @@
         </p:blipFill>
         <p:spPr bwMode="auto">
           <a:xfrm>
-            <a:off x="9473404" y="934512"/>
+            <a:off x="505896" y="2594313"/>
             <a:ext cx="2518129" cy="1324048"/>
           </a:xfrm>
           <a:custGeom>
@@ -8755,36 +8761,6 @@
       </p:pic>
       <p:pic>
         <p:nvPicPr>
-          <p:cNvPr id="5" name="图片 4">
-            <a:extLst>
-              <a:ext uri="{FF2B5EF4-FFF2-40B4-BE49-F238E27FC236}">
-                <a16:creationId xmlns:a16="http://schemas.microsoft.com/office/drawing/2014/main" id="{83210C41-340A-13D5-9AAF-07C2C5E8F0C1}"/>
-              </a:ext>
-            </a:extLst>
-          </p:cNvPr>
-          <p:cNvPicPr>
-            <a:picLocks noChangeAspect="1"/>
-          </p:cNvPicPr>
-          <p:nvPr/>
-        </p:nvPicPr>
-        <p:blipFill>
-          <a:blip r:embed="rId5"/>
-          <a:stretch>
-            <a:fillRect/>
-          </a:stretch>
-        </p:blipFill>
-        <p:spPr>
-          <a:xfrm>
-            <a:off x="401619" y="2762631"/>
-            <a:ext cx="2881773" cy="1166432"/>
-          </a:xfrm>
-          <a:prstGeom prst="rect">
-            <a:avLst/>
-          </a:prstGeom>
-        </p:spPr>
-      </p:pic>
-      <p:pic>
-        <p:nvPicPr>
           <p:cNvPr id="12" name="Picture 2" descr="Vue.js - Wikipedia">
             <a:extLst>
               <a:ext uri="{FF2B5EF4-FFF2-40B4-BE49-F238E27FC236}">
@@ -8798,7 +8774,7 @@
           <p:nvPr/>
         </p:nvPicPr>
         <p:blipFill>
-          <a:blip r:embed="rId6">
+          <a:blip r:embed="rId5">
             <a:extLst>
               <a:ext uri="{28A0092B-C50C-407E-A947-70E740481C1C}">
                 <a14:useLocalDpi xmlns:a14="http://schemas.microsoft.com/office/drawing/2010/main" val="0"/>
@@ -8830,2253 +8806,12 @@
           </a:extLst>
         </p:spPr>
       </p:pic>
-    </p:spTree>
-    <p:custDataLst>
-      <p:tags r:id="rId1"/>
-    </p:custDataLst>
-  </p:cSld>
-  <p:clrMapOvr>
-    <a:masterClrMapping/>
-  </p:clrMapOvr>
-</p:sld>
-</file>
-
-<file path=ppt/slides/slide10.xml><?xml version="1.0" encoding="utf-8"?>
-<p:sld xmlns:a="http://schemas.openxmlformats.org/drawingml/2006/main" xmlns:r="http://schemas.openxmlformats.org/officeDocument/2006/relationships" xmlns:p="http://schemas.openxmlformats.org/presentationml/2006/main">
-  <p:cSld>
-    <p:bg>
-      <p:bgPr>
-        <a:solidFill>
-          <a:schemeClr val="bg1"/>
-        </a:solidFill>
-        <a:effectLst/>
-      </p:bgPr>
-    </p:bg>
-    <p:spTree>
-      <p:nvGrpSpPr>
-        <p:cNvPr id="1" name=""/>
-        <p:cNvGrpSpPr/>
-        <p:nvPr/>
-      </p:nvGrpSpPr>
-      <p:grpSpPr>
-        <a:xfrm>
-          <a:off x="0" y="0"/>
-          <a:ext cx="0" cy="0"/>
-          <a:chOff x="0" y="0"/>
-          <a:chExt cx="0" cy="0"/>
-        </a:xfrm>
-      </p:grpSpPr>
-      <p:sp useBgFill="1">
-        <p:nvSpPr>
-          <p:cNvPr id="6151" name="Rectangle 6150">
+      <p:pic>
+        <p:nvPicPr>
+          <p:cNvPr id="1026" name="Picture 2">
             <a:extLst>
               <a:ext uri="{FF2B5EF4-FFF2-40B4-BE49-F238E27FC236}">
-                <a16:creationId xmlns:a16="http://schemas.microsoft.com/office/drawing/2014/main" id="{F944E337-3E5D-4A1F-A5A1-2057F25B8A7B}"/>
-              </a:ext>
-              <a:ext uri="{C183D7F6-B498-43B3-948B-1728B52AA6E4}">
-                <adec:decorative xmlns:adec="http://schemas.microsoft.com/office/drawing/2017/decorative" val="1"/>
-              </a:ext>
-            </a:extLst>
-          </p:cNvPr>
-          <p:cNvSpPr>
-            <a:spLocks noGrp="1" noRot="1" noChangeAspect="1" noMove="1" noResize="1" noEditPoints="1" noAdjustHandles="1" noChangeArrowheads="1" noChangeShapeType="1" noTextEdit="1"/>
-          </p:cNvSpPr>
-          <p:nvPr>
-            <p:extLst>
-              <p:ext uri="{386F3935-93C4-4BCD-93E2-E3B085C9AB24}">
-                <p16:designElem xmlns:p16="http://schemas.microsoft.com/office/powerpoint/2015/main" val="1"/>
-              </p:ext>
-            </p:extLst>
-          </p:nvPr>
-        </p:nvSpPr>
-        <p:spPr>
-          <a:xfrm>
-            <a:off x="0" y="0"/>
-            <a:ext cx="12192000" cy="6858000"/>
-          </a:xfrm>
-          <a:prstGeom prst="rect">
-            <a:avLst/>
-          </a:prstGeom>
-          <a:ln w="12700" cap="flat" cmpd="sng" algn="ctr">
-            <a:noFill/>
-            <a:prstDash val="solid"/>
-            <a:miter lim="800000"/>
-          </a:ln>
-          <a:effectLst/>
-          <a:extLst>
-            <a:ext uri="{91240B29-F687-4F45-9708-019B960494DF}">
-              <a14:hiddenLine xmlns:a14="http://schemas.microsoft.com/office/drawing/2010/main" w="12700" cap="flat" cmpd="sng" algn="ctr">
-                <a:solidFill>
-                  <a:schemeClr val="accent1">
-                    <a:shade val="50000"/>
-                  </a:schemeClr>
-                </a:solidFill>
-                <a:prstDash val="solid"/>
-                <a:miter lim="800000"/>
-              </a14:hiddenLine>
-            </a:ext>
-          </a:extLst>
-        </p:spPr>
-        <p:style>
-          <a:lnRef idx="2">
-            <a:schemeClr val="accent1">
-              <a:shade val="50000"/>
-            </a:schemeClr>
-          </a:lnRef>
-          <a:fillRef idx="1">
-            <a:schemeClr val="accent1"/>
-          </a:fillRef>
-          <a:effectRef idx="0">
-            <a:schemeClr val="accent1"/>
-          </a:effectRef>
-          <a:fontRef idx="minor">
-            <a:schemeClr val="lt1"/>
-          </a:fontRef>
-        </p:style>
-        <p:txBody>
-          <a:bodyPr rtlCol="0" anchor="ctr"/>
-          <a:lstStyle/>
-          <a:p>
-            <a:pPr algn="ctr"/>
-            <a:endParaRPr lang="en-US"/>
-          </a:p>
-        </p:txBody>
-      </p:sp>
-      <p:sp>
-        <p:nvSpPr>
-          <p:cNvPr id="6153" name="Rectangle 6152">
-            <a:extLst>
-              <a:ext uri="{FF2B5EF4-FFF2-40B4-BE49-F238E27FC236}">
-                <a16:creationId xmlns:a16="http://schemas.microsoft.com/office/drawing/2014/main" id="{4DA50D69-7CF7-4844-B844-A2B821C77F24}"/>
-              </a:ext>
-              <a:ext uri="{C183D7F6-B498-43B3-948B-1728B52AA6E4}">
-                <adec:decorative xmlns:adec="http://schemas.microsoft.com/office/drawing/2017/decorative" val="1"/>
-              </a:ext>
-            </a:extLst>
-          </p:cNvPr>
-          <p:cNvSpPr>
-            <a:spLocks noGrp="1" noRot="1" noChangeAspect="1" noMove="1" noResize="1" noEditPoints="1" noAdjustHandles="1" noChangeArrowheads="1" noChangeShapeType="1" noTextEdit="1"/>
-          </p:cNvSpPr>
-          <p:nvPr>
-            <p:extLst>
-              <p:ext uri="{386F3935-93C4-4BCD-93E2-E3B085C9AB24}">
-                <p16:designElem xmlns:p16="http://schemas.microsoft.com/office/powerpoint/2015/main" val="1"/>
-              </p:ext>
-            </p:extLst>
-          </p:nvPr>
-        </p:nvSpPr>
-        <p:spPr>
-          <a:xfrm>
-            <a:off x="1" y="-7854"/>
-            <a:ext cx="12192000" cy="6865854"/>
-          </a:xfrm>
-          <a:prstGeom prst="rect">
-            <a:avLst/>
-          </a:prstGeom>
-          <a:solidFill>
-            <a:srgbClr val="82766A">
-              <a:alpha val="15000"/>
-            </a:srgbClr>
-          </a:solidFill>
-          <a:ln>
-            <a:noFill/>
-          </a:ln>
-        </p:spPr>
-        <p:style>
-          <a:lnRef idx="2">
-            <a:schemeClr val="accent1">
-              <a:shade val="50000"/>
-            </a:schemeClr>
-          </a:lnRef>
-          <a:fillRef idx="1">
-            <a:schemeClr val="accent1"/>
-          </a:fillRef>
-          <a:effectRef idx="0">
-            <a:schemeClr val="accent1"/>
-          </a:effectRef>
-          <a:fontRef idx="minor">
-            <a:schemeClr val="lt1"/>
-          </a:fontRef>
-        </p:style>
-        <p:txBody>
-          <a:bodyPr rtlCol="0" anchor="ctr"/>
-          <a:lstStyle/>
-          <a:p>
-            <a:pPr algn="ctr"/>
-            <a:endParaRPr lang="en-US"/>
-          </a:p>
-        </p:txBody>
-      </p:sp>
-      <p:sp>
-        <p:nvSpPr>
-          <p:cNvPr id="2" name="标题 1">
-            <a:extLst>
-              <a:ext uri="{FF2B5EF4-FFF2-40B4-BE49-F238E27FC236}">
-                <a16:creationId xmlns:a16="http://schemas.microsoft.com/office/drawing/2014/main" id="{164B82CE-6AC6-D7D3-1C6D-F35115FAC540}"/>
-              </a:ext>
-            </a:extLst>
-          </p:cNvPr>
-          <p:cNvSpPr>
-            <a:spLocks noGrp="1"/>
-          </p:cNvSpPr>
-          <p:nvPr>
-            <p:ph type="title"/>
-          </p:nvPr>
-        </p:nvSpPr>
-        <p:spPr>
-          <a:xfrm>
-            <a:off x="4572001" y="601744"/>
-            <a:ext cx="6781800" cy="1338696"/>
-          </a:xfrm>
-        </p:spPr>
-        <p:txBody>
-          <a:bodyPr>
-            <a:normAutofit/>
-          </a:bodyPr>
-          <a:lstStyle/>
-          <a:p>
-            <a:r>
-              <a:rPr kumimoji="1" lang="en-US" altLang="zh-CN"/>
-              <a:t>How</a:t>
-            </a:r>
-            <a:r>
-              <a:rPr kumimoji="1" lang="zh-CN" altLang="en-US"/>
-              <a:t>学习本课程</a:t>
-            </a:r>
-            <a:endParaRPr kumimoji="1" lang="zh-CN" altLang="en-US" dirty="0"/>
-          </a:p>
-        </p:txBody>
-      </p:sp>
-      <p:pic>
-        <p:nvPicPr>
-          <p:cNvPr id="6146" name="Picture 2" descr="纸上得来终觉浅，绝知此事要躬行。 诗词名句_词典网">
-            <a:extLst>
-              <a:ext uri="{FF2B5EF4-FFF2-40B4-BE49-F238E27FC236}">
-                <a16:creationId xmlns:a16="http://schemas.microsoft.com/office/drawing/2014/main" id="{87322E54-E04F-0C41-5B01-B103906D43C9}"/>
-              </a:ext>
-            </a:extLst>
-          </p:cNvPr>
-          <p:cNvPicPr>
-            <a:picLocks noChangeAspect="1" noChangeArrowheads="1"/>
-          </p:cNvPicPr>
-          <p:nvPr/>
-        </p:nvPicPr>
-        <p:blipFill rotWithShape="1">
-          <a:blip r:embed="rId2">
-            <a:extLst>
-              <a:ext uri="{28A0092B-C50C-407E-A947-70E740481C1C}">
-                <a14:useLocalDpi xmlns:a14="http://schemas.microsoft.com/office/drawing/2010/main" val="0"/>
-              </a:ext>
-            </a:extLst>
-          </a:blip>
-          <a:srcRect/>
-          <a:stretch/>
-        </p:blipFill>
-        <p:spPr bwMode="auto">
-          <a:xfrm>
-            <a:off x="20" y="10"/>
-            <a:ext cx="3754739" cy="6857990"/>
-          </a:xfrm>
-          <a:custGeom>
-            <a:avLst/>
-            <a:gdLst/>
-            <a:ahLst/>
-            <a:cxnLst/>
-            <a:rect l="l" t="t" r="r" b="b"/>
-            <a:pathLst>
-              <a:path w="3754759" h="6858000">
-                <a:moveTo>
-                  <a:pt x="0" y="0"/>
-                </a:moveTo>
-                <a:lnTo>
-                  <a:pt x="3405358" y="0"/>
-                </a:lnTo>
-                <a:lnTo>
-                  <a:pt x="3406298" y="5103"/>
-                </a:lnTo>
-                <a:cubicBezTo>
-                  <a:pt x="3408705" y="9272"/>
-                  <a:pt x="3410993" y="13534"/>
-                  <a:pt x="3408744" y="22806"/>
-                </a:cubicBezTo>
-                <a:cubicBezTo>
-                  <a:pt x="3398212" y="18869"/>
-                  <a:pt x="3412504" y="58782"/>
-                  <a:pt x="3403554" y="60481"/>
-                </a:cubicBezTo>
-                <a:cubicBezTo>
-                  <a:pt x="3417198" y="75379"/>
-                  <a:pt x="3401704" y="83956"/>
-                  <a:pt x="3406685" y="104437"/>
-                </a:cubicBezTo>
-                <a:cubicBezTo>
-                  <a:pt x="3412035" y="113935"/>
-                  <a:pt x="3413215" y="120918"/>
-                  <a:pt x="3408439" y="130745"/>
-                </a:cubicBezTo>
-                <a:cubicBezTo>
-                  <a:pt x="3434362" y="174436"/>
-                  <a:pt x="3410826" y="157826"/>
-                  <a:pt x="3422002" y="199353"/>
-                </a:cubicBezTo>
-                <a:cubicBezTo>
-                  <a:pt x="3433366" y="235046"/>
-                  <a:pt x="3441595" y="275734"/>
-                  <a:pt x="3466217" y="309590"/>
-                </a:cubicBezTo>
-                <a:cubicBezTo>
-                  <a:pt x="3473022" y="315692"/>
-                  <a:pt x="3476249" y="331335"/>
-                  <a:pt x="3473425" y="344525"/>
-                </a:cubicBezTo>
-                <a:cubicBezTo>
-                  <a:pt x="3472938" y="346792"/>
-                  <a:pt x="3472286" y="348904"/>
-                  <a:pt x="3471491" y="350788"/>
-                </a:cubicBezTo>
-                <a:cubicBezTo>
-                  <a:pt x="3476473" y="380853"/>
-                  <a:pt x="3497528" y="490678"/>
-                  <a:pt x="3503314" y="524915"/>
-                </a:cubicBezTo>
-                <a:cubicBezTo>
-                  <a:pt x="3495110" y="528110"/>
-                  <a:pt x="3511009" y="544789"/>
-                  <a:pt x="3506208" y="556205"/>
-                </a:cubicBezTo>
-                <a:cubicBezTo>
-                  <a:pt x="3501906" y="564424"/>
-                  <a:pt x="3505727" y="571402"/>
-                  <a:pt x="3506503" y="579730"/>
-                </a:cubicBezTo>
-                <a:cubicBezTo>
-                  <a:pt x="3503352" y="590904"/>
-                  <a:pt x="3511763" y="626437"/>
-                  <a:pt x="3516997" y="635552"/>
-                </a:cubicBezTo>
-                <a:cubicBezTo>
-                  <a:pt x="3534688" y="657082"/>
-                  <a:pt x="3524838" y="708447"/>
-                  <a:pt x="3538464" y="726388"/>
-                </a:cubicBezTo>
-                <a:cubicBezTo>
-                  <a:pt x="3540659" y="733032"/>
-                  <a:pt x="3541735" y="739585"/>
-                  <a:pt x="3542115" y="746049"/>
-                </a:cubicBezTo>
-                <a:lnTo>
-                  <a:pt x="3541598" y="764218"/>
-                </a:lnTo>
-                <a:lnTo>
-                  <a:pt x="3538294" y="769538"/>
-                </a:lnTo>
-                <a:lnTo>
-                  <a:pt x="3539714" y="780556"/>
-                </a:lnTo>
-                <a:lnTo>
-                  <a:pt x="3539328" y="783752"/>
-                </a:lnTo>
-                <a:cubicBezTo>
-                  <a:pt x="3538575" y="789859"/>
-                  <a:pt x="3537953" y="795880"/>
-                  <a:pt x="3537882" y="801812"/>
-                </a:cubicBezTo>
-                <a:cubicBezTo>
-                  <a:pt x="3555332" y="793164"/>
-                  <a:pt x="3540143" y="850853"/>
-                  <a:pt x="3553763" y="833773"/>
-                </a:cubicBezTo>
-                <a:cubicBezTo>
-                  <a:pt x="3556400" y="864868"/>
-                  <a:pt x="3568671" y="840452"/>
-                  <a:pt x="3557696" y="878520"/>
-                </a:cubicBezTo>
-                <a:cubicBezTo>
-                  <a:pt x="3574636" y="926170"/>
-                  <a:pt x="3572932" y="1002669"/>
-                  <a:pt x="3596902" y="1039468"/>
-                </a:cubicBezTo>
-                <a:cubicBezTo>
-                  <a:pt x="3588227" y="1035176"/>
-                  <a:pt x="3582669" y="1055878"/>
-                  <a:pt x="3587550" y="1069793"/>
-                </a:cubicBezTo>
-                <a:cubicBezTo>
-                  <a:pt x="3553603" y="1054905"/>
-                  <a:pt x="3620138" y="1124159"/>
-                  <a:pt x="3598129" y="1137690"/>
-                </a:cubicBezTo>
-                <a:cubicBezTo>
-                  <a:pt x="3619154" y="1137277"/>
-                  <a:pt x="3657845" y="1198819"/>
-                  <a:pt x="3642072" y="1229443"/>
-                </a:cubicBezTo>
-                <a:cubicBezTo>
-                  <a:pt x="3648492" y="1274612"/>
-                  <a:pt x="3667414" y="1305895"/>
-                  <a:pt x="3662799" y="1353804"/>
-                </a:cubicBezTo>
-                <a:cubicBezTo>
-                  <a:pt x="3665680" y="1355144"/>
-                  <a:pt x="3668149" y="1357448"/>
-                  <a:pt x="3670319" y="1360420"/>
-                </a:cubicBezTo>
-                <a:lnTo>
-                  <a:pt x="3675717" y="1370453"/>
-                </a:lnTo>
-                <a:lnTo>
-                  <a:pt x="3675458" y="1372456"/>
-                </a:lnTo>
-                <a:cubicBezTo>
-                  <a:pt x="3675775" y="1380261"/>
-                  <a:pt x="3677154" y="1384198"/>
-                  <a:pt x="3678998" y="1386422"/>
-                </a:cubicBezTo>
-                <a:lnTo>
-                  <a:pt x="3681613" y="1387932"/>
-                </a:lnTo>
-                <a:lnTo>
-                  <a:pt x="3684619" y="1397028"/>
-                </a:lnTo>
-                <a:lnTo>
-                  <a:pt x="3692094" y="1413643"/>
-                </a:lnTo>
-                <a:lnTo>
-                  <a:pt x="3692036" y="1417975"/>
-                </a:lnTo>
-                <a:lnTo>
-                  <a:pt x="3701043" y="1444940"/>
-                </a:lnTo>
-                <a:lnTo>
-                  <a:pt x="3700474" y="1445893"/>
-                </a:lnTo>
-                <a:cubicBezTo>
-                  <a:pt x="3699407" y="1448641"/>
-                  <a:pt x="3699006" y="1451835"/>
-                  <a:pt x="3699990" y="1456030"/>
-                </a:cubicBezTo>
-                <a:cubicBezTo>
-                  <a:pt x="3688343" y="1458099"/>
-                  <a:pt x="3696713" y="1461887"/>
-                  <a:pt x="3700642" y="1474079"/>
-                </a:cubicBezTo>
-                <a:cubicBezTo>
-                  <a:pt x="3683431" y="1480016"/>
-                  <a:pt x="3700716" y="1509516"/>
-                  <a:pt x="3693587" y="1522890"/>
-                </a:cubicBezTo>
-                <a:cubicBezTo>
-                  <a:pt x="3696861" y="1531716"/>
-                  <a:pt x="3700010" y="1541157"/>
-                  <a:pt x="3702900" y="1551068"/>
-                </a:cubicBezTo>
-                <a:lnTo>
-                  <a:pt x="3708038" y="1631578"/>
-                </a:lnTo>
-                <a:lnTo>
-                  <a:pt x="3698097" y="1716642"/>
-                </a:lnTo>
-                <a:cubicBezTo>
-                  <a:pt x="3699314" y="1747867"/>
-                  <a:pt x="3695412" y="1775147"/>
-                  <a:pt x="3700384" y="1801382"/>
-                </a:cubicBezTo>
-                <a:cubicBezTo>
-                  <a:pt x="3696845" y="1812311"/>
-                  <a:pt x="3695699" y="1822504"/>
-                  <a:pt x="3702257" y="1832013"/>
-                </a:cubicBezTo>
-                <a:cubicBezTo>
-                  <a:pt x="3701651" y="1861238"/>
-                  <a:pt x="3693313" y="1868713"/>
-                  <a:pt x="3700986" y="1886838"/>
-                </a:cubicBezTo>
-                <a:cubicBezTo>
-                  <a:pt x="3687741" y="1903887"/>
-                  <a:pt x="3693148" y="1904594"/>
-                  <a:pt x="3697545" y="1912087"/>
-                </a:cubicBezTo>
-                <a:lnTo>
-                  <a:pt x="3697885" y="1913171"/>
-                </a:lnTo>
-                <a:lnTo>
-                  <a:pt x="3695987" y="1915505"/>
-                </a:lnTo>
-                <a:lnTo>
-                  <a:pt x="3695284" y="1920179"/>
-                </a:lnTo>
-                <a:lnTo>
-                  <a:pt x="3696499" y="1932787"/>
-                </a:lnTo>
-                <a:lnTo>
-                  <a:pt x="3697473" y="1937503"/>
-                </a:lnTo>
-                <a:cubicBezTo>
-                  <a:pt x="3697953" y="1940760"/>
-                  <a:pt x="3698023" y="1942937"/>
-                  <a:pt x="3697799" y="1944457"/>
-                </a:cubicBezTo>
-                <a:lnTo>
-                  <a:pt x="3697642" y="1944638"/>
-                </a:lnTo>
-                <a:lnTo>
-                  <a:pt x="3698268" y="1951136"/>
-                </a:lnTo>
-                <a:cubicBezTo>
-                  <a:pt x="3699704" y="1962083"/>
-                  <a:pt x="3701457" y="1972719"/>
-                  <a:pt x="3703418" y="1982828"/>
-                </a:cubicBezTo>
-                <a:cubicBezTo>
-                  <a:pt x="3694620" y="1991887"/>
-                  <a:pt x="3707345" y="2028973"/>
-                  <a:pt x="3689767" y="2025705"/>
-                </a:cubicBezTo>
-                <a:cubicBezTo>
-                  <a:pt x="3691896" y="2039367"/>
-                  <a:pt x="3699517" y="2047321"/>
-                  <a:pt x="3687894" y="2043252"/>
-                </a:cubicBezTo>
-                <a:cubicBezTo>
-                  <a:pt x="3688268" y="2047766"/>
-                  <a:pt x="3687435" y="2050599"/>
-                  <a:pt x="3686015" y="2052668"/>
-                </a:cubicBezTo>
-                <a:lnTo>
-                  <a:pt x="3685329" y="2053280"/>
-                </a:lnTo>
-                <a:lnTo>
-                  <a:pt x="3690348" y="2083660"/>
-                </a:lnTo>
-                <a:lnTo>
-                  <a:pt x="3689688" y="2087758"/>
-                </a:lnTo>
-                <a:lnTo>
-                  <a:pt x="3694656" y="2107476"/>
-                </a:lnTo>
-                <a:lnTo>
-                  <a:pt x="3696317" y="2117709"/>
-                </a:lnTo>
-                <a:lnTo>
-                  <a:pt x="3698652" y="2120508"/>
-                </a:lnTo>
-                <a:cubicBezTo>
-                  <a:pt x="3700138" y="2123582"/>
-                  <a:pt x="3700933" y="2128051"/>
-                  <a:pt x="3700157" y="2135655"/>
-                </a:cubicBezTo>
-                <a:lnTo>
-                  <a:pt x="3699626" y="2137431"/>
-                </a:lnTo>
-                <a:lnTo>
-                  <a:pt x="3703486" y="2149795"/>
-                </a:lnTo>
-                <a:cubicBezTo>
-                  <a:pt x="3705184" y="2153754"/>
-                  <a:pt x="3707268" y="2157232"/>
-                  <a:pt x="3709885" y="2160002"/>
-                </a:cubicBezTo>
-                <a:cubicBezTo>
-                  <a:pt x="3698737" y="2203287"/>
-                  <a:pt x="3712805" y="2242927"/>
-                  <a:pt x="3712777" y="2289319"/>
-                </a:cubicBezTo>
-                <a:cubicBezTo>
-                  <a:pt x="3693169" y="2310331"/>
-                  <a:pt x="3722276" y="2389074"/>
-                  <a:pt x="3742794" y="2399589"/>
-                </a:cubicBezTo>
-                <a:cubicBezTo>
-                  <a:pt x="3725319" y="2400703"/>
-                  <a:pt x="3751962" y="2457534"/>
-                  <a:pt x="3753311" y="2472464"/>
-                </a:cubicBezTo>
-                <a:cubicBezTo>
-                  <a:pt x="3753760" y="2477441"/>
-                  <a:pt x="3751399" y="2477762"/>
-                  <a:pt x="3743656" y="2469811"/>
-                </a:cubicBezTo>
-                <a:cubicBezTo>
-                  <a:pt x="3746474" y="2485608"/>
-                  <a:pt x="3738186" y="2502460"/>
-                  <a:pt x="3730339" y="2493869"/>
-                </a:cubicBezTo>
-                <a:cubicBezTo>
-                  <a:pt x="3748556" y="2541387"/>
-                  <a:pt x="3736267" y="2613433"/>
-                  <a:pt x="3746134" y="2667651"/>
-                </a:cubicBezTo>
-                <a:cubicBezTo>
-                  <a:pt x="3730160" y="2698252"/>
-                  <a:pt x="3745496" y="2681337"/>
-                  <a:pt x="3743743" y="2712354"/>
-                </a:cubicBezTo>
-                <a:cubicBezTo>
-                  <a:pt x="3759373" y="2703131"/>
-                  <a:pt x="3736572" y="2750256"/>
-                  <a:pt x="3754759" y="2751060"/>
-                </a:cubicBezTo>
-                <a:cubicBezTo>
-                  <a:pt x="3753864" y="2756679"/>
-                  <a:pt x="3752424" y="2762098"/>
-                  <a:pt x="3750841" y="2767527"/>
-                </a:cubicBezTo>
-                <a:lnTo>
-                  <a:pt x="3750021" y="2770377"/>
-                </a:lnTo>
-                <a:lnTo>
-                  <a:pt x="3749874" y="2781617"/>
-                </a:lnTo>
-                <a:lnTo>
-                  <a:pt x="3745916" y="2784975"/>
-                </a:lnTo>
-                <a:lnTo>
-                  <a:pt x="3742888" y="2802030"/>
-                </a:lnTo>
-                <a:cubicBezTo>
-                  <a:pt x="3742360" y="2808388"/>
-                  <a:pt x="3742498" y="2815196"/>
-                  <a:pt x="3743710" y="2822667"/>
-                </a:cubicBezTo>
-                <a:cubicBezTo>
-                  <a:pt x="3751787" y="2840797"/>
-                  <a:pt x="3744398" y="2870002"/>
-                  <a:pt x="3746201" y="2896003"/>
-                </a:cubicBezTo>
-                <a:lnTo>
-                  <a:pt x="3749006" y="2907846"/>
-                </a:lnTo>
-                <a:lnTo>
-                  <a:pt x="3747206" y="2947037"/>
-                </a:lnTo>
-                <a:cubicBezTo>
-                  <a:pt x="3747030" y="2958176"/>
-                  <a:pt x="3747214" y="2969719"/>
-                  <a:pt x="3748070" y="2981841"/>
-                </a:cubicBezTo>
-                <a:lnTo>
-                  <a:pt x="3750937" y="3004278"/>
-                </a:lnTo>
-                <a:lnTo>
-                  <a:pt x="3749761" y="3010254"/>
-                </a:lnTo>
-                <a:cubicBezTo>
-                  <a:pt x="3750425" y="3020530"/>
-                  <a:pt x="3756245" y="3033889"/>
-                  <a:pt x="3749923" y="3032983"/>
-                </a:cubicBezTo>
-                <a:lnTo>
-                  <a:pt x="3752658" y="3044429"/>
-                </a:lnTo>
-                <a:lnTo>
-                  <a:pt x="3748217" y="3056076"/>
-                </a:lnTo>
-                <a:cubicBezTo>
-                  <a:pt x="3747117" y="3057381"/>
-                  <a:pt x="3745928" y="3058381"/>
-                  <a:pt x="3744691" y="3059042"/>
-                </a:cubicBezTo>
-                <a:lnTo>
-                  <a:pt x="3747123" y="3075102"/>
-                </a:lnTo>
-                <a:lnTo>
-                  <a:pt x="3744190" y="3088509"/>
-                </a:lnTo>
-                <a:lnTo>
-                  <a:pt x="3747093" y="3099930"/>
-                </a:lnTo>
-                <a:lnTo>
-                  <a:pt x="3746799" y="3104743"/>
-                </a:lnTo>
-                <a:lnTo>
-                  <a:pt x="3745610" y="3116729"/>
-                </a:lnTo>
-                <a:cubicBezTo>
-                  <a:pt x="3744666" y="3122891"/>
-                  <a:pt x="3743503" y="3129792"/>
-                  <a:pt x="3742676" y="3137453"/>
-                </a:cubicBezTo>
-                <a:lnTo>
-                  <a:pt x="3742441" y="3143884"/>
-                </a:lnTo>
-                <a:lnTo>
-                  <a:pt x="3737104" y="3158122"/>
-                </a:lnTo>
-                <a:cubicBezTo>
-                  <a:pt x="3733050" y="3168490"/>
-                  <a:pt x="3730374" y="3176626"/>
-                  <a:pt x="3733275" y="3185367"/>
-                </a:cubicBezTo>
-                <a:cubicBezTo>
-                  <a:pt x="3728135" y="3200760"/>
-                  <a:pt x="3712176" y="3212117"/>
-                  <a:pt x="3717639" y="3233769"/>
-                </a:cubicBezTo>
-                <a:cubicBezTo>
-                  <a:pt x="3709851" y="3227497"/>
-                  <a:pt x="3717920" y="3258095"/>
-                  <a:pt x="3710433" y="3262123"/>
-                </a:cubicBezTo>
-                <a:cubicBezTo>
-                  <a:pt x="3704342" y="3264110"/>
-                  <a:pt x="3705370" y="3273856"/>
-                  <a:pt x="3703458" y="3281408"/>
-                </a:cubicBezTo>
-                <a:cubicBezTo>
-                  <a:pt x="3697412" y="3287020"/>
-                  <a:pt x="3693483" y="3324746"/>
-                  <a:pt x="3695027" y="3337739"/>
-                </a:cubicBezTo>
-                <a:cubicBezTo>
-                  <a:pt x="3703095" y="3374177"/>
-                  <a:pt x="3679154" y="3404974"/>
-                  <a:pt x="3684951" y="3434139"/>
-                </a:cubicBezTo>
-                <a:cubicBezTo>
-                  <a:pt x="3684732" y="3441861"/>
-                  <a:pt x="3683615" y="3448308"/>
-                  <a:pt x="3681946" y="3453928"/>
-                </a:cubicBezTo>
-                <a:lnTo>
-                  <a:pt x="3675939" y="3468021"/>
-                </a:lnTo>
-                <a:cubicBezTo>
-                  <a:pt x="3674480" y="3468264"/>
-                  <a:pt x="3673022" y="3468506"/>
-                  <a:pt x="3671563" y="3468748"/>
-                </a:cubicBezTo>
-                <a:lnTo>
-                  <a:pt x="3669360" y="3479164"/>
-                </a:lnTo>
-                <a:lnTo>
-                  <a:pt x="3668060" y="3481325"/>
-                </a:lnTo>
-                <a:cubicBezTo>
-                  <a:pt x="3665560" y="3485437"/>
-                  <a:pt x="3663197" y="3489622"/>
-                  <a:pt x="3661315" y="3494328"/>
-                </a:cubicBezTo>
-                <a:cubicBezTo>
-                  <a:pt x="3678446" y="3506175"/>
-                  <a:pt x="3648136" y="3536311"/>
-                  <a:pt x="3664679" y="3537226"/>
-                </a:cubicBezTo>
-                <a:cubicBezTo>
-                  <a:pt x="3657322" y="3565147"/>
-                  <a:pt x="3674997" y="3558694"/>
-                  <a:pt x="3654205" y="3577551"/>
-                </a:cubicBezTo>
-                <a:cubicBezTo>
-                  <a:pt x="3653633" y="3634248"/>
-                  <a:pt x="3628736" y="3694092"/>
-                  <a:pt x="3637325" y="3749618"/>
-                </a:cubicBezTo>
-                <a:cubicBezTo>
-                  <a:pt x="3631446" y="3736800"/>
-                  <a:pt x="3620480" y="3747498"/>
-                  <a:pt x="3620258" y="3763981"/>
-                </a:cubicBezTo>
-                <a:cubicBezTo>
-                  <a:pt x="3596667" y="3715365"/>
-                  <a:pt x="3630603" y="3842969"/>
-                  <a:pt x="3608193" y="3830141"/>
-                </a:cubicBezTo>
-                <a:cubicBezTo>
-                  <a:pt x="3625759" y="3852486"/>
-                  <a:pt x="3638965" y="3943841"/>
-                  <a:pt x="3616479" y="3951521"/>
-                </a:cubicBezTo>
-                <a:cubicBezTo>
-                  <a:pt x="3607940" y="3994867"/>
-                  <a:pt x="3614033" y="4040502"/>
-                  <a:pt x="3595498" y="4074157"/>
-                </a:cubicBezTo>
-                <a:cubicBezTo>
-                  <a:pt x="3597477" y="4078342"/>
-                  <a:pt x="3598819" y="4082864"/>
-                  <a:pt x="3599706" y="4087599"/>
-                </a:cubicBezTo>
-                <a:lnTo>
-                  <a:pt x="3601103" y="4101515"/>
-                </a:lnTo>
-                <a:lnTo>
-                  <a:pt x="3600274" y="4102849"/>
-                </a:lnTo>
-                <a:cubicBezTo>
-                  <a:pt x="3598143" y="4109482"/>
-                  <a:pt x="3598077" y="4114144"/>
-                  <a:pt x="3598925" y="4117926"/>
-                </a:cubicBezTo>
-                <a:lnTo>
-                  <a:pt x="3600630" y="4121966"/>
-                </a:lnTo>
-                <a:lnTo>
-                  <a:pt x="3600331" y="4132543"/>
-                </a:lnTo>
-                <a:lnTo>
-                  <a:pt x="3601432" y="4154003"/>
-                </a:lnTo>
-                <a:lnTo>
-                  <a:pt x="3600054" y="4157433"/>
-                </a:lnTo>
-                <a:lnTo>
-                  <a:pt x="3599248" y="4188888"/>
-                </a:lnTo>
-                <a:cubicBezTo>
-                  <a:pt x="3598993" y="4188940"/>
-                  <a:pt x="3598738" y="4188992"/>
-                  <a:pt x="3598484" y="4189044"/>
-                </a:cubicBezTo>
-                <a:cubicBezTo>
-                  <a:pt x="3596754" y="4190111"/>
-                  <a:pt x="3595443" y="4192250"/>
-                  <a:pt x="3594971" y="4196698"/>
-                </a:cubicBezTo>
-                <a:cubicBezTo>
-                  <a:pt x="3584674" y="4185805"/>
-                  <a:pt x="3590455" y="4197885"/>
-                  <a:pt x="3589971" y="4211958"/>
-                </a:cubicBezTo>
-                <a:cubicBezTo>
-                  <a:pt x="3573870" y="4198179"/>
-                  <a:pt x="3579156" y="4240607"/>
-                  <a:pt x="3569135" y="4243705"/>
-                </a:cubicBezTo>
-                <a:cubicBezTo>
-                  <a:pt x="3569142" y="4254351"/>
-                  <a:pt x="3568856" y="4265362"/>
-                  <a:pt x="3568210" y="4276468"/>
-                </a:cubicBezTo>
-                <a:lnTo>
-                  <a:pt x="3567613" y="4282925"/>
-                </a:lnTo>
-                <a:cubicBezTo>
-                  <a:pt x="3567553" y="4282949"/>
-                  <a:pt x="3567492" y="4282974"/>
-                  <a:pt x="3567432" y="4282999"/>
-                </a:cubicBezTo>
-                <a:cubicBezTo>
-                  <a:pt x="3566940" y="4284280"/>
-                  <a:pt x="3566607" y="4286359"/>
-                  <a:pt x="3566464" y="4289697"/>
-                </a:cubicBezTo>
-                <a:lnTo>
-                  <a:pt x="3566526" y="4294698"/>
-                </a:lnTo>
-                <a:lnTo>
-                  <a:pt x="3565367" y="4307225"/>
-                </a:lnTo>
-                <a:lnTo>
-                  <a:pt x="3563841" y="4311164"/>
-                </a:lnTo>
-                <a:lnTo>
-                  <a:pt x="3561610" y="4312189"/>
-                </a:lnTo>
-                <a:lnTo>
-                  <a:pt x="3561734" y="4313408"/>
-                </a:lnTo>
-                <a:cubicBezTo>
-                  <a:pt x="3564537" y="4323096"/>
-                  <a:pt x="3569544" y="4327053"/>
-                  <a:pt x="3553832" y="4334910"/>
-                </a:cubicBezTo>
-                <a:cubicBezTo>
-                  <a:pt x="3557797" y="4356533"/>
-                  <a:pt x="3548502" y="4358433"/>
-                  <a:pt x="3542564" y="4385380"/>
-                </a:cubicBezTo>
-                <a:cubicBezTo>
-                  <a:pt x="3547050" y="4398267"/>
-                  <a:pt x="3544091" y="4407098"/>
-                  <a:pt x="3538724" y="4415150"/>
-                </a:cubicBezTo>
-                <a:cubicBezTo>
-                  <a:pt x="3538633" y="4442707"/>
-                  <a:pt x="3529920" y="4465824"/>
-                  <a:pt x="3525348" y="4495753"/>
-                </a:cubicBezTo>
-                <a:cubicBezTo>
-                  <a:pt x="3529387" y="4530212"/>
-                  <a:pt x="3514579" y="4543935"/>
-                  <a:pt x="3509749" y="4575934"/>
-                </a:cubicBezTo>
-                <a:cubicBezTo>
-                  <a:pt x="3519579" y="4606914"/>
-                  <a:pt x="3496418" y="4596497"/>
-                  <a:pt x="3489779" y="4611927"/>
-                </a:cubicBezTo>
-                <a:lnTo>
-                  <a:pt x="3488856" y="4616508"/>
-                </a:lnTo>
-                <a:lnTo>
-                  <a:pt x="3489486" y="4629163"/>
-                </a:lnTo>
-                <a:lnTo>
-                  <a:pt x="3490242" y="4633947"/>
-                </a:lnTo>
-                <a:cubicBezTo>
-                  <a:pt x="3490570" y="4637233"/>
-                  <a:pt x="3490539" y="4639406"/>
-                  <a:pt x="3490244" y="4640894"/>
-                </a:cubicBezTo>
-                <a:lnTo>
-                  <a:pt x="3490078" y="4641059"/>
-                </a:lnTo>
-                <a:lnTo>
-                  <a:pt x="3490403" y="4647582"/>
-                </a:lnTo>
-                <a:cubicBezTo>
-                  <a:pt x="3491330" y="4658608"/>
-                  <a:pt x="3492590" y="4669354"/>
-                  <a:pt x="3494082" y="4679601"/>
-                </a:cubicBezTo>
-                <a:cubicBezTo>
-                  <a:pt x="3484854" y="4687754"/>
-                  <a:pt x="3495864" y="4725869"/>
-                  <a:pt x="3478421" y="4720918"/>
-                </a:cubicBezTo>
-                <a:cubicBezTo>
-                  <a:pt x="3479918" y="4734712"/>
-                  <a:pt x="3487176" y="4743359"/>
-                  <a:pt x="3475730" y="4738188"/>
-                </a:cubicBezTo>
-                <a:cubicBezTo>
-                  <a:pt x="3475894" y="4742712"/>
-                  <a:pt x="3474928" y="4745450"/>
-                  <a:pt x="3473409" y="4747368"/>
-                </a:cubicBezTo>
-                <a:lnTo>
-                  <a:pt x="3472696" y="4747913"/>
-                </a:lnTo>
-                <a:lnTo>
-                  <a:pt x="3476304" y="4778609"/>
-                </a:lnTo>
-                <a:lnTo>
-                  <a:pt x="3475454" y="4782623"/>
-                </a:lnTo>
-                <a:lnTo>
-                  <a:pt x="3479507" y="4802712"/>
-                </a:lnTo>
-                <a:lnTo>
-                  <a:pt x="3480695" y="4813049"/>
-                </a:lnTo>
-                <a:lnTo>
-                  <a:pt x="3482902" y="4816057"/>
-                </a:lnTo>
-                <a:cubicBezTo>
-                  <a:pt x="3484247" y="4819259"/>
-                  <a:pt x="3484834" y="4823783"/>
-                  <a:pt x="3483703" y="4831270"/>
-                </a:cubicBezTo>
-                <a:lnTo>
-                  <a:pt x="3483090" y="4832984"/>
-                </a:lnTo>
-                <a:lnTo>
-                  <a:pt x="3486378" y="4845654"/>
-                </a:lnTo>
-                <a:cubicBezTo>
-                  <a:pt x="3487893" y="4849755"/>
-                  <a:pt x="3489817" y="4853416"/>
-                  <a:pt x="3492309" y="4856425"/>
-                </a:cubicBezTo>
-                <a:cubicBezTo>
-                  <a:pt x="3479133" y="4898390"/>
-                  <a:pt x="3491371" y="4939174"/>
-                  <a:pt x="3489182" y="4985308"/>
-                </a:cubicBezTo>
-                <a:cubicBezTo>
-                  <a:pt x="3492413" y="5037202"/>
-                  <a:pt x="3496839" y="5073159"/>
-                  <a:pt x="3498182" y="5107346"/>
-                </a:cubicBezTo>
-                <a:cubicBezTo>
-                  <a:pt x="3500266" y="5123329"/>
-                  <a:pt x="3506680" y="5240376"/>
-                  <a:pt x="3499225" y="5231073"/>
-                </a:cubicBezTo>
-                <a:cubicBezTo>
-                  <a:pt x="3515247" y="5280090"/>
-                  <a:pt x="3497607" y="5309911"/>
-                  <a:pt x="3504960" y="5364785"/>
-                </a:cubicBezTo>
-                <a:cubicBezTo>
-                  <a:pt x="3487546" y="5393671"/>
-                  <a:pt x="3503686" y="5378336"/>
-                  <a:pt x="3500486" y="5409009"/>
-                </a:cubicBezTo>
-                <a:cubicBezTo>
-                  <a:pt x="3516561" y="5401350"/>
-                  <a:pt x="3491544" y="5446009"/>
-                  <a:pt x="3509710" y="5448570"/>
-                </a:cubicBezTo>
-                <a:cubicBezTo>
-                  <a:pt x="3508555" y="5454072"/>
-                  <a:pt x="3506859" y="5459319"/>
-                  <a:pt x="3505022" y="5464568"/>
-                </a:cubicBezTo>
-                <a:lnTo>
-                  <a:pt x="3504070" y="5467320"/>
-                </a:lnTo>
-                <a:lnTo>
-                  <a:pt x="3503399" y="5478483"/>
-                </a:lnTo>
-                <a:lnTo>
-                  <a:pt x="3499281" y="5481443"/>
-                </a:lnTo>
-                <a:lnTo>
-                  <a:pt x="3499047" y="5616712"/>
-                </a:lnTo>
-                <a:cubicBezTo>
-                  <a:pt x="3502347" y="5628424"/>
-                  <a:pt x="3503819" y="5666768"/>
-                  <a:pt x="3498775" y="5675291"/>
-                </a:cubicBezTo>
-                <a:cubicBezTo>
-                  <a:pt x="3497984" y="5683547"/>
-                  <a:pt x="3500335" y="5692400"/>
-                  <a:pt x="3494739" y="5697458"/>
-                </a:cubicBezTo>
-                <a:cubicBezTo>
-                  <a:pt x="3492180" y="5715432"/>
-                  <a:pt x="3486290" y="5756597"/>
-                  <a:pt x="3483423" y="5783137"/>
-                </a:cubicBezTo>
-                <a:cubicBezTo>
-                  <a:pt x="3491452" y="5796973"/>
-                  <a:pt x="3477643" y="5819988"/>
-                  <a:pt x="3477532" y="5856699"/>
-                </a:cubicBezTo>
-                <a:cubicBezTo>
-                  <a:pt x="3486776" y="5871818"/>
-                  <a:pt x="3477340" y="5881447"/>
-                  <a:pt x="3490032" y="5910638"/>
-                </a:cubicBezTo>
-                <a:cubicBezTo>
-                  <a:pt x="3488930" y="5911913"/>
-                  <a:pt x="3487924" y="5913488"/>
-                  <a:pt x="3487046" y="5915313"/>
-                </a:cubicBezTo>
-                <a:cubicBezTo>
-                  <a:pt x="3481941" y="5925917"/>
-                  <a:pt x="3482137" y="5942505"/>
-                  <a:pt x="3487484" y="5952365"/>
-                </a:cubicBezTo>
-                <a:cubicBezTo>
-                  <a:pt x="3504666" y="5999029"/>
-                  <a:pt x="3505019" y="6042078"/>
-                  <a:pt x="3509266" y="6082373"/>
-                </a:cubicBezTo>
-                <a:cubicBezTo>
-                  <a:pt x="3512265" y="6128005"/>
-                  <a:pt x="3492950" y="6098121"/>
-                  <a:pt x="3509564" y="6154771"/>
-                </a:cubicBezTo>
-                <a:cubicBezTo>
-                  <a:pt x="3503223" y="6161045"/>
-                  <a:pt x="3503062" y="6168289"/>
-                  <a:pt x="3506404" y="6180433"/>
-                </a:cubicBezTo>
-                <a:cubicBezTo>
-                  <a:pt x="3507378" y="6202614"/>
-                  <a:pt x="3491084" y="6201180"/>
-                  <a:pt x="3501312" y="6223427"/>
-                </a:cubicBezTo>
-                <a:cubicBezTo>
-                  <a:pt x="3492497" y="6219559"/>
-                  <a:pt x="3498753" y="6265580"/>
-                  <a:pt x="3489469" y="6255476"/>
-                </a:cubicBezTo>
-                <a:cubicBezTo>
-                  <a:pt x="3481791" y="6270065"/>
-                  <a:pt x="3495037" y="6276996"/>
-                  <a:pt x="3488398" y="6291462"/>
-                </a:cubicBezTo>
-                <a:cubicBezTo>
-                  <a:pt x="3487099" y="6307679"/>
-                  <a:pt x="3497555" y="6282019"/>
-                  <a:pt x="3498547" y="6299935"/>
-                </a:cubicBezTo>
-                <a:cubicBezTo>
-                  <a:pt x="3498173" y="6321676"/>
-                  <a:pt x="3514193" y="6321381"/>
-                  <a:pt x="3494028" y="6338390"/>
-                </a:cubicBezTo>
-                <a:lnTo>
-                  <a:pt x="3486030" y="6396716"/>
-                </a:lnTo>
-                <a:cubicBezTo>
-                  <a:pt x="3491309" y="6409668"/>
-                  <a:pt x="3488928" y="6420134"/>
-                  <a:pt x="3484103" y="6430386"/>
-                </a:cubicBezTo>
-                <a:cubicBezTo>
-                  <a:pt x="3485763" y="6460632"/>
-                  <a:pt x="3478568" y="6488285"/>
-                  <a:pt x="3475922" y="6522318"/>
-                </a:cubicBezTo>
-                <a:cubicBezTo>
-                  <a:pt x="3482128" y="6559051"/>
-                  <a:pt x="3468277" y="6578006"/>
-                  <a:pt x="3465506" y="6614374"/>
-                </a:cubicBezTo>
-                <a:cubicBezTo>
-                  <a:pt x="3478925" y="6650248"/>
-                  <a:pt x="3446064" y="6638174"/>
-                  <a:pt x="3446789" y="6668768"/>
-                </a:cubicBezTo>
-                <a:cubicBezTo>
-                  <a:pt x="3458869" y="6718505"/>
-                  <a:pt x="3435878" y="6667592"/>
-                  <a:pt x="3439582" y="6744454"/>
-                </a:cubicBezTo>
-                <a:cubicBezTo>
-                  <a:pt x="3441631" y="6748797"/>
-                  <a:pt x="3439393" y="6758101"/>
-                  <a:pt x="3436538" y="6757102"/>
-                </a:cubicBezTo>
-                <a:cubicBezTo>
-                  <a:pt x="3437461" y="6773941"/>
-                  <a:pt x="3420846" y="6822488"/>
-                  <a:pt x="3424061" y="6846522"/>
-                </a:cubicBezTo>
-                <a:lnTo>
-                  <a:pt x="3423032" y="6858000"/>
-                </a:lnTo>
-                <a:lnTo>
-                  <a:pt x="0" y="6858000"/>
-                </a:lnTo>
-                <a:close/>
-              </a:path>
-            </a:pathLst>
-          </a:custGeom>
-          <a:noFill/>
-          <a:extLst>
-            <a:ext uri="{909E8E84-426E-40DD-AFC4-6F175D3DCCD1}">
-              <a14:hiddenFill xmlns:a14="http://schemas.microsoft.com/office/drawing/2010/main">
-                <a:solidFill>
-                  <a:srgbClr val="FFFFFF"/>
-                </a:solidFill>
-              </a14:hiddenFill>
-            </a:ext>
-          </a:extLst>
-        </p:spPr>
-      </p:pic>
-      <p:sp>
-        <p:nvSpPr>
-          <p:cNvPr id="3" name="内容占位符 2">
-            <a:extLst>
-              <a:ext uri="{FF2B5EF4-FFF2-40B4-BE49-F238E27FC236}">
-                <a16:creationId xmlns:a16="http://schemas.microsoft.com/office/drawing/2014/main" id="{0D753EEE-87AF-8B9A-6117-9407F4AF58C7}"/>
-              </a:ext>
-            </a:extLst>
-          </p:cNvPr>
-          <p:cNvSpPr>
-            <a:spLocks noGrp="1"/>
-          </p:cNvSpPr>
-          <p:nvPr>
-            <p:ph idx="1"/>
-          </p:nvPr>
-        </p:nvSpPr>
-        <p:spPr>
-          <a:xfrm>
-            <a:off x="4572001" y="2201958"/>
-            <a:ext cx="6781800" cy="3900730"/>
-          </a:xfrm>
-        </p:spPr>
-        <p:txBody>
-          <a:bodyPr anchor="t">
-            <a:normAutofit/>
-          </a:bodyPr>
-          <a:lstStyle/>
-          <a:p>
-            <a:r>
-              <a:rPr kumimoji="1" lang="zh-CN" altLang="en-US" sz="2000" dirty="0"/>
-              <a:t>知识点庞杂，重点突破</a:t>
-            </a:r>
-            <a:endParaRPr kumimoji="1" lang="en-US" altLang="zh-CN" sz="2000" dirty="0"/>
-          </a:p>
-          <a:p>
-            <a:r>
-              <a:rPr kumimoji="1" lang="zh-CN" altLang="en-US" sz="2000" dirty="0"/>
-              <a:t>理论知识和实践有机结合</a:t>
-            </a:r>
-            <a:endParaRPr kumimoji="1" lang="en-US" altLang="zh-CN" sz="2000" dirty="0"/>
-          </a:p>
-          <a:p>
-            <a:r>
-              <a:rPr kumimoji="1" lang="zh-CN" altLang="en-US" sz="2000" dirty="0"/>
-              <a:t>常见的练手 </a:t>
-            </a:r>
-            <a:r>
-              <a:rPr kumimoji="1" lang="en-US" altLang="zh-CN" sz="2000" dirty="0"/>
-              <a:t>Project</a:t>
-            </a:r>
-            <a:r>
-              <a:rPr kumimoji="1" lang="zh-CN" altLang="en-US" sz="2000" dirty="0"/>
-              <a:t>：</a:t>
-            </a:r>
-            <a:endParaRPr kumimoji="1" lang="en-US" altLang="zh-CN" sz="2000" dirty="0"/>
-          </a:p>
-          <a:p>
-            <a:pPr lvl="1"/>
-            <a:r>
-              <a:rPr kumimoji="1" lang="zh-CN" altLang="en-US" sz="2000" dirty="0"/>
-              <a:t>图灵商城  </a:t>
-            </a:r>
-            <a:r>
-              <a:rPr kumimoji="1" lang="en" altLang="zh-CN" sz="2000" dirty="0">
-                <a:hlinkClick r:id="rId3"/>
-              </a:rPr>
-              <a:t>https://github.com/macrozheng/mall</a:t>
-            </a:r>
-            <a:endParaRPr kumimoji="1" lang="en-US" altLang="zh-CN" sz="2000" dirty="0"/>
-          </a:p>
-          <a:p>
-            <a:pPr lvl="1"/>
-            <a:r>
-              <a:rPr kumimoji="1" lang="zh-CN" altLang="en-US" sz="2000" dirty="0"/>
-              <a:t>微人事管理系统 </a:t>
-            </a:r>
-            <a:r>
-              <a:rPr kumimoji="1" lang="en" altLang="zh-CN" sz="2000" dirty="0">
-                <a:hlinkClick r:id="rId4"/>
-              </a:rPr>
-              <a:t>https://github.com/lenve/vhr</a:t>
-            </a:r>
-            <a:endParaRPr kumimoji="1" lang="en-US" altLang="zh-CN" sz="2000" dirty="0"/>
-          </a:p>
-        </p:txBody>
-      </p:sp>
-    </p:spTree>
-    <p:extLst>
-      <p:ext uri="{BB962C8B-B14F-4D97-AF65-F5344CB8AC3E}">
-        <p14:creationId xmlns:p14="http://schemas.microsoft.com/office/powerpoint/2010/main" val="649342934"/>
-      </p:ext>
-    </p:extLst>
-  </p:cSld>
-  <p:clrMapOvr>
-    <a:masterClrMapping/>
-  </p:clrMapOvr>
-</p:sld>
-</file>
-
-<file path=ppt/slides/slide2.xml><?xml version="1.0" encoding="utf-8"?>
-<p:sld xmlns:a="http://schemas.openxmlformats.org/drawingml/2006/main" xmlns:r="http://schemas.openxmlformats.org/officeDocument/2006/relationships" xmlns:p="http://schemas.openxmlformats.org/presentationml/2006/main">
-  <p:cSld>
-    <p:bg>
-      <p:bgPr>
-        <a:solidFill>
-          <a:schemeClr val="bg1">
-            <a:tint val="95000"/>
-            <a:satMod val="170000"/>
-          </a:schemeClr>
-        </a:solidFill>
-        <a:effectLst/>
-      </p:bgPr>
-    </p:bg>
-    <p:spTree>
-      <p:nvGrpSpPr>
-        <p:cNvPr id="1" name=""/>
-        <p:cNvGrpSpPr/>
-        <p:nvPr/>
-      </p:nvGrpSpPr>
-      <p:grpSpPr>
-        <a:xfrm>
-          <a:off x="0" y="0"/>
-          <a:ext cx="0" cy="0"/>
-          <a:chOff x="0" y="0"/>
-          <a:chExt cx="0" cy="0"/>
-        </a:xfrm>
-      </p:grpSpPr>
-      <p:sp>
-        <p:nvSpPr>
-          <p:cNvPr id="2" name="标题 1">
-            <a:extLst>
-              <a:ext uri="{FF2B5EF4-FFF2-40B4-BE49-F238E27FC236}">
-                <a16:creationId xmlns:a16="http://schemas.microsoft.com/office/drawing/2014/main" id="{03BB4C04-3D11-D815-340C-DFC6ABE4A840}"/>
-              </a:ext>
-            </a:extLst>
-          </p:cNvPr>
-          <p:cNvSpPr>
-            <a:spLocks noGrp="1"/>
-          </p:cNvSpPr>
-          <p:nvPr>
-            <p:ph type="title"/>
-          </p:nvPr>
-        </p:nvSpPr>
-        <p:spPr>
-          <a:xfrm>
-            <a:off x="762001" y="803325"/>
-            <a:ext cx="5314536" cy="1325563"/>
-          </a:xfrm>
-        </p:spPr>
-        <p:txBody>
-          <a:bodyPr>
-            <a:normAutofit/>
-          </a:bodyPr>
-          <a:lstStyle/>
-          <a:p>
-            <a:r>
-              <a:rPr kumimoji="1" lang="zh-CN" altLang="en-US" sz="4000" dirty="0"/>
-              <a:t>关于我</a:t>
-            </a:r>
-          </a:p>
-        </p:txBody>
-      </p:sp>
-      <p:sp>
-        <p:nvSpPr>
-          <p:cNvPr id="22" name="内容占位符 2">
-            <a:extLst>
-              <a:ext uri="{FF2B5EF4-FFF2-40B4-BE49-F238E27FC236}">
-                <a16:creationId xmlns:a16="http://schemas.microsoft.com/office/drawing/2014/main" id="{524D7DDB-001B-372E-C281-4C7ECFDE7804}"/>
-              </a:ext>
-            </a:extLst>
-          </p:cNvPr>
-          <p:cNvSpPr>
-            <a:spLocks noGrp="1"/>
-          </p:cNvSpPr>
-          <p:nvPr>
-            <p:ph idx="1"/>
-          </p:nvPr>
-        </p:nvSpPr>
-        <p:spPr>
-          <a:xfrm>
-            <a:off x="762000" y="2279017"/>
-            <a:ext cx="6018810" cy="4093207"/>
-          </a:xfrm>
-        </p:spPr>
-        <p:txBody>
-          <a:bodyPr anchor="t">
-            <a:normAutofit/>
-          </a:bodyPr>
-          <a:lstStyle/>
-          <a:p>
-            <a:r>
-              <a:rPr kumimoji="1" lang="zh-CN" altLang="en-US" dirty="0"/>
-              <a:t>个人主页：</a:t>
-            </a:r>
-            <a:r>
-              <a:rPr kumimoji="1" lang="en-US" altLang="zh-CN" dirty="0">
-                <a:hlinkClick r:id="rId2"/>
-              </a:rPr>
-              <a:t>https://chenxofhit.xyz</a:t>
-            </a:r>
-            <a:endParaRPr kumimoji="1" lang="en-US" altLang="zh-CN" dirty="0"/>
-          </a:p>
-          <a:p>
-            <a:r>
-              <a:rPr kumimoji="1" lang="en-US" altLang="zh-CN" dirty="0"/>
-              <a:t>QQ:</a:t>
-            </a:r>
-            <a:r>
-              <a:rPr kumimoji="1" lang="zh-CN" altLang="en-US" dirty="0"/>
-              <a:t> </a:t>
-            </a:r>
-            <a:r>
-              <a:rPr kumimoji="1" lang="en-US" altLang="zh-CN" dirty="0"/>
-              <a:t>723357969</a:t>
-            </a:r>
-          </a:p>
-          <a:p>
-            <a:r>
-              <a:rPr kumimoji="1" lang="zh-CN" altLang="en-US" dirty="0"/>
-              <a:t>办公地址：逸夫楼</a:t>
-            </a:r>
-            <a:r>
-              <a:rPr kumimoji="1" lang="en-US" altLang="zh-CN" dirty="0"/>
-              <a:t>405</a:t>
-            </a:r>
-          </a:p>
-          <a:p>
-            <a:r>
-              <a:rPr lang="zh-CN" altLang="en-US" b="0" i="0" dirty="0">
-                <a:effectLst/>
-                <a:latin typeface="-apple-system"/>
-              </a:rPr>
-              <a:t>常年招收优秀本科生若干名，硕士生</a:t>
-            </a:r>
-            <a:r>
-              <a:rPr lang="en-US" altLang="zh-CN" b="0" i="0" dirty="0">
-                <a:effectLst/>
-                <a:latin typeface="-apple-system"/>
-              </a:rPr>
-              <a:t>1-2</a:t>
-            </a:r>
-            <a:r>
-              <a:rPr lang="zh-CN" altLang="en-US" b="0" i="0" dirty="0">
-                <a:effectLst/>
-                <a:latin typeface="-apple-system"/>
-              </a:rPr>
-              <a:t>名进入课题组从事横纵向课题项目，要求熟悉 </a:t>
-            </a:r>
-            <a:r>
-              <a:rPr lang="en" altLang="zh-CN" b="0" i="0" dirty="0">
-                <a:effectLst/>
-                <a:latin typeface="-apple-system"/>
-              </a:rPr>
-              <a:t>Python</a:t>
-            </a:r>
-            <a:r>
-              <a:rPr lang="zh-CN" altLang="en" b="0" i="0" dirty="0">
-                <a:effectLst/>
-                <a:latin typeface="-apple-system"/>
-              </a:rPr>
-              <a:t>、</a:t>
-            </a:r>
-            <a:r>
-              <a:rPr lang="en" altLang="zh-CN" b="0" i="0" dirty="0">
-                <a:effectLst/>
-                <a:latin typeface="-apple-system"/>
-              </a:rPr>
-              <a:t>R</a:t>
-            </a:r>
-            <a:r>
-              <a:rPr lang="zh-CN" altLang="en" b="0" i="0" dirty="0">
-                <a:effectLst/>
-                <a:latin typeface="-apple-system"/>
-              </a:rPr>
-              <a:t>、</a:t>
-            </a:r>
-            <a:r>
-              <a:rPr lang="en" altLang="zh-CN" b="0" i="0" dirty="0">
-                <a:effectLst/>
-                <a:latin typeface="-apple-system"/>
-              </a:rPr>
-              <a:t>Java</a:t>
-            </a:r>
-            <a:r>
-              <a:rPr lang="zh-CN" altLang="en" b="0" i="0" dirty="0">
-                <a:effectLst/>
-                <a:latin typeface="-apple-system"/>
-              </a:rPr>
-              <a:t>、</a:t>
-            </a:r>
-            <a:r>
-              <a:rPr lang="en" altLang="zh-CN" b="0" i="0" dirty="0">
-                <a:effectLst/>
-                <a:latin typeface="-apple-system"/>
-              </a:rPr>
-              <a:t>Vue</a:t>
-            </a:r>
-            <a:r>
-              <a:rPr lang="zh-CN" altLang="en-US" b="0" i="0" dirty="0">
-                <a:effectLst/>
-                <a:latin typeface="-apple-system"/>
-              </a:rPr>
-              <a:t>等至少一门编程语言，耐得住寂寞抗得住压力。</a:t>
-            </a:r>
-            <a:endParaRPr kumimoji="1" lang="zh-CN" altLang="en-US" dirty="0"/>
-          </a:p>
-        </p:txBody>
-      </p:sp>
-      <p:sp>
-        <p:nvSpPr>
-          <p:cNvPr id="5143" name="Freeform: Shape 5126">
-            <a:extLst>
-              <a:ext uri="{FF2B5EF4-FFF2-40B4-BE49-F238E27FC236}">
-                <a16:creationId xmlns:a16="http://schemas.microsoft.com/office/drawing/2014/main" id="{CF62D2A7-8207-488C-9F46-316BA81A16C8}"/>
-              </a:ext>
-              <a:ext uri="{C183D7F6-B498-43B3-948B-1728B52AA6E4}">
-                <adec:decorative xmlns:adec="http://schemas.microsoft.com/office/drawing/2017/decorative" val="1"/>
-              </a:ext>
-            </a:extLst>
-          </p:cNvPr>
-          <p:cNvSpPr>
-            <a:spLocks noGrp="1" noRot="1" noChangeAspect="1" noMove="1" noResize="1" noEditPoints="1" noAdjustHandles="1" noChangeArrowheads="1" noChangeShapeType="1" noTextEdit="1"/>
-          </p:cNvSpPr>
-          <p:nvPr>
-            <p:extLst>
-              <p:ext uri="{386F3935-93C4-4BCD-93E2-E3B085C9AB24}">
-                <p16:designElem xmlns:p16="http://schemas.microsoft.com/office/powerpoint/2015/main" val="1"/>
-              </p:ext>
-            </p:extLst>
-          </p:nvPr>
-        </p:nvSpPr>
-        <p:spPr>
-          <a:xfrm flipH="1">
-            <a:off x="6582780" y="-2008"/>
-            <a:ext cx="5609220" cy="5840278"/>
-          </a:xfrm>
-          <a:custGeom>
-            <a:avLst/>
-            <a:gdLst>
-              <a:gd name="connsiteX0" fmla="*/ 0 w 5609220"/>
-              <a:gd name="connsiteY0" fmla="*/ 0 h 5840278"/>
-              <a:gd name="connsiteX1" fmla="*/ 4637091 w 5609220"/>
-              <a:gd name="connsiteY1" fmla="*/ 0 h 5840278"/>
-              <a:gd name="connsiteX2" fmla="*/ 4822569 w 5609220"/>
-              <a:gd name="connsiteY2" fmla="*/ 204077 h 5840278"/>
-              <a:gd name="connsiteX3" fmla="*/ 5609220 w 5609220"/>
-              <a:gd name="connsiteY3" fmla="*/ 2395363 h 5840278"/>
-              <a:gd name="connsiteX4" fmla="*/ 2164305 w 5609220"/>
-              <a:gd name="connsiteY4" fmla="*/ 5840278 h 5840278"/>
-              <a:gd name="connsiteX5" fmla="*/ 238220 w 5609220"/>
-              <a:gd name="connsiteY5" fmla="*/ 5251941 h 5840278"/>
-              <a:gd name="connsiteX6" fmla="*/ 0 w 5609220"/>
-              <a:gd name="connsiteY6" fmla="*/ 5073803 h 5840278"/>
-            </a:gdLst>
-            <a:ahLst/>
-            <a:cxnLst>
-              <a:cxn ang="0">
-                <a:pos x="connsiteX0" y="connsiteY0"/>
-              </a:cxn>
-              <a:cxn ang="0">
-                <a:pos x="connsiteX1" y="connsiteY1"/>
-              </a:cxn>
-              <a:cxn ang="0">
-                <a:pos x="connsiteX2" y="connsiteY2"/>
-              </a:cxn>
-              <a:cxn ang="0">
-                <a:pos x="connsiteX3" y="connsiteY3"/>
-              </a:cxn>
-              <a:cxn ang="0">
-                <a:pos x="connsiteX4" y="connsiteY4"/>
-              </a:cxn>
-              <a:cxn ang="0">
-                <a:pos x="connsiteX5" y="connsiteY5"/>
-              </a:cxn>
-              <a:cxn ang="0">
-                <a:pos x="connsiteX6" y="connsiteY6"/>
-              </a:cxn>
-            </a:cxnLst>
-            <a:rect l="l" t="t" r="r" b="b"/>
-            <a:pathLst>
-              <a:path w="5609220" h="5840278">
-                <a:moveTo>
-                  <a:pt x="0" y="0"/>
-                </a:moveTo>
-                <a:lnTo>
-                  <a:pt x="4637091" y="0"/>
-                </a:lnTo>
-                <a:lnTo>
-                  <a:pt x="4822569" y="204077"/>
-                </a:lnTo>
-                <a:cubicBezTo>
-                  <a:pt x="5314007" y="799562"/>
-                  <a:pt x="5609220" y="1562987"/>
-                  <a:pt x="5609220" y="2395363"/>
-                </a:cubicBezTo>
-                <a:cubicBezTo>
-                  <a:pt x="5609220" y="4297937"/>
-                  <a:pt x="4066879" y="5840278"/>
-                  <a:pt x="2164305" y="5840278"/>
-                </a:cubicBezTo>
-                <a:cubicBezTo>
-                  <a:pt x="1450840" y="5840278"/>
-                  <a:pt x="788032" y="5623387"/>
-                  <a:pt x="238220" y="5251941"/>
-                </a:cubicBezTo>
-                <a:lnTo>
-                  <a:pt x="0" y="5073803"/>
-                </a:lnTo>
-                <a:close/>
-              </a:path>
-            </a:pathLst>
-          </a:custGeom>
-          <a:solidFill>
-            <a:srgbClr val="FFFFFF">
-              <a:alpha val="80000"/>
-            </a:srgbClr>
-          </a:solidFill>
-          <a:ln>
-            <a:noFill/>
-          </a:ln>
-        </p:spPr>
-        <p:style>
-          <a:lnRef idx="2">
-            <a:schemeClr val="accent1">
-              <a:shade val="50000"/>
-            </a:schemeClr>
-          </a:lnRef>
-          <a:fillRef idx="1">
-            <a:schemeClr val="accent1"/>
-          </a:fillRef>
-          <a:effectRef idx="0">
-            <a:schemeClr val="accent1"/>
-          </a:effectRef>
-          <a:fontRef idx="minor">
-            <a:schemeClr val="lt1"/>
-          </a:fontRef>
-        </p:style>
-        <p:txBody>
-          <a:bodyPr rtlCol="0" anchor="ctr"/>
-          <a:lstStyle/>
-          <a:p>
-            <a:pPr marL="0" marR="0" lvl="0" indent="0" algn="ctr" defTabSz="914400" rtl="0" eaLnBrk="1" fontAlgn="auto" latinLnBrk="0" hangingPunct="1">
-              <a:lnSpc>
-                <a:spcPct val="100000"/>
-              </a:lnSpc>
-              <a:spcBef>
-                <a:spcPts val="0"/>
-              </a:spcBef>
-              <a:spcAft>
-                <a:spcPts val="0"/>
-              </a:spcAft>
-              <a:buClrTx/>
-              <a:buSzTx/>
-              <a:buFontTx/>
-              <a:buNone/>
-              <a:tabLst/>
-              <a:defRPr/>
-            </a:pPr>
-            <a:endParaRPr kumimoji="0" lang="en-US" sz="1800" b="0" i="0" u="none" strike="noStrike" kern="1200" cap="none" spc="0" normalizeH="0" baseline="0" noProof="0">
-              <a:ln>
-                <a:noFill/>
-              </a:ln>
-              <a:solidFill>
-                <a:prstClr val="white"/>
-              </a:solidFill>
-              <a:effectLst/>
-              <a:uLnTx/>
-              <a:uFillTx/>
-              <a:latin typeface="Calibri" panose="020F0502020204030204"/>
-              <a:ea typeface="+mn-ea"/>
-              <a:cs typeface="+mn-cs"/>
-            </a:endParaRPr>
-          </a:p>
-        </p:txBody>
-      </p:sp>
-      <p:pic>
-        <p:nvPicPr>
-          <p:cNvPr id="5122" name="Picture 2" descr="孔夫子做了什么，那么招人恨？ - 知乎">
-            <a:extLst>
-              <a:ext uri="{FF2B5EF4-FFF2-40B4-BE49-F238E27FC236}">
-                <a16:creationId xmlns:a16="http://schemas.microsoft.com/office/drawing/2014/main" id="{A27A14C4-DA7D-2F08-7A3F-05C5DB41778B}"/>
-              </a:ext>
-            </a:extLst>
-          </p:cNvPr>
-          <p:cNvPicPr>
-            <a:picLocks noChangeAspect="1" noChangeArrowheads="1"/>
-          </p:cNvPicPr>
-          <p:nvPr/>
-        </p:nvPicPr>
-        <p:blipFill rotWithShape="1">
-          <a:blip r:embed="rId3">
-            <a:extLst>
-              <a:ext uri="{28A0092B-C50C-407E-A947-70E740481C1C}">
-                <a14:useLocalDpi xmlns:a14="http://schemas.microsoft.com/office/drawing/2010/main" val="0"/>
-              </a:ext>
-            </a:extLst>
-          </a:blip>
-          <a:srcRect l="14879" r="11731" b="1"/>
-          <a:stretch/>
-        </p:blipFill>
-        <p:spPr bwMode="auto">
-          <a:xfrm>
-            <a:off x="6678593" y="-2"/>
-            <a:ext cx="5513407" cy="5729290"/>
-          </a:xfrm>
-          <a:custGeom>
-            <a:avLst/>
-            <a:gdLst/>
-            <a:ahLst/>
-            <a:cxnLst/>
-            <a:rect l="l" t="t" r="r" b="b"/>
-            <a:pathLst>
-              <a:path w="5441859" h="5654940">
-                <a:moveTo>
-                  <a:pt x="1041368" y="0"/>
-                </a:moveTo>
-                <a:lnTo>
-                  <a:pt x="5441859" y="0"/>
-                </a:lnTo>
-                <a:lnTo>
-                  <a:pt x="5441859" y="4820612"/>
-                </a:lnTo>
-                <a:lnTo>
-                  <a:pt x="5285166" y="4957981"/>
-                </a:lnTo>
-                <a:cubicBezTo>
-                  <a:pt x="4729628" y="5394557"/>
-                  <a:pt x="4029081" y="5654940"/>
-                  <a:pt x="3267719" y="5654940"/>
-                </a:cubicBezTo>
-                <a:cubicBezTo>
-                  <a:pt x="1463008" y="5654940"/>
-                  <a:pt x="0" y="4191932"/>
-                  <a:pt x="0" y="2387221"/>
-                </a:cubicBezTo>
-                <a:cubicBezTo>
-                  <a:pt x="0" y="1484866"/>
-                  <a:pt x="365752" y="667936"/>
-                  <a:pt x="957093" y="76595"/>
-                </a:cubicBezTo>
-                <a:close/>
-              </a:path>
-            </a:pathLst>
-          </a:custGeom>
-          <a:noFill/>
-          <a:extLst>
-            <a:ext uri="{909E8E84-426E-40DD-AFC4-6F175D3DCCD1}">
-              <a14:hiddenFill xmlns:a14="http://schemas.microsoft.com/office/drawing/2010/main">
-                <a:solidFill>
-                  <a:srgbClr val="FFFFFF"/>
-                </a:solidFill>
-              </a14:hiddenFill>
-            </a:ext>
-          </a:extLst>
-        </p:spPr>
-      </p:pic>
-    </p:spTree>
-    <p:extLst>
-      <p:ext uri="{BB962C8B-B14F-4D97-AF65-F5344CB8AC3E}">
-        <p14:creationId xmlns:p14="http://schemas.microsoft.com/office/powerpoint/2010/main" val="421364669"/>
-      </p:ext>
-    </p:extLst>
-  </p:cSld>
-  <p:clrMapOvr>
-    <a:overrideClrMapping bg1="dk1" tx1="lt1" bg2="dk2" tx2="lt2" accent1="accent1" accent2="accent2" accent3="accent3" accent4="accent4" accent5="accent5" accent6="accent6" hlink="hlink" folHlink="folHlink"/>
-  </p:clrMapOvr>
-</p:sld>
-</file>
-
-<file path=ppt/slides/slide3.xml><?xml version="1.0" encoding="utf-8"?>
-<p:sld xmlns:a="http://schemas.openxmlformats.org/drawingml/2006/main" xmlns:r="http://schemas.openxmlformats.org/officeDocument/2006/relationships" xmlns:p="http://schemas.openxmlformats.org/presentationml/2006/main">
-  <p:cSld>
-    <p:spTree>
-      <p:nvGrpSpPr>
-        <p:cNvPr id="1" name=""/>
-        <p:cNvGrpSpPr/>
-        <p:nvPr/>
-      </p:nvGrpSpPr>
-      <p:grpSpPr>
-        <a:xfrm>
-          <a:off x="0" y="0"/>
-          <a:ext cx="0" cy="0"/>
-          <a:chOff x="0" y="0"/>
-          <a:chExt cx="0" cy="0"/>
-        </a:xfrm>
-      </p:grpSpPr>
-      <p:sp>
-        <p:nvSpPr>
-          <p:cNvPr id="2" name="Title 1">
-            <a:extLst>
-              <a:ext uri="{FF2B5EF4-FFF2-40B4-BE49-F238E27FC236}">
-                <a16:creationId xmlns:a16="http://schemas.microsoft.com/office/drawing/2014/main" id="{270A5F03-B8B8-6E41-BC7F-AC0E67ACC30C}"/>
-              </a:ext>
-            </a:extLst>
-          </p:cNvPr>
-          <p:cNvSpPr>
-            <a:spLocks noGrp="1"/>
-          </p:cNvSpPr>
-          <p:nvPr>
-            <p:ph type="title"/>
-          </p:nvPr>
-        </p:nvSpPr>
-        <p:spPr/>
-        <p:txBody>
-          <a:bodyPr/>
-          <a:lstStyle/>
-          <a:p>
-            <a:r>
-              <a:rPr lang="en-CN" dirty="0"/>
-              <a:t>关于我</a:t>
-            </a:r>
-          </a:p>
-        </p:txBody>
-      </p:sp>
-      <p:sp>
-        <p:nvSpPr>
-          <p:cNvPr id="3" name="Content Placeholder 2">
-            <a:extLst>
-              <a:ext uri="{FF2B5EF4-FFF2-40B4-BE49-F238E27FC236}">
-                <a16:creationId xmlns:a16="http://schemas.microsoft.com/office/drawing/2014/main" id="{A9DF94E2-B91C-E640-AB18-7401D9913112}"/>
-              </a:ext>
-            </a:extLst>
-          </p:cNvPr>
-          <p:cNvSpPr>
-            <a:spLocks noGrp="1"/>
-          </p:cNvSpPr>
-          <p:nvPr>
-            <p:ph idx="1"/>
-          </p:nvPr>
-        </p:nvSpPr>
-        <p:spPr/>
-        <p:txBody>
-          <a:bodyPr/>
-          <a:lstStyle/>
-          <a:p>
-            <a:endParaRPr lang="en-CN"/>
-          </a:p>
-        </p:txBody>
-      </p:sp>
-      <p:pic>
-        <p:nvPicPr>
-          <p:cNvPr id="6" name="Picture 5">
-            <a:extLst>
-              <a:ext uri="{FF2B5EF4-FFF2-40B4-BE49-F238E27FC236}">
-                <a16:creationId xmlns:a16="http://schemas.microsoft.com/office/drawing/2014/main" id="{BD020540-40A3-FA4D-A4CA-B0888520AEE5}"/>
-              </a:ext>
-            </a:extLst>
-          </p:cNvPr>
-          <p:cNvPicPr>
-            <a:picLocks noChangeAspect="1"/>
-          </p:cNvPicPr>
-          <p:nvPr/>
-        </p:nvPicPr>
-        <p:blipFill>
-          <a:blip r:embed="rId2"/>
-          <a:stretch>
-            <a:fillRect/>
-          </a:stretch>
-        </p:blipFill>
-        <p:spPr>
-          <a:xfrm>
-            <a:off x="1524000" y="1417638"/>
-            <a:ext cx="9057360" cy="4266470"/>
-          </a:xfrm>
-          <a:prstGeom prst="rect">
-            <a:avLst/>
-          </a:prstGeom>
-        </p:spPr>
-      </p:pic>
-    </p:spTree>
-    <p:extLst>
-      <p:ext uri="{BB962C8B-B14F-4D97-AF65-F5344CB8AC3E}">
-        <p14:creationId xmlns:p14="http://schemas.microsoft.com/office/powerpoint/2010/main" val="1580747690"/>
-      </p:ext>
-    </p:extLst>
-  </p:cSld>
-  <p:clrMapOvr>
-    <a:masterClrMapping/>
-  </p:clrMapOvr>
-</p:sld>
-</file>
-
-<file path=ppt/slides/slide4.xml><?xml version="1.0" encoding="utf-8"?>
-<p:sld xmlns:a="http://schemas.openxmlformats.org/drawingml/2006/main" xmlns:r="http://schemas.openxmlformats.org/officeDocument/2006/relationships" xmlns:p="http://schemas.openxmlformats.org/presentationml/2006/main">
-  <p:cSld>
-    <p:spTree>
-      <p:nvGrpSpPr>
-        <p:cNvPr id="1" name=""/>
-        <p:cNvGrpSpPr/>
-        <p:nvPr/>
-      </p:nvGrpSpPr>
-      <p:grpSpPr>
-        <a:xfrm>
-          <a:off x="0" y="0"/>
-          <a:ext cx="0" cy="0"/>
-          <a:chOff x="0" y="0"/>
-          <a:chExt cx="0" cy="0"/>
-        </a:xfrm>
-      </p:grpSpPr>
-      <p:sp>
-        <p:nvSpPr>
-          <p:cNvPr id="2" name="Title 1">
-            <a:extLst>
-              <a:ext uri="{FF2B5EF4-FFF2-40B4-BE49-F238E27FC236}">
-                <a16:creationId xmlns:a16="http://schemas.microsoft.com/office/drawing/2014/main" id="{9BCD69F5-8701-6A43-AD28-A6429057023E}"/>
-              </a:ext>
-            </a:extLst>
-          </p:cNvPr>
-          <p:cNvSpPr>
-            <a:spLocks noGrp="1"/>
-          </p:cNvSpPr>
-          <p:nvPr>
-            <p:ph type="title"/>
-          </p:nvPr>
-        </p:nvSpPr>
-        <p:spPr/>
-        <p:txBody>
-          <a:bodyPr/>
-          <a:lstStyle/>
-          <a:p>
-            <a:r>
-              <a:rPr lang="en-CN" dirty="0"/>
-              <a:t>关于课程</a:t>
-            </a:r>
-          </a:p>
-        </p:txBody>
-      </p:sp>
-      <p:sp>
-        <p:nvSpPr>
-          <p:cNvPr id="3" name="Content Placeholder 2">
-            <a:extLst>
-              <a:ext uri="{FF2B5EF4-FFF2-40B4-BE49-F238E27FC236}">
-                <a16:creationId xmlns:a16="http://schemas.microsoft.com/office/drawing/2014/main" id="{F04E21C8-F3E0-4842-8D2F-BEE7238883E4}"/>
-              </a:ext>
-            </a:extLst>
-          </p:cNvPr>
-          <p:cNvSpPr>
-            <a:spLocks noGrp="1"/>
-          </p:cNvSpPr>
-          <p:nvPr>
-            <p:ph idx="1"/>
-          </p:nvPr>
-        </p:nvSpPr>
-        <p:spPr/>
-        <p:txBody>
-          <a:bodyPr/>
-          <a:lstStyle/>
-          <a:p>
-            <a:r>
-              <a:rPr lang="zh-CN" altLang="en-US" dirty="0"/>
-              <a:t>计算机科学与技术专业的专业选修课</a:t>
-            </a:r>
-            <a:endParaRPr lang="en-US" altLang="zh-CN" dirty="0"/>
-          </a:p>
-          <a:p>
-            <a:r>
-              <a:rPr lang="zh-CN" altLang="en-US" dirty="0"/>
-              <a:t>计划时数：</a:t>
-            </a:r>
-            <a:r>
-              <a:rPr lang="en-US" altLang="zh-CN" dirty="0"/>
-              <a:t>48</a:t>
-            </a:r>
-            <a:r>
-              <a:rPr lang="zh-CN" altLang="en-US" dirty="0"/>
-              <a:t>学时，理论讲述 </a:t>
-            </a:r>
-            <a:r>
-              <a:rPr lang="en-US" altLang="zh-CN" dirty="0"/>
-              <a:t>32</a:t>
-            </a:r>
-            <a:r>
-              <a:rPr lang="zh-CN" altLang="en-US" dirty="0"/>
-              <a:t>学时，实验学时 </a:t>
-            </a:r>
-            <a:r>
-              <a:rPr lang="en-US" altLang="zh-CN" dirty="0"/>
-              <a:t>16</a:t>
-            </a:r>
-            <a:r>
-              <a:rPr lang="zh-CN" altLang="en-US" dirty="0"/>
-              <a:t> 学时。</a:t>
-            </a:r>
-            <a:endParaRPr lang="en-US" altLang="zh-CN" dirty="0"/>
-          </a:p>
-          <a:p>
-            <a:r>
-              <a:rPr lang="zh-CN" altLang="en-US" dirty="0"/>
-              <a:t>考核方式：</a:t>
-            </a:r>
-            <a:endParaRPr lang="en-US" altLang="zh-CN" dirty="0"/>
-          </a:p>
-          <a:p>
-            <a:pPr lvl="1"/>
-            <a:r>
-              <a:rPr lang="zh-CN" altLang="en-US" dirty="0"/>
-              <a:t> </a:t>
-            </a:r>
-            <a:r>
-              <a:rPr lang="en-US" altLang="zh-CN" dirty="0"/>
-              <a:t>10%</a:t>
-            </a:r>
-            <a:r>
-              <a:rPr lang="zh-CN" altLang="en-US" dirty="0"/>
-              <a:t> 课堂表现，</a:t>
-            </a:r>
-            <a:r>
-              <a:rPr lang="en-US" altLang="zh-CN" dirty="0"/>
-              <a:t>20%</a:t>
-            </a:r>
-            <a:r>
-              <a:rPr lang="zh-CN" altLang="en-US" dirty="0"/>
-              <a:t>平时作业，</a:t>
-            </a:r>
-            <a:r>
-              <a:rPr lang="en-US" altLang="zh-CN" dirty="0"/>
-              <a:t>70%</a:t>
-            </a:r>
-            <a:r>
-              <a:rPr lang="zh-CN" altLang="en-US" dirty="0"/>
-              <a:t> 期末考试</a:t>
-            </a:r>
-            <a:endParaRPr lang="en-CN" dirty="0"/>
-          </a:p>
-        </p:txBody>
-      </p:sp>
-    </p:spTree>
-    <p:extLst>
-      <p:ext uri="{BB962C8B-B14F-4D97-AF65-F5344CB8AC3E}">
-        <p14:creationId xmlns:p14="http://schemas.microsoft.com/office/powerpoint/2010/main" val="924896234"/>
-      </p:ext>
-    </p:extLst>
-  </p:cSld>
-  <p:clrMapOvr>
-    <a:masterClrMapping/>
-  </p:clrMapOvr>
-</p:sld>
-</file>
-
-<file path=ppt/slides/slide5.xml><?xml version="1.0" encoding="utf-8"?>
-<p:sld xmlns:a="http://schemas.openxmlformats.org/drawingml/2006/main" xmlns:r="http://schemas.openxmlformats.org/officeDocument/2006/relationships" xmlns:p="http://schemas.openxmlformats.org/presentationml/2006/main">
-  <p:cSld>
-    <p:bg>
-      <p:bgPr>
-        <a:solidFill>
-          <a:schemeClr val="bg1"/>
-        </a:solidFill>
-        <a:effectLst/>
-      </p:bgPr>
-    </p:bg>
-    <p:spTree>
-      <p:nvGrpSpPr>
-        <p:cNvPr id="1" name=""/>
-        <p:cNvGrpSpPr/>
-        <p:nvPr/>
-      </p:nvGrpSpPr>
-      <p:grpSpPr>
-        <a:xfrm>
-          <a:off x="0" y="0"/>
-          <a:ext cx="0" cy="0"/>
-          <a:chOff x="0" y="0"/>
-          <a:chExt cx="0" cy="0"/>
-        </a:xfrm>
-      </p:grpSpPr>
-      <p:sp>
-        <p:nvSpPr>
-          <p:cNvPr id="13" name="Rectangle 12">
-            <a:extLst>
-              <a:ext uri="{FF2B5EF4-FFF2-40B4-BE49-F238E27FC236}">
-                <a16:creationId xmlns:a16="http://schemas.microsoft.com/office/drawing/2014/main" id="{B50AB553-2A96-4A92-96F2-93548E096954}"/>
-              </a:ext>
-              <a:ext uri="{C183D7F6-B498-43B3-948B-1728B52AA6E4}">
-                <adec:decorative xmlns:adec="http://schemas.microsoft.com/office/drawing/2017/decorative" val="1"/>
-              </a:ext>
-            </a:extLst>
-          </p:cNvPr>
-          <p:cNvSpPr>
-            <a:spLocks noGrp="1" noRot="1" noChangeAspect="1" noMove="1" noResize="1" noEditPoints="1" noAdjustHandles="1" noChangeArrowheads="1" noChangeShapeType="1" noTextEdit="1"/>
-          </p:cNvSpPr>
-          <p:nvPr>
-            <p:extLst>
-              <p:ext uri="{386F3935-93C4-4BCD-93E2-E3B085C9AB24}">
-                <p16:designElem xmlns:p16="http://schemas.microsoft.com/office/powerpoint/2015/main" val="1"/>
-              </p:ext>
-            </p:extLst>
-          </p:nvPr>
-        </p:nvSpPr>
-        <p:spPr>
-          <a:xfrm>
-            <a:off x="0" y="0"/>
-            <a:ext cx="12192000" cy="6858000"/>
-          </a:xfrm>
-          <a:prstGeom prst="rect">
-            <a:avLst/>
-          </a:prstGeom>
-          <a:gradFill>
-            <a:gsLst>
-              <a:gs pos="10000">
-                <a:schemeClr val="bg2">
-                  <a:alpha val="68000"/>
-                </a:schemeClr>
-              </a:gs>
-              <a:gs pos="85000">
-                <a:schemeClr val="bg2">
-                  <a:alpha val="97000"/>
-                </a:schemeClr>
-              </a:gs>
-            </a:gsLst>
-            <a:path path="circle">
-              <a:fillToRect l="50000" t="50000" r="50000" b="50000"/>
-            </a:path>
-          </a:gradFill>
-          <a:ln>
-            <a:noFill/>
-          </a:ln>
-        </p:spPr>
-        <p:style>
-          <a:lnRef idx="2">
-            <a:schemeClr val="accent1">
-              <a:shade val="50000"/>
-            </a:schemeClr>
-          </a:lnRef>
-          <a:fillRef idx="1">
-            <a:schemeClr val="accent1"/>
-          </a:fillRef>
-          <a:effectRef idx="0">
-            <a:schemeClr val="accent1"/>
-          </a:effectRef>
-          <a:fontRef idx="minor">
-            <a:schemeClr val="lt1"/>
-          </a:fontRef>
-        </p:style>
-        <p:txBody>
-          <a:bodyPr rtlCol="0" anchor="ctr"/>
-          <a:lstStyle/>
-          <a:p>
-            <a:pPr algn="ctr"/>
-            <a:endParaRPr lang="en-US"/>
-          </a:p>
-        </p:txBody>
-      </p:sp>
-      <p:sp>
-        <p:nvSpPr>
-          <p:cNvPr id="2" name="Title 1"/>
-          <p:cNvSpPr>
-            <a:spLocks noGrp="1"/>
-          </p:cNvSpPr>
-          <p:nvPr>
-            <p:ph type="title"/>
-          </p:nvPr>
-        </p:nvSpPr>
-        <p:spPr>
-          <a:xfrm>
-            <a:off x="838200" y="365125"/>
-            <a:ext cx="10515600" cy="1325563"/>
-          </a:xfrm>
-        </p:spPr>
-        <p:txBody>
-          <a:bodyPr>
-            <a:normAutofit/>
-          </a:bodyPr>
-          <a:lstStyle/>
-          <a:p>
-            <a:r>
-              <a:rPr lang="en-US" altLang="zh-CN" sz="4000" dirty="0"/>
-              <a:t>What</a:t>
-            </a:r>
-            <a:r>
-              <a:rPr lang="zh-CN" altLang="en-US" sz="4000" dirty="0"/>
-              <a:t>课程内容</a:t>
-            </a:r>
-          </a:p>
-        </p:txBody>
-      </p:sp>
-      <p:graphicFrame>
-        <p:nvGraphicFramePr>
-          <p:cNvPr id="7" name="Content Placeholder 2">
-            <a:extLst>
-              <a:ext uri="{FF2B5EF4-FFF2-40B4-BE49-F238E27FC236}">
-                <a16:creationId xmlns:a16="http://schemas.microsoft.com/office/drawing/2014/main" id="{410B5E0C-F15E-D4B1-4DF9-7445C7171F79}"/>
-              </a:ext>
-            </a:extLst>
-          </p:cNvPr>
-          <p:cNvGraphicFramePr>
-            <a:graphicFrameLocks noGrp="1"/>
-          </p:cNvGraphicFramePr>
-          <p:nvPr>
-            <p:ph idx="1"/>
-            <p:extLst>
-              <p:ext uri="{D42A27DB-BD31-4B8C-83A1-F6EECF244321}">
-                <p14:modId xmlns:p14="http://schemas.microsoft.com/office/powerpoint/2010/main" val="902809522"/>
-              </p:ext>
-            </p:extLst>
-          </p:nvPr>
-        </p:nvGraphicFramePr>
-        <p:xfrm>
-          <a:off x="1928813" y="936991"/>
-          <a:ext cx="7148512" cy="4621261"/>
-        </p:xfrm>
-        <a:graphic>
-          <a:graphicData uri="http://schemas.openxmlformats.org/drawingml/2006/diagram">
-            <dgm:relIds xmlns:dgm="http://schemas.openxmlformats.org/drawingml/2006/diagram" xmlns:r="http://schemas.openxmlformats.org/officeDocument/2006/relationships" r:dm="rId2" r:lo="rId3" r:qs="rId4" r:cs="rId5"/>
-          </a:graphicData>
-        </a:graphic>
-      </p:graphicFrame>
-      <p:sp>
-        <p:nvSpPr>
-          <p:cNvPr id="17" name="文本框 16">
-            <a:extLst>
-              <a:ext uri="{FF2B5EF4-FFF2-40B4-BE49-F238E27FC236}">
-                <a16:creationId xmlns:a16="http://schemas.microsoft.com/office/drawing/2014/main" id="{7A3A4AC2-DDAC-7D17-393E-5BF419A21CD3}"/>
-              </a:ext>
-            </a:extLst>
-          </p:cNvPr>
-          <p:cNvSpPr txBox="1"/>
-          <p:nvPr/>
-        </p:nvSpPr>
-        <p:spPr>
-          <a:xfrm>
-            <a:off x="838200" y="5909079"/>
-            <a:ext cx="9630508" cy="584775"/>
-          </a:xfrm>
-          <a:prstGeom prst="rect">
-            <a:avLst/>
-          </a:prstGeom>
-          <a:noFill/>
-        </p:spPr>
-        <p:txBody>
-          <a:bodyPr wrap="square">
-            <a:spAutoFit/>
-          </a:bodyPr>
-          <a:lstStyle/>
-          <a:p>
-            <a:pPr marL="0" indent="0">
-              <a:buNone/>
-            </a:pPr>
-            <a:r>
-              <a:rPr lang="zh-CN" altLang="en-US" sz="3200" dirty="0"/>
-              <a:t>先修课程：</a:t>
-            </a:r>
-            <a:r>
-              <a:rPr lang="en-US" altLang="zh-CN" sz="2400" dirty="0">
-                <a:latin typeface="Times New Roman" panose="02020603050405020304" pitchFamily="18" charset="0"/>
-                <a:cs typeface="Times New Roman" panose="02020603050405020304" pitchFamily="18" charset="0"/>
-              </a:rPr>
-              <a:t>Java</a:t>
-            </a:r>
-            <a:r>
-              <a:rPr lang="zh-CN" altLang="en-US" sz="2400" dirty="0">
-                <a:latin typeface="Times New Roman" panose="02020603050405020304" pitchFamily="18" charset="0"/>
-                <a:cs typeface="Times New Roman" panose="02020603050405020304" pitchFamily="18" charset="0"/>
-              </a:rPr>
-              <a:t>，</a:t>
-            </a:r>
-            <a:r>
-              <a:rPr lang="en-US" altLang="zh-CN" sz="2400" dirty="0">
-                <a:latin typeface="Times New Roman" panose="02020603050405020304" pitchFamily="18" charset="0"/>
-                <a:cs typeface="Times New Roman" panose="02020603050405020304" pitchFamily="18" charset="0"/>
-              </a:rPr>
-              <a:t>Linux</a:t>
-            </a:r>
-            <a:r>
-              <a:rPr lang="zh-CN" altLang="en-US" sz="2400" dirty="0">
-                <a:latin typeface="Times New Roman" panose="02020603050405020304" pitchFamily="18" charset="0"/>
-                <a:cs typeface="Times New Roman" panose="02020603050405020304" pitchFamily="18" charset="0"/>
-              </a:rPr>
-              <a:t> </a:t>
-            </a:r>
-            <a:r>
-              <a:rPr lang="en-US" altLang="zh-CN" sz="2400" dirty="0">
-                <a:latin typeface="Times New Roman" panose="02020603050405020304" pitchFamily="18" charset="0"/>
-                <a:cs typeface="Times New Roman" panose="02020603050405020304" pitchFamily="18" charset="0"/>
-              </a:rPr>
-              <a:t>OS</a:t>
-            </a:r>
-            <a:r>
-              <a:rPr lang="zh-CN" altLang="en-US" sz="2400" dirty="0">
-                <a:latin typeface="Times New Roman" panose="02020603050405020304" pitchFamily="18" charset="0"/>
-                <a:cs typeface="Times New Roman" panose="02020603050405020304" pitchFamily="18" charset="0"/>
-              </a:rPr>
-              <a:t>，</a:t>
-            </a:r>
-            <a:r>
-              <a:rPr lang="en-US" altLang="zh-CN" sz="2400" dirty="0">
-                <a:latin typeface="Times New Roman" panose="02020603050405020304" pitchFamily="18" charset="0"/>
-                <a:cs typeface="Times New Roman" panose="02020603050405020304" pitchFamily="18" charset="0"/>
-              </a:rPr>
-              <a:t>Date Structure</a:t>
-            </a:r>
-            <a:r>
-              <a:rPr lang="zh-CN" altLang="en-US" sz="2400" dirty="0">
-                <a:latin typeface="Times New Roman" panose="02020603050405020304" pitchFamily="18" charset="0"/>
-                <a:cs typeface="Times New Roman" panose="02020603050405020304" pitchFamily="18" charset="0"/>
-              </a:rPr>
-              <a:t>，</a:t>
-            </a:r>
-            <a:r>
-              <a:rPr lang="en-US" altLang="zh-CN" sz="2400" dirty="0">
-                <a:latin typeface="Times New Roman" panose="02020603050405020304" pitchFamily="18" charset="0"/>
-                <a:cs typeface="Times New Roman" panose="02020603050405020304" pitchFamily="18" charset="0"/>
-              </a:rPr>
-              <a:t>HTML/CSS/JavaScript</a:t>
-            </a:r>
-            <a:endParaRPr lang="en-US" altLang="zh-CN" dirty="0">
-              <a:latin typeface="Times New Roman" panose="02020603050405020304" pitchFamily="18" charset="0"/>
-              <a:cs typeface="Times New Roman" panose="02020603050405020304" pitchFamily="18" charset="0"/>
-            </a:endParaRPr>
-          </a:p>
-        </p:txBody>
-      </p:sp>
-      <p:pic>
-        <p:nvPicPr>
-          <p:cNvPr id="2056" name="Picture 8" descr="Spring] Spring MVC 따라하기">
-            <a:extLst>
-              <a:ext uri="{FF2B5EF4-FFF2-40B4-BE49-F238E27FC236}">
-                <a16:creationId xmlns:a16="http://schemas.microsoft.com/office/drawing/2014/main" id="{4A14CD84-F81E-69D3-CA5E-0D6DFFA35E33}"/>
+                <a16:creationId xmlns:a16="http://schemas.microsoft.com/office/drawing/2014/main" id="{B1D86E74-3774-A422-4A26-5163BF768B66}"/>
               </a:ext>
             </a:extLst>
           </p:cNvPr>
@@ -11086,7 +8821,7 @@
           <p:nvPr/>
         </p:nvPicPr>
         <p:blipFill>
-          <a:blip r:embed="rId7">
+          <a:blip r:embed="rId6">
             <a:extLst>
               <a:ext uri="{28A0092B-C50C-407E-A947-70E740481C1C}">
                 <a14:useLocalDpi xmlns:a14="http://schemas.microsoft.com/office/drawing/2010/main" val="0"/>
@@ -11100,102 +8835,8 @@
         </p:blipFill>
         <p:spPr bwMode="auto">
           <a:xfrm>
-            <a:off x="7604124" y="2663729"/>
-            <a:ext cx="2457450" cy="1186880"/>
-          </a:xfrm>
-          <a:prstGeom prst="rect">
-            <a:avLst/>
-          </a:prstGeom>
-          <a:noFill/>
-          <a:extLst>
-            <a:ext uri="{909E8E84-426E-40DD-AFC4-6F175D3DCCD1}">
-              <a14:hiddenFill xmlns:a14="http://schemas.microsoft.com/office/drawing/2010/main">
-                <a:solidFill>
-                  <a:srgbClr val="FFFFFF"/>
-                </a:solidFill>
-              </a14:hiddenFill>
-            </a:ext>
-          </a:extLst>
-        </p:spPr>
-      </p:pic>
-      <p:pic>
-        <p:nvPicPr>
-          <p:cNvPr id="2058" name="Picture 10" descr="Spring Boot Tutorial">
-            <a:extLst>
-              <a:ext uri="{FF2B5EF4-FFF2-40B4-BE49-F238E27FC236}">
-                <a16:creationId xmlns:a16="http://schemas.microsoft.com/office/drawing/2014/main" id="{25DD3D6F-6602-9359-EC92-23D57DCE9969}"/>
-              </a:ext>
-            </a:extLst>
-          </p:cNvPr>
-          <p:cNvPicPr>
-            <a:picLocks noChangeAspect="1" noChangeArrowheads="1"/>
-          </p:cNvPicPr>
-          <p:nvPr/>
-        </p:nvPicPr>
-        <p:blipFill>
-          <a:blip r:embed="rId8">
-            <a:extLst>
-              <a:ext uri="{28A0092B-C50C-407E-A947-70E740481C1C}">
-                <a14:useLocalDpi xmlns:a14="http://schemas.microsoft.com/office/drawing/2010/main" val="0"/>
-              </a:ext>
-            </a:extLst>
-          </a:blip>
-          <a:srcRect/>
-          <a:stretch>
-            <a:fillRect/>
-          </a:stretch>
-        </p:blipFill>
-        <p:spPr bwMode="auto">
-          <a:xfrm>
-            <a:off x="7604124" y="4177578"/>
-            <a:ext cx="2457451" cy="1292144"/>
-          </a:xfrm>
-          <a:prstGeom prst="rect">
-            <a:avLst/>
-          </a:prstGeom>
-          <a:noFill/>
-          <a:extLst>
-            <a:ext uri="{909E8E84-426E-40DD-AFC4-6F175D3DCCD1}">
-              <a14:hiddenFill xmlns:a14="http://schemas.microsoft.com/office/drawing/2010/main">
-                <a:solidFill>
-                  <a:srgbClr val="FFFFFF"/>
-                </a:solidFill>
-              </a14:hiddenFill>
-            </a:ext>
-          </a:extLst>
-        </p:spPr>
-      </p:pic>
-      <p:pic>
-        <p:nvPicPr>
-          <p:cNvPr id="1026" name="Picture 2" descr="Vue.js - Wikipedia">
-            <a:extLst>
-              <a:ext uri="{FF2B5EF4-FFF2-40B4-BE49-F238E27FC236}">
-                <a16:creationId xmlns:a16="http://schemas.microsoft.com/office/drawing/2014/main" id="{B98F25B4-E68D-7E4F-A5D1-FF2E7AFACD39}"/>
-              </a:ext>
-            </a:extLst>
-          </p:cNvPr>
-          <p:cNvPicPr>
-            <a:picLocks noChangeAspect="1" noChangeArrowheads="1"/>
-          </p:cNvPicPr>
-          <p:nvPr/>
-        </p:nvPicPr>
-        <p:blipFill>
-          <a:blip r:embed="rId9">
-            <a:extLst>
-              <a:ext uri="{28A0092B-C50C-407E-A947-70E740481C1C}">
-                <a14:useLocalDpi xmlns:a14="http://schemas.microsoft.com/office/drawing/2010/main" val="0"/>
-              </a:ext>
-            </a:extLst>
-          </a:blip>
-          <a:srcRect/>
-          <a:stretch>
-            <a:fillRect/>
-          </a:stretch>
-        </p:blipFill>
-        <p:spPr bwMode="auto">
-          <a:xfrm>
-            <a:off x="7604123" y="936991"/>
-            <a:ext cx="2311401" cy="1440805"/>
+            <a:off x="9131340" y="728962"/>
+            <a:ext cx="3008272" cy="1692153"/>
           </a:xfrm>
           <a:prstGeom prst="rect">
             <a:avLst/>
@@ -11213,6 +8854,9 @@
         </p:spPr>
       </p:pic>
     </p:spTree>
+    <p:custDataLst>
+      <p:tags r:id="rId1"/>
+    </p:custDataLst>
   </p:cSld>
   <p:clrMapOvr>
     <a:masterClrMapping/>
@@ -11220,832 +8864,7 @@
 </p:sld>
 </file>
 
-<file path=ppt/slides/slide6.xml><?xml version="1.0" encoding="utf-8"?>
-<p:sld xmlns:a="http://schemas.openxmlformats.org/drawingml/2006/main" xmlns:r="http://schemas.openxmlformats.org/officeDocument/2006/relationships" xmlns:p="http://schemas.openxmlformats.org/presentationml/2006/main">
-  <p:cSld>
-    <p:spTree>
-      <p:nvGrpSpPr>
-        <p:cNvPr id="1" name=""/>
-        <p:cNvGrpSpPr/>
-        <p:nvPr/>
-      </p:nvGrpSpPr>
-      <p:grpSpPr>
-        <a:xfrm>
-          <a:off x="0" y="0"/>
-          <a:ext cx="0" cy="0"/>
-          <a:chOff x="0" y="0"/>
-          <a:chExt cx="0" cy="0"/>
-        </a:xfrm>
-      </p:grpSpPr>
-      <p:sp>
-        <p:nvSpPr>
-          <p:cNvPr id="2" name="Title 1">
-            <a:extLst>
-              <a:ext uri="{FF2B5EF4-FFF2-40B4-BE49-F238E27FC236}">
-                <a16:creationId xmlns:a16="http://schemas.microsoft.com/office/drawing/2014/main" id="{C8E84B57-3507-1A49-A3D7-7D9E729E9D6A}"/>
-              </a:ext>
-            </a:extLst>
-          </p:cNvPr>
-          <p:cNvSpPr>
-            <a:spLocks noGrp="1"/>
-          </p:cNvSpPr>
-          <p:nvPr>
-            <p:ph type="title"/>
-          </p:nvPr>
-        </p:nvSpPr>
-        <p:spPr/>
-        <p:txBody>
-          <a:bodyPr/>
-          <a:lstStyle/>
-          <a:p>
-            <a:endParaRPr lang="en-CN"/>
-          </a:p>
-        </p:txBody>
-      </p:sp>
-      <p:graphicFrame>
-        <p:nvGraphicFramePr>
-          <p:cNvPr id="5" name="Content Placeholder 2">
-            <a:extLst>
-              <a:ext uri="{FF2B5EF4-FFF2-40B4-BE49-F238E27FC236}">
-                <a16:creationId xmlns:a16="http://schemas.microsoft.com/office/drawing/2014/main" id="{97B2F504-F541-687F-7C60-26C43302065D}"/>
-              </a:ext>
-            </a:extLst>
-          </p:cNvPr>
-          <p:cNvGraphicFramePr>
-            <a:graphicFrameLocks noGrp="1"/>
-          </p:cNvGraphicFramePr>
-          <p:nvPr>
-            <p:ph idx="1"/>
-          </p:nvPr>
-        </p:nvGraphicFramePr>
-        <p:xfrm>
-          <a:off x="1981200" y="1600201"/>
-          <a:ext cx="8229600" cy="4525963"/>
-        </p:xfrm>
-        <a:graphic>
-          <a:graphicData uri="http://schemas.openxmlformats.org/drawingml/2006/diagram">
-            <dgm:relIds xmlns:dgm="http://schemas.openxmlformats.org/drawingml/2006/diagram" xmlns:r="http://schemas.openxmlformats.org/officeDocument/2006/relationships" r:dm="rId2" r:lo="rId3" r:qs="rId4" r:cs="rId5"/>
-          </a:graphicData>
-        </a:graphic>
-      </p:graphicFrame>
-    </p:spTree>
-    <p:extLst>
-      <p:ext uri="{BB962C8B-B14F-4D97-AF65-F5344CB8AC3E}">
-        <p14:creationId xmlns:p14="http://schemas.microsoft.com/office/powerpoint/2010/main" val="1369805682"/>
-      </p:ext>
-    </p:extLst>
-  </p:cSld>
-  <p:clrMapOvr>
-    <a:masterClrMapping/>
-  </p:clrMapOvr>
-</p:sld>
-</file>
-
-<file path=ppt/slides/slide7.xml><?xml version="1.0" encoding="utf-8"?>
-<p:sld xmlns:a="http://schemas.openxmlformats.org/drawingml/2006/main" xmlns:r="http://schemas.openxmlformats.org/officeDocument/2006/relationships" xmlns:p="http://schemas.openxmlformats.org/presentationml/2006/main">
-  <p:cSld>
-    <p:bg>
-      <p:bgPr>
-        <a:solidFill>
-          <a:schemeClr val="bg1"/>
-        </a:solidFill>
-        <a:effectLst/>
-      </p:bgPr>
-    </p:bg>
-    <p:spTree>
-      <p:nvGrpSpPr>
-        <p:cNvPr id="1" name=""/>
-        <p:cNvGrpSpPr/>
-        <p:nvPr/>
-      </p:nvGrpSpPr>
-      <p:grpSpPr>
-        <a:xfrm>
-          <a:off x="0" y="0"/>
-          <a:ext cx="0" cy="0"/>
-          <a:chOff x="0" y="0"/>
-          <a:chExt cx="0" cy="0"/>
-        </a:xfrm>
-      </p:grpSpPr>
-      <p:sp useBgFill="1">
-        <p:nvSpPr>
-          <p:cNvPr id="7252" name="Rectangle 7251">
-            <a:extLst>
-              <a:ext uri="{FF2B5EF4-FFF2-40B4-BE49-F238E27FC236}">
-                <a16:creationId xmlns:a16="http://schemas.microsoft.com/office/drawing/2014/main" id="{D009D6D5-DAC2-4A8B-A17A-E206B9012D09}"/>
-              </a:ext>
-              <a:ext uri="{C183D7F6-B498-43B3-948B-1728B52AA6E4}">
-                <adec:decorative xmlns:adec="http://schemas.microsoft.com/office/drawing/2017/decorative" val="1"/>
-              </a:ext>
-            </a:extLst>
-          </p:cNvPr>
-          <p:cNvSpPr>
-            <a:spLocks noGrp="1" noRot="1" noChangeAspect="1" noMove="1" noResize="1" noEditPoints="1" noAdjustHandles="1" noChangeArrowheads="1" noChangeShapeType="1" noTextEdit="1"/>
-          </p:cNvSpPr>
-          <p:nvPr>
-            <p:extLst>
-              <p:ext uri="{386F3935-93C4-4BCD-93E2-E3B085C9AB24}">
-                <p16:designElem xmlns:p16="http://schemas.microsoft.com/office/powerpoint/2015/main" val="1"/>
-              </p:ext>
-            </p:extLst>
-          </p:nvPr>
-        </p:nvSpPr>
-        <p:spPr>
-          <a:xfrm>
-            <a:off x="0" y="0"/>
-            <a:ext cx="12188952" cy="6858000"/>
-          </a:xfrm>
-          <a:prstGeom prst="rect">
-            <a:avLst/>
-          </a:prstGeom>
-          <a:ln>
-            <a:noFill/>
-          </a:ln>
-        </p:spPr>
-        <p:style>
-          <a:lnRef idx="2">
-            <a:schemeClr val="accent1">
-              <a:shade val="50000"/>
-            </a:schemeClr>
-          </a:lnRef>
-          <a:fillRef idx="1">
-            <a:schemeClr val="accent1"/>
-          </a:fillRef>
-          <a:effectRef idx="0">
-            <a:schemeClr val="accent1"/>
-          </a:effectRef>
-          <a:fontRef idx="minor">
-            <a:schemeClr val="lt1"/>
-          </a:fontRef>
-        </p:style>
-        <p:txBody>
-          <a:bodyPr rtlCol="0" anchor="ctr"/>
-          <a:lstStyle/>
-          <a:p>
-            <a:pPr algn="ctr"/>
-            <a:endParaRPr lang="en-US"/>
-          </a:p>
-        </p:txBody>
-      </p:sp>
-      <p:sp>
-        <p:nvSpPr>
-          <p:cNvPr id="2" name="标题 1">
-            <a:extLst>
-              <a:ext uri="{FF2B5EF4-FFF2-40B4-BE49-F238E27FC236}">
-                <a16:creationId xmlns:a16="http://schemas.microsoft.com/office/drawing/2014/main" id="{50F40516-69FC-4A4B-E2B8-16F455F515D7}"/>
-              </a:ext>
-            </a:extLst>
-          </p:cNvPr>
-          <p:cNvSpPr>
-            <a:spLocks noGrp="1"/>
-          </p:cNvSpPr>
-          <p:nvPr>
-            <p:ph type="title"/>
-          </p:nvPr>
-        </p:nvSpPr>
-        <p:spPr>
-          <a:xfrm>
-            <a:off x="838201" y="365125"/>
-            <a:ext cx="5251316" cy="1807305"/>
-          </a:xfrm>
-        </p:spPr>
-        <p:txBody>
-          <a:bodyPr>
-            <a:normAutofit/>
-          </a:bodyPr>
-          <a:lstStyle/>
-          <a:p>
-            <a:r>
-              <a:rPr kumimoji="1" lang="en-US" altLang="zh-CN" dirty="0"/>
-              <a:t>React VS Vue(Vue3)</a:t>
-            </a:r>
-            <a:endParaRPr kumimoji="1" lang="zh-CN" altLang="en-US" dirty="0"/>
-          </a:p>
-        </p:txBody>
-      </p:sp>
-      <p:sp>
-        <p:nvSpPr>
-          <p:cNvPr id="7247" name="内容占位符 2">
-            <a:extLst>
-              <a:ext uri="{FF2B5EF4-FFF2-40B4-BE49-F238E27FC236}">
-                <a16:creationId xmlns:a16="http://schemas.microsoft.com/office/drawing/2014/main" id="{5A625B99-3BA4-E934-8830-EAC8C74A909A}"/>
-              </a:ext>
-            </a:extLst>
-          </p:cNvPr>
-          <p:cNvSpPr>
-            <a:spLocks noGrp="1"/>
-          </p:cNvSpPr>
-          <p:nvPr>
-            <p:ph idx="1"/>
-          </p:nvPr>
-        </p:nvSpPr>
-        <p:spPr>
-          <a:xfrm>
-            <a:off x="838200" y="2333297"/>
-            <a:ext cx="4619621" cy="3843666"/>
-          </a:xfrm>
-        </p:spPr>
-        <p:txBody>
-          <a:bodyPr>
-            <a:normAutofit/>
-          </a:bodyPr>
-          <a:lstStyle/>
-          <a:p>
-            <a:r>
-              <a:rPr kumimoji="1" lang="en-US" altLang="zh-CN" sz="2000" dirty="0"/>
-              <a:t>Vue </a:t>
-            </a:r>
-            <a:r>
-              <a:rPr kumimoji="1" lang="zh-CN" altLang="en-US" sz="2000" dirty="0"/>
-              <a:t>是渐进式</a:t>
-            </a:r>
-            <a:r>
-              <a:rPr kumimoji="1" lang="en" altLang="zh-CN" sz="2000" dirty="0"/>
-              <a:t>JavaScript </a:t>
-            </a:r>
-            <a:r>
-              <a:rPr kumimoji="1" lang="zh-CN" altLang="en-US" sz="2000" dirty="0"/>
-              <a:t>框架，设计理念及文档对国人友好</a:t>
-            </a:r>
-            <a:endParaRPr kumimoji="1" lang="en-US" altLang="zh-CN" sz="2000" dirty="0"/>
-          </a:p>
-          <a:p>
-            <a:pPr lvl="1"/>
-            <a:r>
-              <a:rPr kumimoji="1" lang="zh-CN" altLang="en-US" sz="2000" dirty="0"/>
-              <a:t> 华人尤雨溪所写</a:t>
-            </a:r>
-            <a:endParaRPr kumimoji="1" lang="en-US" altLang="zh-CN" sz="2000" dirty="0"/>
-          </a:p>
-          <a:p>
-            <a:r>
-              <a:rPr kumimoji="1" lang="en-US" altLang="zh-CN" sz="2000" dirty="0"/>
-              <a:t>React</a:t>
-            </a:r>
-            <a:r>
-              <a:rPr kumimoji="1" lang="zh-CN" altLang="en-US" sz="2000" dirty="0"/>
-              <a:t>更加国际化，在就业市场的吸引力更高</a:t>
-            </a:r>
-            <a:endParaRPr kumimoji="1" lang="en-US" altLang="zh-CN" sz="2000" dirty="0"/>
-          </a:p>
-          <a:p>
-            <a:r>
-              <a:rPr kumimoji="1" lang="en-US" altLang="zh-CN" sz="2000" dirty="0"/>
-              <a:t>React</a:t>
-            </a:r>
-            <a:r>
-              <a:rPr kumimoji="1" lang="zh-CN" altLang="en-US" sz="2000" dirty="0"/>
-              <a:t>相对来说生态更加完善</a:t>
-            </a:r>
-            <a:endParaRPr kumimoji="1" lang="en-US" altLang="zh-CN" sz="2000" dirty="0"/>
-          </a:p>
-          <a:p>
-            <a:r>
-              <a:rPr kumimoji="1" lang="zh-CN" altLang="en-US" sz="2000" dirty="0"/>
-              <a:t>学习</a:t>
-            </a:r>
-            <a:r>
-              <a:rPr kumimoji="1" lang="en-US" altLang="zh-CN" sz="2000" dirty="0"/>
-              <a:t>React</a:t>
-            </a:r>
-            <a:r>
-              <a:rPr kumimoji="1" lang="zh-CN" altLang="en-US" sz="2000" dirty="0"/>
-              <a:t>后学习</a:t>
-            </a:r>
-            <a:r>
-              <a:rPr kumimoji="1" lang="en-US" altLang="zh-CN" sz="2000" dirty="0"/>
-              <a:t>Vue</a:t>
-            </a:r>
-            <a:r>
-              <a:rPr kumimoji="1" lang="zh-CN" altLang="en-US" sz="2000" dirty="0"/>
-              <a:t>很简单</a:t>
-            </a:r>
-            <a:endParaRPr kumimoji="1" lang="en-US" altLang="zh-CN" sz="2000" dirty="0"/>
-          </a:p>
-        </p:txBody>
-      </p:sp>
-      <p:pic>
-        <p:nvPicPr>
-          <p:cNvPr id="7172" name="Picture 4">
-            <a:extLst>
-              <a:ext uri="{FF2B5EF4-FFF2-40B4-BE49-F238E27FC236}">
-                <a16:creationId xmlns:a16="http://schemas.microsoft.com/office/drawing/2014/main" id="{A5B2EF6A-8F31-9BD3-FC76-33773A6F8FA2}"/>
-              </a:ext>
-            </a:extLst>
-          </p:cNvPr>
-          <p:cNvPicPr>
-            <a:picLocks noChangeAspect="1" noChangeArrowheads="1"/>
-          </p:cNvPicPr>
-          <p:nvPr/>
-        </p:nvPicPr>
-        <p:blipFill rotWithShape="1">
-          <a:blip r:embed="rId2">
-            <a:extLst>
-              <a:ext uri="{28A0092B-C50C-407E-A947-70E740481C1C}">
-                <a14:useLocalDpi xmlns:a14="http://schemas.microsoft.com/office/drawing/2010/main" val="0"/>
-              </a:ext>
-            </a:extLst>
-          </a:blip>
-          <a:srcRect b="1663"/>
-          <a:stretch/>
-        </p:blipFill>
-        <p:spPr bwMode="auto">
-          <a:xfrm>
-            <a:off x="6229207" y="0"/>
-            <a:ext cx="5962794" cy="6858000"/>
-          </a:xfrm>
-          <a:custGeom>
-            <a:avLst/>
-            <a:gdLst/>
-            <a:ahLst/>
-            <a:cxnLst/>
-            <a:rect l="l" t="t" r="r" b="b"/>
-            <a:pathLst>
-              <a:path w="5962785" h="6858000">
-                <a:moveTo>
-                  <a:pt x="1044839" y="0"/>
-                </a:moveTo>
-                <a:lnTo>
-                  <a:pt x="5962785" y="0"/>
-                </a:lnTo>
-                <a:lnTo>
-                  <a:pt x="5962785" y="6858000"/>
-                </a:lnTo>
-                <a:lnTo>
-                  <a:pt x="1469886" y="6858000"/>
-                </a:lnTo>
-                <a:lnTo>
-                  <a:pt x="1416006" y="6823984"/>
-                </a:lnTo>
-                <a:cubicBezTo>
-                  <a:pt x="1356767" y="6787940"/>
-                  <a:pt x="1296437" y="6755500"/>
-                  <a:pt x="1232473" y="6733873"/>
-                </a:cubicBezTo>
-                <a:cubicBezTo>
-                  <a:pt x="1145250" y="6705037"/>
-                  <a:pt x="1060933" y="6654575"/>
-                  <a:pt x="1075471" y="6503186"/>
-                </a:cubicBezTo>
-                <a:cubicBezTo>
-                  <a:pt x="1078378" y="6459932"/>
-                  <a:pt x="1055118" y="6427493"/>
-                  <a:pt x="1020229" y="6438306"/>
-                </a:cubicBezTo>
-                <a:cubicBezTo>
-                  <a:pt x="953358" y="6459932"/>
-                  <a:pt x="921375" y="6398656"/>
-                  <a:pt x="883579" y="6351798"/>
-                </a:cubicBezTo>
-                <a:cubicBezTo>
-                  <a:pt x="816707" y="6268895"/>
-                  <a:pt x="752743" y="6182387"/>
-                  <a:pt x="645167" y="6167969"/>
-                </a:cubicBezTo>
-                <a:cubicBezTo>
-                  <a:pt x="665519" y="6103088"/>
-                  <a:pt x="700408" y="6110298"/>
-                  <a:pt x="732391" y="6124716"/>
-                </a:cubicBezTo>
-                <a:cubicBezTo>
-                  <a:pt x="816707" y="6160761"/>
-                  <a:pt x="901023" y="6200410"/>
-                  <a:pt x="985339" y="6236455"/>
-                </a:cubicBezTo>
-                <a:cubicBezTo>
-                  <a:pt x="1040581" y="6258081"/>
-                  <a:pt x="1095822" y="6290522"/>
-                  <a:pt x="1168509" y="6265291"/>
-                </a:cubicBezTo>
-                <a:cubicBezTo>
-                  <a:pt x="1104545" y="6135530"/>
-                  <a:pt x="996969" y="6110298"/>
-                  <a:pt x="909746" y="6070649"/>
-                </a:cubicBezTo>
-                <a:cubicBezTo>
-                  <a:pt x="802169" y="6020185"/>
-                  <a:pt x="738206" y="5926470"/>
-                  <a:pt x="659704" y="5818335"/>
-                </a:cubicBezTo>
-                <a:cubicBezTo>
-                  <a:pt x="738206" y="5789500"/>
-                  <a:pt x="787632" y="5868798"/>
-                  <a:pt x="851597" y="5865193"/>
-                </a:cubicBezTo>
-                <a:cubicBezTo>
-                  <a:pt x="854504" y="5854380"/>
-                  <a:pt x="860319" y="5832753"/>
-                  <a:pt x="860319" y="5832753"/>
-                </a:cubicBezTo>
-                <a:cubicBezTo>
-                  <a:pt x="755650" y="5775081"/>
-                  <a:pt x="709132" y="5666947"/>
-                  <a:pt x="691686" y="5533581"/>
-                </a:cubicBezTo>
-                <a:cubicBezTo>
-                  <a:pt x="685872" y="5465095"/>
-                  <a:pt x="648075" y="5443468"/>
-                  <a:pt x="610278" y="5411029"/>
-                </a:cubicBezTo>
-                <a:cubicBezTo>
-                  <a:pt x="482350" y="5299289"/>
-                  <a:pt x="345700" y="5198364"/>
-                  <a:pt x="238123" y="5046976"/>
-                </a:cubicBezTo>
-                <a:cubicBezTo>
-                  <a:pt x="363144" y="5064998"/>
-                  <a:pt x="461997" y="5165924"/>
-                  <a:pt x="592833" y="5209177"/>
-                </a:cubicBezTo>
-                <a:cubicBezTo>
-                  <a:pt x="488165" y="5043371"/>
-                  <a:pt x="351514" y="4956864"/>
-                  <a:pt x="226494" y="4855939"/>
-                </a:cubicBezTo>
-                <a:cubicBezTo>
-                  <a:pt x="168344" y="4809081"/>
-                  <a:pt x="116011" y="4751408"/>
-                  <a:pt x="49139" y="4726177"/>
-                </a:cubicBezTo>
-                <a:cubicBezTo>
-                  <a:pt x="25879" y="4718968"/>
-                  <a:pt x="-14825" y="4700947"/>
-                  <a:pt x="5527" y="4650483"/>
-                </a:cubicBezTo>
-                <a:cubicBezTo>
-                  <a:pt x="22972" y="4607230"/>
-                  <a:pt x="54954" y="4621648"/>
-                  <a:pt x="84029" y="4632460"/>
-                </a:cubicBezTo>
-                <a:cubicBezTo>
-                  <a:pt x="153807" y="4661296"/>
-                  <a:pt x="229401" y="4661296"/>
-                  <a:pt x="325347" y="4661296"/>
-                </a:cubicBezTo>
-                <a:cubicBezTo>
-                  <a:pt x="243939" y="4524326"/>
-                  <a:pt x="95658" y="4567580"/>
-                  <a:pt x="25879" y="4423401"/>
-                </a:cubicBezTo>
-                <a:cubicBezTo>
-                  <a:pt x="113103" y="4398170"/>
-                  <a:pt x="179975" y="4448632"/>
-                  <a:pt x="249753" y="4459446"/>
-                </a:cubicBezTo>
-                <a:cubicBezTo>
-                  <a:pt x="313718" y="4470259"/>
-                  <a:pt x="328254" y="4445028"/>
-                  <a:pt x="313718" y="4365729"/>
-                </a:cubicBezTo>
-                <a:cubicBezTo>
-                  <a:pt x="290458" y="4243177"/>
-                  <a:pt x="325347" y="4181900"/>
-                  <a:pt x="418386" y="4214341"/>
-                </a:cubicBezTo>
-                <a:cubicBezTo>
-                  <a:pt x="505609" y="4246781"/>
-                  <a:pt x="514332" y="4199922"/>
-                  <a:pt x="491072" y="4131438"/>
-                </a:cubicBezTo>
-                <a:cubicBezTo>
-                  <a:pt x="456183" y="4030512"/>
-                  <a:pt x="493979" y="3951214"/>
-                  <a:pt x="520147" y="3864706"/>
-                </a:cubicBezTo>
-                <a:cubicBezTo>
-                  <a:pt x="560851" y="3734945"/>
-                  <a:pt x="543407" y="3670064"/>
-                  <a:pt x="459090" y="3572743"/>
-                </a:cubicBezTo>
-                <a:cubicBezTo>
-                  <a:pt x="409664" y="3518676"/>
-                  <a:pt x="360236" y="3471818"/>
-                  <a:pt x="290458" y="3424959"/>
-                </a:cubicBezTo>
-                <a:cubicBezTo>
-                  <a:pt x="450368" y="3399728"/>
-                  <a:pt x="284643" y="3313221"/>
-                  <a:pt x="339884" y="3259153"/>
-                </a:cubicBezTo>
-                <a:cubicBezTo>
-                  <a:pt x="453275" y="3237527"/>
-                  <a:pt x="543407" y="3410542"/>
-                  <a:pt x="697501" y="3360078"/>
-                </a:cubicBezTo>
-                <a:cubicBezTo>
-                  <a:pt x="511425" y="3212294"/>
-                  <a:pt x="302087" y="3165436"/>
-                  <a:pt x="165437" y="2967190"/>
-                </a:cubicBezTo>
-                <a:cubicBezTo>
-                  <a:pt x="197419" y="2923937"/>
-                  <a:pt x="229401" y="2967190"/>
-                  <a:pt x="255568" y="2949167"/>
-                </a:cubicBezTo>
-                <a:cubicBezTo>
-                  <a:pt x="255568" y="2938354"/>
-                  <a:pt x="560851" y="3006840"/>
-                  <a:pt x="578296" y="2725691"/>
-                </a:cubicBezTo>
-                <a:cubicBezTo>
-                  <a:pt x="584111" y="2725691"/>
-                  <a:pt x="589926" y="2725691"/>
-                  <a:pt x="595740" y="2714876"/>
-                </a:cubicBezTo>
-                <a:cubicBezTo>
-                  <a:pt x="627722" y="2675228"/>
-                  <a:pt x="598648" y="2581510"/>
-                  <a:pt x="650982" y="2574301"/>
-                </a:cubicBezTo>
-                <a:cubicBezTo>
-                  <a:pt x="709132" y="2567092"/>
-                  <a:pt x="764373" y="2534653"/>
-                  <a:pt x="825429" y="2552674"/>
-                </a:cubicBezTo>
-                <a:cubicBezTo>
-                  <a:pt x="871949" y="2567092"/>
-                  <a:pt x="921375" y="2585115"/>
-                  <a:pt x="970802" y="2585115"/>
-                </a:cubicBezTo>
-                <a:cubicBezTo>
-                  <a:pt x="1023136" y="2585115"/>
-                  <a:pt x="1095822" y="2707668"/>
-                  <a:pt x="1127805" y="2545465"/>
-                </a:cubicBezTo>
-                <a:cubicBezTo>
-                  <a:pt x="1127805" y="2538257"/>
-                  <a:pt x="1217936" y="2556280"/>
-                  <a:pt x="1267362" y="2563488"/>
-                </a:cubicBezTo>
-                <a:cubicBezTo>
-                  <a:pt x="1308067" y="2570698"/>
-                  <a:pt x="1357494" y="2603137"/>
-                  <a:pt x="1386568" y="2538257"/>
-                </a:cubicBezTo>
-                <a:cubicBezTo>
-                  <a:pt x="1401105" y="2498607"/>
-                  <a:pt x="1331326" y="2426518"/>
-                  <a:pt x="1270270" y="2419309"/>
-                </a:cubicBezTo>
-                <a:cubicBezTo>
-                  <a:pt x="1215029" y="2412101"/>
-                  <a:pt x="1159787" y="2404892"/>
-                  <a:pt x="1107453" y="2419309"/>
-                </a:cubicBezTo>
-                <a:cubicBezTo>
-                  <a:pt x="1043489" y="2437331"/>
-                  <a:pt x="1008599" y="2408495"/>
-                  <a:pt x="991154" y="2343615"/>
-                </a:cubicBezTo>
-                <a:cubicBezTo>
-                  <a:pt x="970802" y="2275131"/>
-                  <a:pt x="933005" y="2239085"/>
-                  <a:pt x="880671" y="2206645"/>
-                </a:cubicBezTo>
-                <a:cubicBezTo>
-                  <a:pt x="752743" y="2127346"/>
-                  <a:pt x="630630" y="2033629"/>
-                  <a:pt x="491072" y="1986771"/>
-                </a:cubicBezTo>
-                <a:cubicBezTo>
-                  <a:pt x="464905" y="1979562"/>
-                  <a:pt x="432923" y="1965145"/>
-                  <a:pt x="421293" y="1903868"/>
-                </a:cubicBezTo>
-                <a:cubicBezTo>
-                  <a:pt x="799262" y="1997584"/>
-                  <a:pt x="1142342" y="2239085"/>
-                  <a:pt x="1531941" y="2224667"/>
-                </a:cubicBezTo>
-                <a:cubicBezTo>
-                  <a:pt x="1427272" y="2148974"/>
-                  <a:pt x="1302252" y="2145369"/>
-                  <a:pt x="1188861" y="2091301"/>
-                </a:cubicBezTo>
-                <a:cubicBezTo>
-                  <a:pt x="1270270" y="2051652"/>
-                  <a:pt x="1345864" y="2094906"/>
-                  <a:pt x="1421458" y="2116532"/>
-                </a:cubicBezTo>
-                <a:cubicBezTo>
-                  <a:pt x="1485422" y="2134554"/>
-                  <a:pt x="1543571" y="2138160"/>
-                  <a:pt x="1549386" y="2026420"/>
-                </a:cubicBezTo>
-                <a:cubicBezTo>
-                  <a:pt x="1549386" y="2015607"/>
-                  <a:pt x="1549386" y="2008398"/>
-                  <a:pt x="1549386" y="1997584"/>
-                </a:cubicBezTo>
-                <a:cubicBezTo>
-                  <a:pt x="1526126" y="1950727"/>
-                  <a:pt x="1494144" y="1929099"/>
-                  <a:pt x="1453440" y="1914682"/>
-                </a:cubicBezTo>
-                <a:cubicBezTo>
-                  <a:pt x="1430180" y="1907473"/>
-                  <a:pt x="1398198" y="1893056"/>
-                  <a:pt x="1398198" y="1860614"/>
-                </a:cubicBezTo>
-                <a:cubicBezTo>
-                  <a:pt x="1401105" y="1738063"/>
-                  <a:pt x="1322604" y="1702018"/>
-                  <a:pt x="1247011" y="1665972"/>
-                </a:cubicBezTo>
-                <a:cubicBezTo>
-                  <a:pt x="1287715" y="1604696"/>
-                  <a:pt x="1322604" y="1647950"/>
-                  <a:pt x="1354586" y="1644345"/>
-                </a:cubicBezTo>
-                <a:cubicBezTo>
-                  <a:pt x="1374939" y="1640741"/>
-                  <a:pt x="1395290" y="1637138"/>
-                  <a:pt x="1395290" y="1604696"/>
-                </a:cubicBezTo>
-                <a:cubicBezTo>
-                  <a:pt x="1395290" y="1579465"/>
-                  <a:pt x="1386568" y="1547025"/>
-                  <a:pt x="1366216" y="1547025"/>
-                </a:cubicBezTo>
-                <a:cubicBezTo>
-                  <a:pt x="1238288" y="1543420"/>
-                  <a:pt x="1165601" y="1370405"/>
-                  <a:pt x="1031858" y="1370405"/>
-                </a:cubicBezTo>
-                <a:cubicBezTo>
-                  <a:pt x="950450" y="1370405"/>
-                  <a:pt x="1072563" y="1273083"/>
-                  <a:pt x="1005692" y="1233435"/>
-                </a:cubicBezTo>
-                <a:cubicBezTo>
-                  <a:pt x="991154" y="1222621"/>
-                  <a:pt x="1046396" y="1208203"/>
-                  <a:pt x="1069655" y="1211808"/>
-                </a:cubicBezTo>
-                <a:cubicBezTo>
-                  <a:pt x="1092915" y="1215412"/>
-                  <a:pt x="1113268" y="1240644"/>
-                  <a:pt x="1142342" y="1222621"/>
-                </a:cubicBezTo>
-                <a:cubicBezTo>
-                  <a:pt x="1156879" y="1157741"/>
-                  <a:pt x="1119082" y="1132510"/>
-                  <a:pt x="1084193" y="1114487"/>
-                </a:cubicBezTo>
-                <a:cubicBezTo>
-                  <a:pt x="1008599" y="1071234"/>
-                  <a:pt x="933005" y="1020771"/>
-                  <a:pt x="848689" y="1006353"/>
-                </a:cubicBezTo>
-                <a:cubicBezTo>
-                  <a:pt x="819615" y="1002748"/>
-                  <a:pt x="802169" y="984726"/>
-                  <a:pt x="805077" y="948681"/>
-                </a:cubicBezTo>
-                <a:cubicBezTo>
-                  <a:pt x="810892" y="901822"/>
-                  <a:pt x="839967" y="916240"/>
-                  <a:pt x="863226" y="919844"/>
-                </a:cubicBezTo>
-                <a:cubicBezTo>
-                  <a:pt x="877764" y="923450"/>
-                  <a:pt x="892301" y="934263"/>
-                  <a:pt x="906838" y="909031"/>
-                </a:cubicBezTo>
-                <a:cubicBezTo>
-                  <a:pt x="566666" y="653113"/>
-                  <a:pt x="386404" y="667532"/>
-                  <a:pt x="5527" y="458471"/>
-                </a:cubicBezTo>
-                <a:cubicBezTo>
-                  <a:pt x="89843" y="418822"/>
-                  <a:pt x="150900" y="447658"/>
-                  <a:pt x="209049" y="454867"/>
-                </a:cubicBezTo>
-                <a:cubicBezTo>
-                  <a:pt x="354422" y="472890"/>
-                  <a:pt x="264290" y="505329"/>
-                  <a:pt x="409664" y="526956"/>
-                </a:cubicBezTo>
-                <a:cubicBezTo>
-                  <a:pt x="479443" y="537770"/>
-                  <a:pt x="543407" y="573815"/>
-                  <a:pt x="621908" y="516143"/>
-                </a:cubicBezTo>
-                <a:cubicBezTo>
-                  <a:pt x="674242" y="476494"/>
-                  <a:pt x="758558" y="519747"/>
-                  <a:pt x="822522" y="552188"/>
-                </a:cubicBezTo>
-                <a:cubicBezTo>
-                  <a:pt x="874856" y="581024"/>
-                  <a:pt x="927190" y="588232"/>
-                  <a:pt x="996969" y="552188"/>
-                </a:cubicBezTo>
-                <a:cubicBezTo>
-                  <a:pt x="933005" y="530562"/>
-                  <a:pt x="883579" y="512539"/>
-                  <a:pt x="834151" y="498120"/>
-                </a:cubicBezTo>
-                <a:cubicBezTo>
-                  <a:pt x="793447" y="487307"/>
-                  <a:pt x="770187" y="462076"/>
-                  <a:pt x="773095" y="408008"/>
-                </a:cubicBezTo>
-                <a:cubicBezTo>
-                  <a:pt x="773095" y="379172"/>
-                  <a:pt x="764373" y="339523"/>
-                  <a:pt x="793447" y="325106"/>
-                </a:cubicBezTo>
-                <a:cubicBezTo>
-                  <a:pt x="816707" y="310688"/>
-                  <a:pt x="848689" y="325106"/>
-                  <a:pt x="860319" y="350336"/>
-                </a:cubicBezTo>
-                <a:cubicBezTo>
-                  <a:pt x="874856" y="397195"/>
-                  <a:pt x="889393" y="440449"/>
-                  <a:pt x="938820" y="444054"/>
-                </a:cubicBezTo>
-                <a:cubicBezTo>
-                  <a:pt x="1005692" y="451262"/>
-                  <a:pt x="967894" y="422426"/>
-                  <a:pt x="956265" y="386381"/>
-                </a:cubicBezTo>
-                <a:cubicBezTo>
-                  <a:pt x="944635" y="346733"/>
-                  <a:pt x="979525" y="335919"/>
-                  <a:pt x="1002784" y="343127"/>
-                </a:cubicBezTo>
-                <a:cubicBezTo>
-                  <a:pt x="1090008" y="375569"/>
-                  <a:pt x="1180139" y="317897"/>
-                  <a:pt x="1270270" y="364755"/>
-                </a:cubicBezTo>
-                <a:cubicBezTo>
-                  <a:pt x="1247011" y="249411"/>
-                  <a:pt x="1197583" y="198949"/>
-                  <a:pt x="1092915" y="180926"/>
-                </a:cubicBezTo>
-                <a:cubicBezTo>
-                  <a:pt x="1055118" y="177322"/>
-                  <a:pt x="1014414" y="184530"/>
-                  <a:pt x="979525" y="152090"/>
-                </a:cubicBezTo>
-                <a:cubicBezTo>
-                  <a:pt x="959172" y="134068"/>
-                  <a:pt x="938820" y="112441"/>
-                  <a:pt x="953358" y="76396"/>
-                </a:cubicBezTo>
-                <a:cubicBezTo>
-                  <a:pt x="962080" y="51165"/>
-                  <a:pt x="985339" y="51165"/>
-                  <a:pt x="1005692" y="58373"/>
-                </a:cubicBezTo>
-                <a:cubicBezTo>
-                  <a:pt x="1090008" y="98023"/>
-                  <a:pt x="1180139" y="108837"/>
-                  <a:pt x="1267362" y="123254"/>
-                </a:cubicBezTo>
-                <a:cubicBezTo>
-                  <a:pt x="1281900" y="126859"/>
-                  <a:pt x="1296437" y="134068"/>
-                  <a:pt x="1310975" y="98023"/>
-                </a:cubicBezTo>
-                <a:cubicBezTo>
-                  <a:pt x="1260095" y="81803"/>
-                  <a:pt x="1209941" y="62879"/>
-                  <a:pt x="1159787" y="43505"/>
-                </a:cubicBezTo>
-                <a:close/>
-              </a:path>
-            </a:pathLst>
-          </a:custGeom>
-          <a:noFill/>
-          <a:extLst>
-            <a:ext uri="{909E8E84-426E-40DD-AFC4-6F175D3DCCD1}">
-              <a14:hiddenFill xmlns:a14="http://schemas.microsoft.com/office/drawing/2010/main">
-                <a:solidFill>
-                  <a:srgbClr val="FFFFFF"/>
-                </a:solidFill>
-              </a14:hiddenFill>
-            </a:ext>
-          </a:extLst>
-        </p:spPr>
-      </p:pic>
-    </p:spTree>
-    <p:extLst>
-      <p:ext uri="{BB962C8B-B14F-4D97-AF65-F5344CB8AC3E}">
-        <p14:creationId xmlns:p14="http://schemas.microsoft.com/office/powerpoint/2010/main" val="1892552482"/>
-      </p:ext>
-    </p:extLst>
-  </p:cSld>
-  <p:clrMapOvr>
-    <a:masterClrMapping/>
-  </p:clrMapOvr>
-</p:sld>
-</file>
-
-<file path=ppt/slides/slide8.xml><?xml version="1.0" encoding="utf-8"?>
+<file path=ppt/slides/slide10.xml><?xml version="1.0" encoding="utf-8"?>
 <p:sld xmlns:a="http://schemas.openxmlformats.org/drawingml/2006/main" xmlns:r="http://schemas.openxmlformats.org/officeDocument/2006/relationships" xmlns:p="http://schemas.openxmlformats.org/presentationml/2006/main">
   <p:cSld>
     <p:bg>
@@ -12485,7 +9304,7 @@
 </p:sld>
 </file>
 
-<file path=ppt/slides/slide9.xml><?xml version="1.0" encoding="utf-8"?>
+<file path=ppt/slides/slide11.xml><?xml version="1.0" encoding="utf-8"?>
 <p:sld xmlns:a="http://schemas.openxmlformats.org/drawingml/2006/main" xmlns:r="http://schemas.openxmlformats.org/officeDocument/2006/relationships" xmlns:p="http://schemas.openxmlformats.org/presentationml/2006/main">
   <p:cSld>
     <p:bg>
@@ -13008,6 +9827,3626 @@
 </p:sld>
 </file>
 
+<file path=ppt/slides/slide12.xml><?xml version="1.0" encoding="utf-8"?>
+<p:sld xmlns:a="http://schemas.openxmlformats.org/drawingml/2006/main" xmlns:r="http://schemas.openxmlformats.org/officeDocument/2006/relationships" xmlns:p="http://schemas.openxmlformats.org/presentationml/2006/main">
+  <p:cSld>
+    <p:bg>
+      <p:bgPr>
+        <a:solidFill>
+          <a:schemeClr val="bg1"/>
+        </a:solidFill>
+        <a:effectLst/>
+      </p:bgPr>
+    </p:bg>
+    <p:spTree>
+      <p:nvGrpSpPr>
+        <p:cNvPr id="1" name=""/>
+        <p:cNvGrpSpPr/>
+        <p:nvPr/>
+      </p:nvGrpSpPr>
+      <p:grpSpPr>
+        <a:xfrm>
+          <a:off x="0" y="0"/>
+          <a:ext cx="0" cy="0"/>
+          <a:chOff x="0" y="0"/>
+          <a:chExt cx="0" cy="0"/>
+        </a:xfrm>
+      </p:grpSpPr>
+      <p:sp useBgFill="1">
+        <p:nvSpPr>
+          <p:cNvPr id="6151" name="Rectangle 6150">
+            <a:extLst>
+              <a:ext uri="{FF2B5EF4-FFF2-40B4-BE49-F238E27FC236}">
+                <a16:creationId xmlns:a16="http://schemas.microsoft.com/office/drawing/2014/main" id="{F944E337-3E5D-4A1F-A5A1-2057F25B8A7B}"/>
+              </a:ext>
+              <a:ext uri="{C183D7F6-B498-43B3-948B-1728B52AA6E4}">
+                <adec:decorative xmlns:adec="http://schemas.microsoft.com/office/drawing/2017/decorative" val="1"/>
+              </a:ext>
+            </a:extLst>
+          </p:cNvPr>
+          <p:cNvSpPr>
+            <a:spLocks noGrp="1" noRot="1" noChangeAspect="1" noMove="1" noResize="1" noEditPoints="1" noAdjustHandles="1" noChangeArrowheads="1" noChangeShapeType="1" noTextEdit="1"/>
+          </p:cNvSpPr>
+          <p:nvPr>
+            <p:extLst>
+              <p:ext uri="{386F3935-93C4-4BCD-93E2-E3B085C9AB24}">
+                <p16:designElem xmlns:p16="http://schemas.microsoft.com/office/powerpoint/2015/main" val="1"/>
+              </p:ext>
+            </p:extLst>
+          </p:nvPr>
+        </p:nvSpPr>
+        <p:spPr>
+          <a:xfrm>
+            <a:off x="0" y="0"/>
+            <a:ext cx="12192000" cy="6858000"/>
+          </a:xfrm>
+          <a:prstGeom prst="rect">
+            <a:avLst/>
+          </a:prstGeom>
+          <a:ln w="12700" cap="flat" cmpd="sng" algn="ctr">
+            <a:noFill/>
+            <a:prstDash val="solid"/>
+            <a:miter lim="800000"/>
+          </a:ln>
+          <a:effectLst/>
+          <a:extLst>
+            <a:ext uri="{91240B29-F687-4F45-9708-019B960494DF}">
+              <a14:hiddenLine xmlns:a14="http://schemas.microsoft.com/office/drawing/2010/main" w="12700" cap="flat" cmpd="sng" algn="ctr">
+                <a:solidFill>
+                  <a:schemeClr val="accent1">
+                    <a:shade val="50000"/>
+                  </a:schemeClr>
+                </a:solidFill>
+                <a:prstDash val="solid"/>
+                <a:miter lim="800000"/>
+              </a14:hiddenLine>
+            </a:ext>
+          </a:extLst>
+        </p:spPr>
+        <p:style>
+          <a:lnRef idx="2">
+            <a:schemeClr val="accent1">
+              <a:shade val="50000"/>
+            </a:schemeClr>
+          </a:lnRef>
+          <a:fillRef idx="1">
+            <a:schemeClr val="accent1"/>
+          </a:fillRef>
+          <a:effectRef idx="0">
+            <a:schemeClr val="accent1"/>
+          </a:effectRef>
+          <a:fontRef idx="minor">
+            <a:schemeClr val="lt1"/>
+          </a:fontRef>
+        </p:style>
+        <p:txBody>
+          <a:bodyPr rtlCol="0" anchor="ctr"/>
+          <a:lstStyle/>
+          <a:p>
+            <a:pPr algn="ctr"/>
+            <a:endParaRPr lang="en-US"/>
+          </a:p>
+        </p:txBody>
+      </p:sp>
+      <p:sp>
+        <p:nvSpPr>
+          <p:cNvPr id="6153" name="Rectangle 6152">
+            <a:extLst>
+              <a:ext uri="{FF2B5EF4-FFF2-40B4-BE49-F238E27FC236}">
+                <a16:creationId xmlns:a16="http://schemas.microsoft.com/office/drawing/2014/main" id="{4DA50D69-7CF7-4844-B844-A2B821C77F24}"/>
+              </a:ext>
+              <a:ext uri="{C183D7F6-B498-43B3-948B-1728B52AA6E4}">
+                <adec:decorative xmlns:adec="http://schemas.microsoft.com/office/drawing/2017/decorative" val="1"/>
+              </a:ext>
+            </a:extLst>
+          </p:cNvPr>
+          <p:cNvSpPr>
+            <a:spLocks noGrp="1" noRot="1" noChangeAspect="1" noMove="1" noResize="1" noEditPoints="1" noAdjustHandles="1" noChangeArrowheads="1" noChangeShapeType="1" noTextEdit="1"/>
+          </p:cNvSpPr>
+          <p:nvPr>
+            <p:extLst>
+              <p:ext uri="{386F3935-93C4-4BCD-93E2-E3B085C9AB24}">
+                <p16:designElem xmlns:p16="http://schemas.microsoft.com/office/powerpoint/2015/main" val="1"/>
+              </p:ext>
+            </p:extLst>
+          </p:nvPr>
+        </p:nvSpPr>
+        <p:spPr>
+          <a:xfrm>
+            <a:off x="1" y="-7854"/>
+            <a:ext cx="12192000" cy="6865854"/>
+          </a:xfrm>
+          <a:prstGeom prst="rect">
+            <a:avLst/>
+          </a:prstGeom>
+          <a:solidFill>
+            <a:srgbClr val="82766A">
+              <a:alpha val="15000"/>
+            </a:srgbClr>
+          </a:solidFill>
+          <a:ln>
+            <a:noFill/>
+          </a:ln>
+        </p:spPr>
+        <p:style>
+          <a:lnRef idx="2">
+            <a:schemeClr val="accent1">
+              <a:shade val="50000"/>
+            </a:schemeClr>
+          </a:lnRef>
+          <a:fillRef idx="1">
+            <a:schemeClr val="accent1"/>
+          </a:fillRef>
+          <a:effectRef idx="0">
+            <a:schemeClr val="accent1"/>
+          </a:effectRef>
+          <a:fontRef idx="minor">
+            <a:schemeClr val="lt1"/>
+          </a:fontRef>
+        </p:style>
+        <p:txBody>
+          <a:bodyPr rtlCol="0" anchor="ctr"/>
+          <a:lstStyle/>
+          <a:p>
+            <a:pPr algn="ctr"/>
+            <a:endParaRPr lang="en-US"/>
+          </a:p>
+        </p:txBody>
+      </p:sp>
+      <p:sp>
+        <p:nvSpPr>
+          <p:cNvPr id="2" name="标题 1">
+            <a:extLst>
+              <a:ext uri="{FF2B5EF4-FFF2-40B4-BE49-F238E27FC236}">
+                <a16:creationId xmlns:a16="http://schemas.microsoft.com/office/drawing/2014/main" id="{164B82CE-6AC6-D7D3-1C6D-F35115FAC540}"/>
+              </a:ext>
+            </a:extLst>
+          </p:cNvPr>
+          <p:cNvSpPr>
+            <a:spLocks noGrp="1"/>
+          </p:cNvSpPr>
+          <p:nvPr>
+            <p:ph type="title"/>
+          </p:nvPr>
+        </p:nvSpPr>
+        <p:spPr>
+          <a:xfrm>
+            <a:off x="4572001" y="601744"/>
+            <a:ext cx="6781800" cy="1338696"/>
+          </a:xfrm>
+        </p:spPr>
+        <p:txBody>
+          <a:bodyPr>
+            <a:normAutofit/>
+          </a:bodyPr>
+          <a:lstStyle/>
+          <a:p>
+            <a:r>
+              <a:rPr kumimoji="1" lang="en-US" altLang="zh-CN"/>
+              <a:t>How</a:t>
+            </a:r>
+            <a:r>
+              <a:rPr kumimoji="1" lang="zh-CN" altLang="en-US"/>
+              <a:t>学习本课程</a:t>
+            </a:r>
+            <a:endParaRPr kumimoji="1" lang="zh-CN" altLang="en-US" dirty="0"/>
+          </a:p>
+        </p:txBody>
+      </p:sp>
+      <p:pic>
+        <p:nvPicPr>
+          <p:cNvPr id="6146" name="Picture 2" descr="纸上得来终觉浅，绝知此事要躬行。 诗词名句_词典网">
+            <a:extLst>
+              <a:ext uri="{FF2B5EF4-FFF2-40B4-BE49-F238E27FC236}">
+                <a16:creationId xmlns:a16="http://schemas.microsoft.com/office/drawing/2014/main" id="{87322E54-E04F-0C41-5B01-B103906D43C9}"/>
+              </a:ext>
+            </a:extLst>
+          </p:cNvPr>
+          <p:cNvPicPr>
+            <a:picLocks noChangeAspect="1" noChangeArrowheads="1"/>
+          </p:cNvPicPr>
+          <p:nvPr/>
+        </p:nvPicPr>
+        <p:blipFill rotWithShape="1">
+          <a:blip r:embed="rId2">
+            <a:extLst>
+              <a:ext uri="{28A0092B-C50C-407E-A947-70E740481C1C}">
+                <a14:useLocalDpi xmlns:a14="http://schemas.microsoft.com/office/drawing/2010/main" val="0"/>
+              </a:ext>
+            </a:extLst>
+          </a:blip>
+          <a:srcRect/>
+          <a:stretch/>
+        </p:blipFill>
+        <p:spPr bwMode="auto">
+          <a:xfrm>
+            <a:off x="20" y="10"/>
+            <a:ext cx="3754739" cy="6857990"/>
+          </a:xfrm>
+          <a:custGeom>
+            <a:avLst/>
+            <a:gdLst/>
+            <a:ahLst/>
+            <a:cxnLst/>
+            <a:rect l="l" t="t" r="r" b="b"/>
+            <a:pathLst>
+              <a:path w="3754759" h="6858000">
+                <a:moveTo>
+                  <a:pt x="0" y="0"/>
+                </a:moveTo>
+                <a:lnTo>
+                  <a:pt x="3405358" y="0"/>
+                </a:lnTo>
+                <a:lnTo>
+                  <a:pt x="3406298" y="5103"/>
+                </a:lnTo>
+                <a:cubicBezTo>
+                  <a:pt x="3408705" y="9272"/>
+                  <a:pt x="3410993" y="13534"/>
+                  <a:pt x="3408744" y="22806"/>
+                </a:cubicBezTo>
+                <a:cubicBezTo>
+                  <a:pt x="3398212" y="18869"/>
+                  <a:pt x="3412504" y="58782"/>
+                  <a:pt x="3403554" y="60481"/>
+                </a:cubicBezTo>
+                <a:cubicBezTo>
+                  <a:pt x="3417198" y="75379"/>
+                  <a:pt x="3401704" y="83956"/>
+                  <a:pt x="3406685" y="104437"/>
+                </a:cubicBezTo>
+                <a:cubicBezTo>
+                  <a:pt x="3412035" y="113935"/>
+                  <a:pt x="3413215" y="120918"/>
+                  <a:pt x="3408439" y="130745"/>
+                </a:cubicBezTo>
+                <a:cubicBezTo>
+                  <a:pt x="3434362" y="174436"/>
+                  <a:pt x="3410826" y="157826"/>
+                  <a:pt x="3422002" y="199353"/>
+                </a:cubicBezTo>
+                <a:cubicBezTo>
+                  <a:pt x="3433366" y="235046"/>
+                  <a:pt x="3441595" y="275734"/>
+                  <a:pt x="3466217" y="309590"/>
+                </a:cubicBezTo>
+                <a:cubicBezTo>
+                  <a:pt x="3473022" y="315692"/>
+                  <a:pt x="3476249" y="331335"/>
+                  <a:pt x="3473425" y="344525"/>
+                </a:cubicBezTo>
+                <a:cubicBezTo>
+                  <a:pt x="3472938" y="346792"/>
+                  <a:pt x="3472286" y="348904"/>
+                  <a:pt x="3471491" y="350788"/>
+                </a:cubicBezTo>
+                <a:cubicBezTo>
+                  <a:pt x="3476473" y="380853"/>
+                  <a:pt x="3497528" y="490678"/>
+                  <a:pt x="3503314" y="524915"/>
+                </a:cubicBezTo>
+                <a:cubicBezTo>
+                  <a:pt x="3495110" y="528110"/>
+                  <a:pt x="3511009" y="544789"/>
+                  <a:pt x="3506208" y="556205"/>
+                </a:cubicBezTo>
+                <a:cubicBezTo>
+                  <a:pt x="3501906" y="564424"/>
+                  <a:pt x="3505727" y="571402"/>
+                  <a:pt x="3506503" y="579730"/>
+                </a:cubicBezTo>
+                <a:cubicBezTo>
+                  <a:pt x="3503352" y="590904"/>
+                  <a:pt x="3511763" y="626437"/>
+                  <a:pt x="3516997" y="635552"/>
+                </a:cubicBezTo>
+                <a:cubicBezTo>
+                  <a:pt x="3534688" y="657082"/>
+                  <a:pt x="3524838" y="708447"/>
+                  <a:pt x="3538464" y="726388"/>
+                </a:cubicBezTo>
+                <a:cubicBezTo>
+                  <a:pt x="3540659" y="733032"/>
+                  <a:pt x="3541735" y="739585"/>
+                  <a:pt x="3542115" y="746049"/>
+                </a:cubicBezTo>
+                <a:lnTo>
+                  <a:pt x="3541598" y="764218"/>
+                </a:lnTo>
+                <a:lnTo>
+                  <a:pt x="3538294" y="769538"/>
+                </a:lnTo>
+                <a:lnTo>
+                  <a:pt x="3539714" y="780556"/>
+                </a:lnTo>
+                <a:lnTo>
+                  <a:pt x="3539328" y="783752"/>
+                </a:lnTo>
+                <a:cubicBezTo>
+                  <a:pt x="3538575" y="789859"/>
+                  <a:pt x="3537953" y="795880"/>
+                  <a:pt x="3537882" y="801812"/>
+                </a:cubicBezTo>
+                <a:cubicBezTo>
+                  <a:pt x="3555332" y="793164"/>
+                  <a:pt x="3540143" y="850853"/>
+                  <a:pt x="3553763" y="833773"/>
+                </a:cubicBezTo>
+                <a:cubicBezTo>
+                  <a:pt x="3556400" y="864868"/>
+                  <a:pt x="3568671" y="840452"/>
+                  <a:pt x="3557696" y="878520"/>
+                </a:cubicBezTo>
+                <a:cubicBezTo>
+                  <a:pt x="3574636" y="926170"/>
+                  <a:pt x="3572932" y="1002669"/>
+                  <a:pt x="3596902" y="1039468"/>
+                </a:cubicBezTo>
+                <a:cubicBezTo>
+                  <a:pt x="3588227" y="1035176"/>
+                  <a:pt x="3582669" y="1055878"/>
+                  <a:pt x="3587550" y="1069793"/>
+                </a:cubicBezTo>
+                <a:cubicBezTo>
+                  <a:pt x="3553603" y="1054905"/>
+                  <a:pt x="3620138" y="1124159"/>
+                  <a:pt x="3598129" y="1137690"/>
+                </a:cubicBezTo>
+                <a:cubicBezTo>
+                  <a:pt x="3619154" y="1137277"/>
+                  <a:pt x="3657845" y="1198819"/>
+                  <a:pt x="3642072" y="1229443"/>
+                </a:cubicBezTo>
+                <a:cubicBezTo>
+                  <a:pt x="3648492" y="1274612"/>
+                  <a:pt x="3667414" y="1305895"/>
+                  <a:pt x="3662799" y="1353804"/>
+                </a:cubicBezTo>
+                <a:cubicBezTo>
+                  <a:pt x="3665680" y="1355144"/>
+                  <a:pt x="3668149" y="1357448"/>
+                  <a:pt x="3670319" y="1360420"/>
+                </a:cubicBezTo>
+                <a:lnTo>
+                  <a:pt x="3675717" y="1370453"/>
+                </a:lnTo>
+                <a:lnTo>
+                  <a:pt x="3675458" y="1372456"/>
+                </a:lnTo>
+                <a:cubicBezTo>
+                  <a:pt x="3675775" y="1380261"/>
+                  <a:pt x="3677154" y="1384198"/>
+                  <a:pt x="3678998" y="1386422"/>
+                </a:cubicBezTo>
+                <a:lnTo>
+                  <a:pt x="3681613" y="1387932"/>
+                </a:lnTo>
+                <a:lnTo>
+                  <a:pt x="3684619" y="1397028"/>
+                </a:lnTo>
+                <a:lnTo>
+                  <a:pt x="3692094" y="1413643"/>
+                </a:lnTo>
+                <a:lnTo>
+                  <a:pt x="3692036" y="1417975"/>
+                </a:lnTo>
+                <a:lnTo>
+                  <a:pt x="3701043" y="1444940"/>
+                </a:lnTo>
+                <a:lnTo>
+                  <a:pt x="3700474" y="1445893"/>
+                </a:lnTo>
+                <a:cubicBezTo>
+                  <a:pt x="3699407" y="1448641"/>
+                  <a:pt x="3699006" y="1451835"/>
+                  <a:pt x="3699990" y="1456030"/>
+                </a:cubicBezTo>
+                <a:cubicBezTo>
+                  <a:pt x="3688343" y="1458099"/>
+                  <a:pt x="3696713" y="1461887"/>
+                  <a:pt x="3700642" y="1474079"/>
+                </a:cubicBezTo>
+                <a:cubicBezTo>
+                  <a:pt x="3683431" y="1480016"/>
+                  <a:pt x="3700716" y="1509516"/>
+                  <a:pt x="3693587" y="1522890"/>
+                </a:cubicBezTo>
+                <a:cubicBezTo>
+                  <a:pt x="3696861" y="1531716"/>
+                  <a:pt x="3700010" y="1541157"/>
+                  <a:pt x="3702900" y="1551068"/>
+                </a:cubicBezTo>
+                <a:lnTo>
+                  <a:pt x="3708038" y="1631578"/>
+                </a:lnTo>
+                <a:lnTo>
+                  <a:pt x="3698097" y="1716642"/>
+                </a:lnTo>
+                <a:cubicBezTo>
+                  <a:pt x="3699314" y="1747867"/>
+                  <a:pt x="3695412" y="1775147"/>
+                  <a:pt x="3700384" y="1801382"/>
+                </a:cubicBezTo>
+                <a:cubicBezTo>
+                  <a:pt x="3696845" y="1812311"/>
+                  <a:pt x="3695699" y="1822504"/>
+                  <a:pt x="3702257" y="1832013"/>
+                </a:cubicBezTo>
+                <a:cubicBezTo>
+                  <a:pt x="3701651" y="1861238"/>
+                  <a:pt x="3693313" y="1868713"/>
+                  <a:pt x="3700986" y="1886838"/>
+                </a:cubicBezTo>
+                <a:cubicBezTo>
+                  <a:pt x="3687741" y="1903887"/>
+                  <a:pt x="3693148" y="1904594"/>
+                  <a:pt x="3697545" y="1912087"/>
+                </a:cubicBezTo>
+                <a:lnTo>
+                  <a:pt x="3697885" y="1913171"/>
+                </a:lnTo>
+                <a:lnTo>
+                  <a:pt x="3695987" y="1915505"/>
+                </a:lnTo>
+                <a:lnTo>
+                  <a:pt x="3695284" y="1920179"/>
+                </a:lnTo>
+                <a:lnTo>
+                  <a:pt x="3696499" y="1932787"/>
+                </a:lnTo>
+                <a:lnTo>
+                  <a:pt x="3697473" y="1937503"/>
+                </a:lnTo>
+                <a:cubicBezTo>
+                  <a:pt x="3697953" y="1940760"/>
+                  <a:pt x="3698023" y="1942937"/>
+                  <a:pt x="3697799" y="1944457"/>
+                </a:cubicBezTo>
+                <a:lnTo>
+                  <a:pt x="3697642" y="1944638"/>
+                </a:lnTo>
+                <a:lnTo>
+                  <a:pt x="3698268" y="1951136"/>
+                </a:lnTo>
+                <a:cubicBezTo>
+                  <a:pt x="3699704" y="1962083"/>
+                  <a:pt x="3701457" y="1972719"/>
+                  <a:pt x="3703418" y="1982828"/>
+                </a:cubicBezTo>
+                <a:cubicBezTo>
+                  <a:pt x="3694620" y="1991887"/>
+                  <a:pt x="3707345" y="2028973"/>
+                  <a:pt x="3689767" y="2025705"/>
+                </a:cubicBezTo>
+                <a:cubicBezTo>
+                  <a:pt x="3691896" y="2039367"/>
+                  <a:pt x="3699517" y="2047321"/>
+                  <a:pt x="3687894" y="2043252"/>
+                </a:cubicBezTo>
+                <a:cubicBezTo>
+                  <a:pt x="3688268" y="2047766"/>
+                  <a:pt x="3687435" y="2050599"/>
+                  <a:pt x="3686015" y="2052668"/>
+                </a:cubicBezTo>
+                <a:lnTo>
+                  <a:pt x="3685329" y="2053280"/>
+                </a:lnTo>
+                <a:lnTo>
+                  <a:pt x="3690348" y="2083660"/>
+                </a:lnTo>
+                <a:lnTo>
+                  <a:pt x="3689688" y="2087758"/>
+                </a:lnTo>
+                <a:lnTo>
+                  <a:pt x="3694656" y="2107476"/>
+                </a:lnTo>
+                <a:lnTo>
+                  <a:pt x="3696317" y="2117709"/>
+                </a:lnTo>
+                <a:lnTo>
+                  <a:pt x="3698652" y="2120508"/>
+                </a:lnTo>
+                <a:cubicBezTo>
+                  <a:pt x="3700138" y="2123582"/>
+                  <a:pt x="3700933" y="2128051"/>
+                  <a:pt x="3700157" y="2135655"/>
+                </a:cubicBezTo>
+                <a:lnTo>
+                  <a:pt x="3699626" y="2137431"/>
+                </a:lnTo>
+                <a:lnTo>
+                  <a:pt x="3703486" y="2149795"/>
+                </a:lnTo>
+                <a:cubicBezTo>
+                  <a:pt x="3705184" y="2153754"/>
+                  <a:pt x="3707268" y="2157232"/>
+                  <a:pt x="3709885" y="2160002"/>
+                </a:cubicBezTo>
+                <a:cubicBezTo>
+                  <a:pt x="3698737" y="2203287"/>
+                  <a:pt x="3712805" y="2242927"/>
+                  <a:pt x="3712777" y="2289319"/>
+                </a:cubicBezTo>
+                <a:cubicBezTo>
+                  <a:pt x="3693169" y="2310331"/>
+                  <a:pt x="3722276" y="2389074"/>
+                  <a:pt x="3742794" y="2399589"/>
+                </a:cubicBezTo>
+                <a:cubicBezTo>
+                  <a:pt x="3725319" y="2400703"/>
+                  <a:pt x="3751962" y="2457534"/>
+                  <a:pt x="3753311" y="2472464"/>
+                </a:cubicBezTo>
+                <a:cubicBezTo>
+                  <a:pt x="3753760" y="2477441"/>
+                  <a:pt x="3751399" y="2477762"/>
+                  <a:pt x="3743656" y="2469811"/>
+                </a:cubicBezTo>
+                <a:cubicBezTo>
+                  <a:pt x="3746474" y="2485608"/>
+                  <a:pt x="3738186" y="2502460"/>
+                  <a:pt x="3730339" y="2493869"/>
+                </a:cubicBezTo>
+                <a:cubicBezTo>
+                  <a:pt x="3748556" y="2541387"/>
+                  <a:pt x="3736267" y="2613433"/>
+                  <a:pt x="3746134" y="2667651"/>
+                </a:cubicBezTo>
+                <a:cubicBezTo>
+                  <a:pt x="3730160" y="2698252"/>
+                  <a:pt x="3745496" y="2681337"/>
+                  <a:pt x="3743743" y="2712354"/>
+                </a:cubicBezTo>
+                <a:cubicBezTo>
+                  <a:pt x="3759373" y="2703131"/>
+                  <a:pt x="3736572" y="2750256"/>
+                  <a:pt x="3754759" y="2751060"/>
+                </a:cubicBezTo>
+                <a:cubicBezTo>
+                  <a:pt x="3753864" y="2756679"/>
+                  <a:pt x="3752424" y="2762098"/>
+                  <a:pt x="3750841" y="2767527"/>
+                </a:cubicBezTo>
+                <a:lnTo>
+                  <a:pt x="3750021" y="2770377"/>
+                </a:lnTo>
+                <a:lnTo>
+                  <a:pt x="3749874" y="2781617"/>
+                </a:lnTo>
+                <a:lnTo>
+                  <a:pt x="3745916" y="2784975"/>
+                </a:lnTo>
+                <a:lnTo>
+                  <a:pt x="3742888" y="2802030"/>
+                </a:lnTo>
+                <a:cubicBezTo>
+                  <a:pt x="3742360" y="2808388"/>
+                  <a:pt x="3742498" y="2815196"/>
+                  <a:pt x="3743710" y="2822667"/>
+                </a:cubicBezTo>
+                <a:cubicBezTo>
+                  <a:pt x="3751787" y="2840797"/>
+                  <a:pt x="3744398" y="2870002"/>
+                  <a:pt x="3746201" y="2896003"/>
+                </a:cubicBezTo>
+                <a:lnTo>
+                  <a:pt x="3749006" y="2907846"/>
+                </a:lnTo>
+                <a:lnTo>
+                  <a:pt x="3747206" y="2947037"/>
+                </a:lnTo>
+                <a:cubicBezTo>
+                  <a:pt x="3747030" y="2958176"/>
+                  <a:pt x="3747214" y="2969719"/>
+                  <a:pt x="3748070" y="2981841"/>
+                </a:cubicBezTo>
+                <a:lnTo>
+                  <a:pt x="3750937" y="3004278"/>
+                </a:lnTo>
+                <a:lnTo>
+                  <a:pt x="3749761" y="3010254"/>
+                </a:lnTo>
+                <a:cubicBezTo>
+                  <a:pt x="3750425" y="3020530"/>
+                  <a:pt x="3756245" y="3033889"/>
+                  <a:pt x="3749923" y="3032983"/>
+                </a:cubicBezTo>
+                <a:lnTo>
+                  <a:pt x="3752658" y="3044429"/>
+                </a:lnTo>
+                <a:lnTo>
+                  <a:pt x="3748217" y="3056076"/>
+                </a:lnTo>
+                <a:cubicBezTo>
+                  <a:pt x="3747117" y="3057381"/>
+                  <a:pt x="3745928" y="3058381"/>
+                  <a:pt x="3744691" y="3059042"/>
+                </a:cubicBezTo>
+                <a:lnTo>
+                  <a:pt x="3747123" y="3075102"/>
+                </a:lnTo>
+                <a:lnTo>
+                  <a:pt x="3744190" y="3088509"/>
+                </a:lnTo>
+                <a:lnTo>
+                  <a:pt x="3747093" y="3099930"/>
+                </a:lnTo>
+                <a:lnTo>
+                  <a:pt x="3746799" y="3104743"/>
+                </a:lnTo>
+                <a:lnTo>
+                  <a:pt x="3745610" y="3116729"/>
+                </a:lnTo>
+                <a:cubicBezTo>
+                  <a:pt x="3744666" y="3122891"/>
+                  <a:pt x="3743503" y="3129792"/>
+                  <a:pt x="3742676" y="3137453"/>
+                </a:cubicBezTo>
+                <a:lnTo>
+                  <a:pt x="3742441" y="3143884"/>
+                </a:lnTo>
+                <a:lnTo>
+                  <a:pt x="3737104" y="3158122"/>
+                </a:lnTo>
+                <a:cubicBezTo>
+                  <a:pt x="3733050" y="3168490"/>
+                  <a:pt x="3730374" y="3176626"/>
+                  <a:pt x="3733275" y="3185367"/>
+                </a:cubicBezTo>
+                <a:cubicBezTo>
+                  <a:pt x="3728135" y="3200760"/>
+                  <a:pt x="3712176" y="3212117"/>
+                  <a:pt x="3717639" y="3233769"/>
+                </a:cubicBezTo>
+                <a:cubicBezTo>
+                  <a:pt x="3709851" y="3227497"/>
+                  <a:pt x="3717920" y="3258095"/>
+                  <a:pt x="3710433" y="3262123"/>
+                </a:cubicBezTo>
+                <a:cubicBezTo>
+                  <a:pt x="3704342" y="3264110"/>
+                  <a:pt x="3705370" y="3273856"/>
+                  <a:pt x="3703458" y="3281408"/>
+                </a:cubicBezTo>
+                <a:cubicBezTo>
+                  <a:pt x="3697412" y="3287020"/>
+                  <a:pt x="3693483" y="3324746"/>
+                  <a:pt x="3695027" y="3337739"/>
+                </a:cubicBezTo>
+                <a:cubicBezTo>
+                  <a:pt x="3703095" y="3374177"/>
+                  <a:pt x="3679154" y="3404974"/>
+                  <a:pt x="3684951" y="3434139"/>
+                </a:cubicBezTo>
+                <a:cubicBezTo>
+                  <a:pt x="3684732" y="3441861"/>
+                  <a:pt x="3683615" y="3448308"/>
+                  <a:pt x="3681946" y="3453928"/>
+                </a:cubicBezTo>
+                <a:lnTo>
+                  <a:pt x="3675939" y="3468021"/>
+                </a:lnTo>
+                <a:cubicBezTo>
+                  <a:pt x="3674480" y="3468264"/>
+                  <a:pt x="3673022" y="3468506"/>
+                  <a:pt x="3671563" y="3468748"/>
+                </a:cubicBezTo>
+                <a:lnTo>
+                  <a:pt x="3669360" y="3479164"/>
+                </a:lnTo>
+                <a:lnTo>
+                  <a:pt x="3668060" y="3481325"/>
+                </a:lnTo>
+                <a:cubicBezTo>
+                  <a:pt x="3665560" y="3485437"/>
+                  <a:pt x="3663197" y="3489622"/>
+                  <a:pt x="3661315" y="3494328"/>
+                </a:cubicBezTo>
+                <a:cubicBezTo>
+                  <a:pt x="3678446" y="3506175"/>
+                  <a:pt x="3648136" y="3536311"/>
+                  <a:pt x="3664679" y="3537226"/>
+                </a:cubicBezTo>
+                <a:cubicBezTo>
+                  <a:pt x="3657322" y="3565147"/>
+                  <a:pt x="3674997" y="3558694"/>
+                  <a:pt x="3654205" y="3577551"/>
+                </a:cubicBezTo>
+                <a:cubicBezTo>
+                  <a:pt x="3653633" y="3634248"/>
+                  <a:pt x="3628736" y="3694092"/>
+                  <a:pt x="3637325" y="3749618"/>
+                </a:cubicBezTo>
+                <a:cubicBezTo>
+                  <a:pt x="3631446" y="3736800"/>
+                  <a:pt x="3620480" y="3747498"/>
+                  <a:pt x="3620258" y="3763981"/>
+                </a:cubicBezTo>
+                <a:cubicBezTo>
+                  <a:pt x="3596667" y="3715365"/>
+                  <a:pt x="3630603" y="3842969"/>
+                  <a:pt x="3608193" y="3830141"/>
+                </a:cubicBezTo>
+                <a:cubicBezTo>
+                  <a:pt x="3625759" y="3852486"/>
+                  <a:pt x="3638965" y="3943841"/>
+                  <a:pt x="3616479" y="3951521"/>
+                </a:cubicBezTo>
+                <a:cubicBezTo>
+                  <a:pt x="3607940" y="3994867"/>
+                  <a:pt x="3614033" y="4040502"/>
+                  <a:pt x="3595498" y="4074157"/>
+                </a:cubicBezTo>
+                <a:cubicBezTo>
+                  <a:pt x="3597477" y="4078342"/>
+                  <a:pt x="3598819" y="4082864"/>
+                  <a:pt x="3599706" y="4087599"/>
+                </a:cubicBezTo>
+                <a:lnTo>
+                  <a:pt x="3601103" y="4101515"/>
+                </a:lnTo>
+                <a:lnTo>
+                  <a:pt x="3600274" y="4102849"/>
+                </a:lnTo>
+                <a:cubicBezTo>
+                  <a:pt x="3598143" y="4109482"/>
+                  <a:pt x="3598077" y="4114144"/>
+                  <a:pt x="3598925" y="4117926"/>
+                </a:cubicBezTo>
+                <a:lnTo>
+                  <a:pt x="3600630" y="4121966"/>
+                </a:lnTo>
+                <a:lnTo>
+                  <a:pt x="3600331" y="4132543"/>
+                </a:lnTo>
+                <a:lnTo>
+                  <a:pt x="3601432" y="4154003"/>
+                </a:lnTo>
+                <a:lnTo>
+                  <a:pt x="3600054" y="4157433"/>
+                </a:lnTo>
+                <a:lnTo>
+                  <a:pt x="3599248" y="4188888"/>
+                </a:lnTo>
+                <a:cubicBezTo>
+                  <a:pt x="3598993" y="4188940"/>
+                  <a:pt x="3598738" y="4188992"/>
+                  <a:pt x="3598484" y="4189044"/>
+                </a:cubicBezTo>
+                <a:cubicBezTo>
+                  <a:pt x="3596754" y="4190111"/>
+                  <a:pt x="3595443" y="4192250"/>
+                  <a:pt x="3594971" y="4196698"/>
+                </a:cubicBezTo>
+                <a:cubicBezTo>
+                  <a:pt x="3584674" y="4185805"/>
+                  <a:pt x="3590455" y="4197885"/>
+                  <a:pt x="3589971" y="4211958"/>
+                </a:cubicBezTo>
+                <a:cubicBezTo>
+                  <a:pt x="3573870" y="4198179"/>
+                  <a:pt x="3579156" y="4240607"/>
+                  <a:pt x="3569135" y="4243705"/>
+                </a:cubicBezTo>
+                <a:cubicBezTo>
+                  <a:pt x="3569142" y="4254351"/>
+                  <a:pt x="3568856" y="4265362"/>
+                  <a:pt x="3568210" y="4276468"/>
+                </a:cubicBezTo>
+                <a:lnTo>
+                  <a:pt x="3567613" y="4282925"/>
+                </a:lnTo>
+                <a:cubicBezTo>
+                  <a:pt x="3567553" y="4282949"/>
+                  <a:pt x="3567492" y="4282974"/>
+                  <a:pt x="3567432" y="4282999"/>
+                </a:cubicBezTo>
+                <a:cubicBezTo>
+                  <a:pt x="3566940" y="4284280"/>
+                  <a:pt x="3566607" y="4286359"/>
+                  <a:pt x="3566464" y="4289697"/>
+                </a:cubicBezTo>
+                <a:lnTo>
+                  <a:pt x="3566526" y="4294698"/>
+                </a:lnTo>
+                <a:lnTo>
+                  <a:pt x="3565367" y="4307225"/>
+                </a:lnTo>
+                <a:lnTo>
+                  <a:pt x="3563841" y="4311164"/>
+                </a:lnTo>
+                <a:lnTo>
+                  <a:pt x="3561610" y="4312189"/>
+                </a:lnTo>
+                <a:lnTo>
+                  <a:pt x="3561734" y="4313408"/>
+                </a:lnTo>
+                <a:cubicBezTo>
+                  <a:pt x="3564537" y="4323096"/>
+                  <a:pt x="3569544" y="4327053"/>
+                  <a:pt x="3553832" y="4334910"/>
+                </a:cubicBezTo>
+                <a:cubicBezTo>
+                  <a:pt x="3557797" y="4356533"/>
+                  <a:pt x="3548502" y="4358433"/>
+                  <a:pt x="3542564" y="4385380"/>
+                </a:cubicBezTo>
+                <a:cubicBezTo>
+                  <a:pt x="3547050" y="4398267"/>
+                  <a:pt x="3544091" y="4407098"/>
+                  <a:pt x="3538724" y="4415150"/>
+                </a:cubicBezTo>
+                <a:cubicBezTo>
+                  <a:pt x="3538633" y="4442707"/>
+                  <a:pt x="3529920" y="4465824"/>
+                  <a:pt x="3525348" y="4495753"/>
+                </a:cubicBezTo>
+                <a:cubicBezTo>
+                  <a:pt x="3529387" y="4530212"/>
+                  <a:pt x="3514579" y="4543935"/>
+                  <a:pt x="3509749" y="4575934"/>
+                </a:cubicBezTo>
+                <a:cubicBezTo>
+                  <a:pt x="3519579" y="4606914"/>
+                  <a:pt x="3496418" y="4596497"/>
+                  <a:pt x="3489779" y="4611927"/>
+                </a:cubicBezTo>
+                <a:lnTo>
+                  <a:pt x="3488856" y="4616508"/>
+                </a:lnTo>
+                <a:lnTo>
+                  <a:pt x="3489486" y="4629163"/>
+                </a:lnTo>
+                <a:lnTo>
+                  <a:pt x="3490242" y="4633947"/>
+                </a:lnTo>
+                <a:cubicBezTo>
+                  <a:pt x="3490570" y="4637233"/>
+                  <a:pt x="3490539" y="4639406"/>
+                  <a:pt x="3490244" y="4640894"/>
+                </a:cubicBezTo>
+                <a:lnTo>
+                  <a:pt x="3490078" y="4641059"/>
+                </a:lnTo>
+                <a:lnTo>
+                  <a:pt x="3490403" y="4647582"/>
+                </a:lnTo>
+                <a:cubicBezTo>
+                  <a:pt x="3491330" y="4658608"/>
+                  <a:pt x="3492590" y="4669354"/>
+                  <a:pt x="3494082" y="4679601"/>
+                </a:cubicBezTo>
+                <a:cubicBezTo>
+                  <a:pt x="3484854" y="4687754"/>
+                  <a:pt x="3495864" y="4725869"/>
+                  <a:pt x="3478421" y="4720918"/>
+                </a:cubicBezTo>
+                <a:cubicBezTo>
+                  <a:pt x="3479918" y="4734712"/>
+                  <a:pt x="3487176" y="4743359"/>
+                  <a:pt x="3475730" y="4738188"/>
+                </a:cubicBezTo>
+                <a:cubicBezTo>
+                  <a:pt x="3475894" y="4742712"/>
+                  <a:pt x="3474928" y="4745450"/>
+                  <a:pt x="3473409" y="4747368"/>
+                </a:cubicBezTo>
+                <a:lnTo>
+                  <a:pt x="3472696" y="4747913"/>
+                </a:lnTo>
+                <a:lnTo>
+                  <a:pt x="3476304" y="4778609"/>
+                </a:lnTo>
+                <a:lnTo>
+                  <a:pt x="3475454" y="4782623"/>
+                </a:lnTo>
+                <a:lnTo>
+                  <a:pt x="3479507" y="4802712"/>
+                </a:lnTo>
+                <a:lnTo>
+                  <a:pt x="3480695" y="4813049"/>
+                </a:lnTo>
+                <a:lnTo>
+                  <a:pt x="3482902" y="4816057"/>
+                </a:lnTo>
+                <a:cubicBezTo>
+                  <a:pt x="3484247" y="4819259"/>
+                  <a:pt x="3484834" y="4823783"/>
+                  <a:pt x="3483703" y="4831270"/>
+                </a:cubicBezTo>
+                <a:lnTo>
+                  <a:pt x="3483090" y="4832984"/>
+                </a:lnTo>
+                <a:lnTo>
+                  <a:pt x="3486378" y="4845654"/>
+                </a:lnTo>
+                <a:cubicBezTo>
+                  <a:pt x="3487893" y="4849755"/>
+                  <a:pt x="3489817" y="4853416"/>
+                  <a:pt x="3492309" y="4856425"/>
+                </a:cubicBezTo>
+                <a:cubicBezTo>
+                  <a:pt x="3479133" y="4898390"/>
+                  <a:pt x="3491371" y="4939174"/>
+                  <a:pt x="3489182" y="4985308"/>
+                </a:cubicBezTo>
+                <a:cubicBezTo>
+                  <a:pt x="3492413" y="5037202"/>
+                  <a:pt x="3496839" y="5073159"/>
+                  <a:pt x="3498182" y="5107346"/>
+                </a:cubicBezTo>
+                <a:cubicBezTo>
+                  <a:pt x="3500266" y="5123329"/>
+                  <a:pt x="3506680" y="5240376"/>
+                  <a:pt x="3499225" y="5231073"/>
+                </a:cubicBezTo>
+                <a:cubicBezTo>
+                  <a:pt x="3515247" y="5280090"/>
+                  <a:pt x="3497607" y="5309911"/>
+                  <a:pt x="3504960" y="5364785"/>
+                </a:cubicBezTo>
+                <a:cubicBezTo>
+                  <a:pt x="3487546" y="5393671"/>
+                  <a:pt x="3503686" y="5378336"/>
+                  <a:pt x="3500486" y="5409009"/>
+                </a:cubicBezTo>
+                <a:cubicBezTo>
+                  <a:pt x="3516561" y="5401350"/>
+                  <a:pt x="3491544" y="5446009"/>
+                  <a:pt x="3509710" y="5448570"/>
+                </a:cubicBezTo>
+                <a:cubicBezTo>
+                  <a:pt x="3508555" y="5454072"/>
+                  <a:pt x="3506859" y="5459319"/>
+                  <a:pt x="3505022" y="5464568"/>
+                </a:cubicBezTo>
+                <a:lnTo>
+                  <a:pt x="3504070" y="5467320"/>
+                </a:lnTo>
+                <a:lnTo>
+                  <a:pt x="3503399" y="5478483"/>
+                </a:lnTo>
+                <a:lnTo>
+                  <a:pt x="3499281" y="5481443"/>
+                </a:lnTo>
+                <a:lnTo>
+                  <a:pt x="3499047" y="5616712"/>
+                </a:lnTo>
+                <a:cubicBezTo>
+                  <a:pt x="3502347" y="5628424"/>
+                  <a:pt x="3503819" y="5666768"/>
+                  <a:pt x="3498775" y="5675291"/>
+                </a:cubicBezTo>
+                <a:cubicBezTo>
+                  <a:pt x="3497984" y="5683547"/>
+                  <a:pt x="3500335" y="5692400"/>
+                  <a:pt x="3494739" y="5697458"/>
+                </a:cubicBezTo>
+                <a:cubicBezTo>
+                  <a:pt x="3492180" y="5715432"/>
+                  <a:pt x="3486290" y="5756597"/>
+                  <a:pt x="3483423" y="5783137"/>
+                </a:cubicBezTo>
+                <a:cubicBezTo>
+                  <a:pt x="3491452" y="5796973"/>
+                  <a:pt x="3477643" y="5819988"/>
+                  <a:pt x="3477532" y="5856699"/>
+                </a:cubicBezTo>
+                <a:cubicBezTo>
+                  <a:pt x="3486776" y="5871818"/>
+                  <a:pt x="3477340" y="5881447"/>
+                  <a:pt x="3490032" y="5910638"/>
+                </a:cubicBezTo>
+                <a:cubicBezTo>
+                  <a:pt x="3488930" y="5911913"/>
+                  <a:pt x="3487924" y="5913488"/>
+                  <a:pt x="3487046" y="5915313"/>
+                </a:cubicBezTo>
+                <a:cubicBezTo>
+                  <a:pt x="3481941" y="5925917"/>
+                  <a:pt x="3482137" y="5942505"/>
+                  <a:pt x="3487484" y="5952365"/>
+                </a:cubicBezTo>
+                <a:cubicBezTo>
+                  <a:pt x="3504666" y="5999029"/>
+                  <a:pt x="3505019" y="6042078"/>
+                  <a:pt x="3509266" y="6082373"/>
+                </a:cubicBezTo>
+                <a:cubicBezTo>
+                  <a:pt x="3512265" y="6128005"/>
+                  <a:pt x="3492950" y="6098121"/>
+                  <a:pt x="3509564" y="6154771"/>
+                </a:cubicBezTo>
+                <a:cubicBezTo>
+                  <a:pt x="3503223" y="6161045"/>
+                  <a:pt x="3503062" y="6168289"/>
+                  <a:pt x="3506404" y="6180433"/>
+                </a:cubicBezTo>
+                <a:cubicBezTo>
+                  <a:pt x="3507378" y="6202614"/>
+                  <a:pt x="3491084" y="6201180"/>
+                  <a:pt x="3501312" y="6223427"/>
+                </a:cubicBezTo>
+                <a:cubicBezTo>
+                  <a:pt x="3492497" y="6219559"/>
+                  <a:pt x="3498753" y="6265580"/>
+                  <a:pt x="3489469" y="6255476"/>
+                </a:cubicBezTo>
+                <a:cubicBezTo>
+                  <a:pt x="3481791" y="6270065"/>
+                  <a:pt x="3495037" y="6276996"/>
+                  <a:pt x="3488398" y="6291462"/>
+                </a:cubicBezTo>
+                <a:cubicBezTo>
+                  <a:pt x="3487099" y="6307679"/>
+                  <a:pt x="3497555" y="6282019"/>
+                  <a:pt x="3498547" y="6299935"/>
+                </a:cubicBezTo>
+                <a:cubicBezTo>
+                  <a:pt x="3498173" y="6321676"/>
+                  <a:pt x="3514193" y="6321381"/>
+                  <a:pt x="3494028" y="6338390"/>
+                </a:cubicBezTo>
+                <a:lnTo>
+                  <a:pt x="3486030" y="6396716"/>
+                </a:lnTo>
+                <a:cubicBezTo>
+                  <a:pt x="3491309" y="6409668"/>
+                  <a:pt x="3488928" y="6420134"/>
+                  <a:pt x="3484103" y="6430386"/>
+                </a:cubicBezTo>
+                <a:cubicBezTo>
+                  <a:pt x="3485763" y="6460632"/>
+                  <a:pt x="3478568" y="6488285"/>
+                  <a:pt x="3475922" y="6522318"/>
+                </a:cubicBezTo>
+                <a:cubicBezTo>
+                  <a:pt x="3482128" y="6559051"/>
+                  <a:pt x="3468277" y="6578006"/>
+                  <a:pt x="3465506" y="6614374"/>
+                </a:cubicBezTo>
+                <a:cubicBezTo>
+                  <a:pt x="3478925" y="6650248"/>
+                  <a:pt x="3446064" y="6638174"/>
+                  <a:pt x="3446789" y="6668768"/>
+                </a:cubicBezTo>
+                <a:cubicBezTo>
+                  <a:pt x="3458869" y="6718505"/>
+                  <a:pt x="3435878" y="6667592"/>
+                  <a:pt x="3439582" y="6744454"/>
+                </a:cubicBezTo>
+                <a:cubicBezTo>
+                  <a:pt x="3441631" y="6748797"/>
+                  <a:pt x="3439393" y="6758101"/>
+                  <a:pt x="3436538" y="6757102"/>
+                </a:cubicBezTo>
+                <a:cubicBezTo>
+                  <a:pt x="3437461" y="6773941"/>
+                  <a:pt x="3420846" y="6822488"/>
+                  <a:pt x="3424061" y="6846522"/>
+                </a:cubicBezTo>
+                <a:lnTo>
+                  <a:pt x="3423032" y="6858000"/>
+                </a:lnTo>
+                <a:lnTo>
+                  <a:pt x="0" y="6858000"/>
+                </a:lnTo>
+                <a:close/>
+              </a:path>
+            </a:pathLst>
+          </a:custGeom>
+          <a:noFill/>
+          <a:extLst>
+            <a:ext uri="{909E8E84-426E-40DD-AFC4-6F175D3DCCD1}">
+              <a14:hiddenFill xmlns:a14="http://schemas.microsoft.com/office/drawing/2010/main">
+                <a:solidFill>
+                  <a:srgbClr val="FFFFFF"/>
+                </a:solidFill>
+              </a14:hiddenFill>
+            </a:ext>
+          </a:extLst>
+        </p:spPr>
+      </p:pic>
+      <p:sp>
+        <p:nvSpPr>
+          <p:cNvPr id="3" name="内容占位符 2">
+            <a:extLst>
+              <a:ext uri="{FF2B5EF4-FFF2-40B4-BE49-F238E27FC236}">
+                <a16:creationId xmlns:a16="http://schemas.microsoft.com/office/drawing/2014/main" id="{0D753EEE-87AF-8B9A-6117-9407F4AF58C7}"/>
+              </a:ext>
+            </a:extLst>
+          </p:cNvPr>
+          <p:cNvSpPr>
+            <a:spLocks noGrp="1"/>
+          </p:cNvSpPr>
+          <p:nvPr>
+            <p:ph idx="1"/>
+          </p:nvPr>
+        </p:nvSpPr>
+        <p:spPr>
+          <a:xfrm>
+            <a:off x="4572001" y="2201958"/>
+            <a:ext cx="6781800" cy="3900730"/>
+          </a:xfrm>
+        </p:spPr>
+        <p:txBody>
+          <a:bodyPr anchor="t">
+            <a:normAutofit/>
+          </a:bodyPr>
+          <a:lstStyle/>
+          <a:p>
+            <a:r>
+              <a:rPr kumimoji="1" lang="zh-CN" altLang="en-US" sz="2000" dirty="0"/>
+              <a:t>知识点庞杂，重点突破</a:t>
+            </a:r>
+            <a:endParaRPr kumimoji="1" lang="en-US" altLang="zh-CN" sz="2000" dirty="0"/>
+          </a:p>
+          <a:p>
+            <a:r>
+              <a:rPr kumimoji="1" lang="zh-CN" altLang="en-US" sz="2000" dirty="0"/>
+              <a:t>理论知识和实践有机结合</a:t>
+            </a:r>
+            <a:endParaRPr kumimoji="1" lang="en-US" altLang="zh-CN" sz="2000" dirty="0"/>
+          </a:p>
+          <a:p>
+            <a:r>
+              <a:rPr kumimoji="1" lang="zh-CN" altLang="en-US" sz="2000" dirty="0"/>
+              <a:t>常见的练手 </a:t>
+            </a:r>
+            <a:r>
+              <a:rPr kumimoji="1" lang="en-US" altLang="zh-CN" sz="2000" dirty="0"/>
+              <a:t>Project</a:t>
+            </a:r>
+            <a:r>
+              <a:rPr kumimoji="1" lang="zh-CN" altLang="en-US" sz="2000" dirty="0"/>
+              <a:t>：</a:t>
+            </a:r>
+            <a:endParaRPr kumimoji="1" lang="en-US" altLang="zh-CN" sz="2000" dirty="0"/>
+          </a:p>
+          <a:p>
+            <a:pPr lvl="1"/>
+            <a:r>
+              <a:rPr kumimoji="1" lang="zh-CN" altLang="en-US" sz="2000" dirty="0"/>
+              <a:t>图灵商城  </a:t>
+            </a:r>
+            <a:r>
+              <a:rPr kumimoji="1" lang="en" altLang="zh-CN" sz="2000" dirty="0">
+                <a:hlinkClick r:id="rId3"/>
+              </a:rPr>
+              <a:t>https://github.com/macrozheng/mall</a:t>
+            </a:r>
+            <a:endParaRPr kumimoji="1" lang="en-US" altLang="zh-CN" sz="2000" dirty="0"/>
+          </a:p>
+          <a:p>
+            <a:pPr lvl="1"/>
+            <a:r>
+              <a:rPr kumimoji="1" lang="zh-CN" altLang="en-US" sz="2000" dirty="0"/>
+              <a:t>微人事管理系统 </a:t>
+            </a:r>
+            <a:r>
+              <a:rPr kumimoji="1" lang="en" altLang="zh-CN" sz="2000" dirty="0">
+                <a:hlinkClick r:id="rId4"/>
+              </a:rPr>
+              <a:t>https://github.com/lenve/vhr</a:t>
+            </a:r>
+            <a:endParaRPr kumimoji="1" lang="en-US" altLang="zh-CN" sz="2000" dirty="0"/>
+          </a:p>
+        </p:txBody>
+      </p:sp>
+    </p:spTree>
+    <p:extLst>
+      <p:ext uri="{BB962C8B-B14F-4D97-AF65-F5344CB8AC3E}">
+        <p14:creationId xmlns:p14="http://schemas.microsoft.com/office/powerpoint/2010/main" val="649342934"/>
+      </p:ext>
+    </p:extLst>
+  </p:cSld>
+  <p:clrMapOvr>
+    <a:masterClrMapping/>
+  </p:clrMapOvr>
+</p:sld>
+</file>
+
+<file path=ppt/slides/slide2.xml><?xml version="1.0" encoding="utf-8"?>
+<p:sld xmlns:a="http://schemas.openxmlformats.org/drawingml/2006/main" xmlns:r="http://schemas.openxmlformats.org/officeDocument/2006/relationships" xmlns:p="http://schemas.openxmlformats.org/presentationml/2006/main">
+  <p:cSld>
+    <p:bg>
+      <p:bgPr>
+        <a:solidFill>
+          <a:schemeClr val="bg1">
+            <a:tint val="95000"/>
+            <a:satMod val="170000"/>
+          </a:schemeClr>
+        </a:solidFill>
+        <a:effectLst/>
+      </p:bgPr>
+    </p:bg>
+    <p:spTree>
+      <p:nvGrpSpPr>
+        <p:cNvPr id="1" name=""/>
+        <p:cNvGrpSpPr/>
+        <p:nvPr/>
+      </p:nvGrpSpPr>
+      <p:grpSpPr>
+        <a:xfrm>
+          <a:off x="0" y="0"/>
+          <a:ext cx="0" cy="0"/>
+          <a:chOff x="0" y="0"/>
+          <a:chExt cx="0" cy="0"/>
+        </a:xfrm>
+      </p:grpSpPr>
+      <p:sp>
+        <p:nvSpPr>
+          <p:cNvPr id="2" name="标题 1">
+            <a:extLst>
+              <a:ext uri="{FF2B5EF4-FFF2-40B4-BE49-F238E27FC236}">
+                <a16:creationId xmlns:a16="http://schemas.microsoft.com/office/drawing/2014/main" id="{03BB4C04-3D11-D815-340C-DFC6ABE4A840}"/>
+              </a:ext>
+            </a:extLst>
+          </p:cNvPr>
+          <p:cNvSpPr>
+            <a:spLocks noGrp="1"/>
+          </p:cNvSpPr>
+          <p:nvPr>
+            <p:ph type="title"/>
+          </p:nvPr>
+        </p:nvSpPr>
+        <p:spPr>
+          <a:xfrm>
+            <a:off x="762001" y="803325"/>
+            <a:ext cx="5314536" cy="1325563"/>
+          </a:xfrm>
+        </p:spPr>
+        <p:txBody>
+          <a:bodyPr>
+            <a:normAutofit/>
+          </a:bodyPr>
+          <a:lstStyle/>
+          <a:p>
+            <a:r>
+              <a:rPr kumimoji="1" lang="zh-CN" altLang="en-US" sz="4000" dirty="0"/>
+              <a:t>关于我</a:t>
+            </a:r>
+          </a:p>
+        </p:txBody>
+      </p:sp>
+      <p:sp>
+        <p:nvSpPr>
+          <p:cNvPr id="22" name="内容占位符 2">
+            <a:extLst>
+              <a:ext uri="{FF2B5EF4-FFF2-40B4-BE49-F238E27FC236}">
+                <a16:creationId xmlns:a16="http://schemas.microsoft.com/office/drawing/2014/main" id="{524D7DDB-001B-372E-C281-4C7ECFDE7804}"/>
+              </a:ext>
+            </a:extLst>
+          </p:cNvPr>
+          <p:cNvSpPr>
+            <a:spLocks noGrp="1"/>
+          </p:cNvSpPr>
+          <p:nvPr>
+            <p:ph idx="1"/>
+          </p:nvPr>
+        </p:nvSpPr>
+        <p:spPr>
+          <a:xfrm>
+            <a:off x="762000" y="2279017"/>
+            <a:ext cx="6018810" cy="4093207"/>
+          </a:xfrm>
+        </p:spPr>
+        <p:txBody>
+          <a:bodyPr anchor="t">
+            <a:normAutofit/>
+          </a:bodyPr>
+          <a:lstStyle/>
+          <a:p>
+            <a:r>
+              <a:rPr kumimoji="1" lang="zh-CN" altLang="en-US" dirty="0"/>
+              <a:t>个人主页：</a:t>
+            </a:r>
+            <a:r>
+              <a:rPr kumimoji="1" lang="en-US" altLang="zh-CN" dirty="0">
+                <a:hlinkClick r:id="rId2"/>
+              </a:rPr>
+              <a:t>https://chenxofhit.xyz</a:t>
+            </a:r>
+            <a:endParaRPr kumimoji="1" lang="en-US" altLang="zh-CN" dirty="0"/>
+          </a:p>
+          <a:p>
+            <a:r>
+              <a:rPr kumimoji="1" lang="en-US" altLang="zh-CN" dirty="0"/>
+              <a:t>QQ:</a:t>
+            </a:r>
+            <a:r>
+              <a:rPr kumimoji="1" lang="zh-CN" altLang="en-US" dirty="0"/>
+              <a:t> </a:t>
+            </a:r>
+            <a:r>
+              <a:rPr kumimoji="1" lang="en-US" altLang="zh-CN" dirty="0"/>
+              <a:t>723357969</a:t>
+            </a:r>
+          </a:p>
+          <a:p>
+            <a:r>
+              <a:rPr kumimoji="1" lang="zh-CN" altLang="en-US" dirty="0"/>
+              <a:t>办公地址：逸夫楼</a:t>
+            </a:r>
+            <a:r>
+              <a:rPr kumimoji="1" lang="en-US" altLang="zh-CN" dirty="0"/>
+              <a:t>513</a:t>
+            </a:r>
+          </a:p>
+          <a:p>
+            <a:r>
+              <a:rPr lang="zh-CN" altLang="en-US" b="0" i="0" dirty="0">
+                <a:effectLst/>
+                <a:latin typeface="-apple-system"/>
+              </a:rPr>
+              <a:t>常年招收优秀本科生若干名，硕士生</a:t>
+            </a:r>
+            <a:r>
+              <a:rPr lang="en-US" altLang="zh-CN" b="0" i="0" dirty="0">
+                <a:effectLst/>
+                <a:latin typeface="-apple-system"/>
+              </a:rPr>
+              <a:t>1-2</a:t>
+            </a:r>
+            <a:r>
+              <a:rPr lang="zh-CN" altLang="en-US" b="0" i="0" dirty="0">
+                <a:effectLst/>
+                <a:latin typeface="-apple-system"/>
+              </a:rPr>
+              <a:t>名进入课题组从事横纵向课题项目，要求熟悉 </a:t>
+            </a:r>
+            <a:r>
+              <a:rPr lang="en" altLang="zh-CN" b="0" i="0" dirty="0">
+                <a:effectLst/>
+                <a:latin typeface="-apple-system"/>
+              </a:rPr>
+              <a:t>Python</a:t>
+            </a:r>
+            <a:r>
+              <a:rPr lang="zh-CN" altLang="en" b="0" i="0" dirty="0">
+                <a:effectLst/>
+                <a:latin typeface="-apple-system"/>
+              </a:rPr>
+              <a:t>、</a:t>
+            </a:r>
+            <a:r>
+              <a:rPr lang="en" altLang="zh-CN" b="0" i="0" dirty="0">
+                <a:effectLst/>
+                <a:latin typeface="-apple-system"/>
+              </a:rPr>
+              <a:t>R</a:t>
+            </a:r>
+            <a:r>
+              <a:rPr lang="zh-CN" altLang="en" b="0" i="0" dirty="0">
+                <a:effectLst/>
+                <a:latin typeface="-apple-system"/>
+              </a:rPr>
+              <a:t>、</a:t>
+            </a:r>
+            <a:r>
+              <a:rPr lang="en" altLang="zh-CN" b="0" i="0" dirty="0">
+                <a:effectLst/>
+                <a:latin typeface="-apple-system"/>
+              </a:rPr>
+              <a:t>Java</a:t>
+            </a:r>
+            <a:r>
+              <a:rPr lang="zh-CN" altLang="en" b="0" i="0" dirty="0">
+                <a:effectLst/>
+                <a:latin typeface="-apple-system"/>
+              </a:rPr>
+              <a:t>、</a:t>
+            </a:r>
+            <a:r>
+              <a:rPr lang="en" altLang="zh-CN" b="0" i="0" dirty="0">
+                <a:effectLst/>
+                <a:latin typeface="-apple-system"/>
+              </a:rPr>
+              <a:t>Vue</a:t>
+            </a:r>
+            <a:r>
+              <a:rPr lang="zh-CN" altLang="en-US" b="0" i="0" dirty="0">
+                <a:effectLst/>
+                <a:latin typeface="-apple-system"/>
+              </a:rPr>
+              <a:t>等至少一门编程语言，耐得住寂寞抗得住压力。</a:t>
+            </a:r>
+            <a:endParaRPr kumimoji="1" lang="zh-CN" altLang="en-US" dirty="0"/>
+          </a:p>
+        </p:txBody>
+      </p:sp>
+      <p:sp>
+        <p:nvSpPr>
+          <p:cNvPr id="5143" name="Freeform: Shape 5126">
+            <a:extLst>
+              <a:ext uri="{FF2B5EF4-FFF2-40B4-BE49-F238E27FC236}">
+                <a16:creationId xmlns:a16="http://schemas.microsoft.com/office/drawing/2014/main" id="{CF62D2A7-8207-488C-9F46-316BA81A16C8}"/>
+              </a:ext>
+              <a:ext uri="{C183D7F6-B498-43B3-948B-1728B52AA6E4}">
+                <adec:decorative xmlns:adec="http://schemas.microsoft.com/office/drawing/2017/decorative" val="1"/>
+              </a:ext>
+            </a:extLst>
+          </p:cNvPr>
+          <p:cNvSpPr>
+            <a:spLocks noGrp="1" noRot="1" noChangeAspect="1" noMove="1" noResize="1" noEditPoints="1" noAdjustHandles="1" noChangeArrowheads="1" noChangeShapeType="1" noTextEdit="1"/>
+          </p:cNvSpPr>
+          <p:nvPr>
+            <p:extLst>
+              <p:ext uri="{386F3935-93C4-4BCD-93E2-E3B085C9AB24}">
+                <p16:designElem xmlns:p16="http://schemas.microsoft.com/office/powerpoint/2015/main" val="1"/>
+              </p:ext>
+            </p:extLst>
+          </p:nvPr>
+        </p:nvSpPr>
+        <p:spPr>
+          <a:xfrm flipH="1">
+            <a:off x="6582780" y="-2008"/>
+            <a:ext cx="5609220" cy="5840278"/>
+          </a:xfrm>
+          <a:custGeom>
+            <a:avLst/>
+            <a:gdLst>
+              <a:gd name="connsiteX0" fmla="*/ 0 w 5609220"/>
+              <a:gd name="connsiteY0" fmla="*/ 0 h 5840278"/>
+              <a:gd name="connsiteX1" fmla="*/ 4637091 w 5609220"/>
+              <a:gd name="connsiteY1" fmla="*/ 0 h 5840278"/>
+              <a:gd name="connsiteX2" fmla="*/ 4822569 w 5609220"/>
+              <a:gd name="connsiteY2" fmla="*/ 204077 h 5840278"/>
+              <a:gd name="connsiteX3" fmla="*/ 5609220 w 5609220"/>
+              <a:gd name="connsiteY3" fmla="*/ 2395363 h 5840278"/>
+              <a:gd name="connsiteX4" fmla="*/ 2164305 w 5609220"/>
+              <a:gd name="connsiteY4" fmla="*/ 5840278 h 5840278"/>
+              <a:gd name="connsiteX5" fmla="*/ 238220 w 5609220"/>
+              <a:gd name="connsiteY5" fmla="*/ 5251941 h 5840278"/>
+              <a:gd name="connsiteX6" fmla="*/ 0 w 5609220"/>
+              <a:gd name="connsiteY6" fmla="*/ 5073803 h 5840278"/>
+            </a:gdLst>
+            <a:ahLst/>
+            <a:cxnLst>
+              <a:cxn ang="0">
+                <a:pos x="connsiteX0" y="connsiteY0"/>
+              </a:cxn>
+              <a:cxn ang="0">
+                <a:pos x="connsiteX1" y="connsiteY1"/>
+              </a:cxn>
+              <a:cxn ang="0">
+                <a:pos x="connsiteX2" y="connsiteY2"/>
+              </a:cxn>
+              <a:cxn ang="0">
+                <a:pos x="connsiteX3" y="connsiteY3"/>
+              </a:cxn>
+              <a:cxn ang="0">
+                <a:pos x="connsiteX4" y="connsiteY4"/>
+              </a:cxn>
+              <a:cxn ang="0">
+                <a:pos x="connsiteX5" y="connsiteY5"/>
+              </a:cxn>
+              <a:cxn ang="0">
+                <a:pos x="connsiteX6" y="connsiteY6"/>
+              </a:cxn>
+            </a:cxnLst>
+            <a:rect l="l" t="t" r="r" b="b"/>
+            <a:pathLst>
+              <a:path w="5609220" h="5840278">
+                <a:moveTo>
+                  <a:pt x="0" y="0"/>
+                </a:moveTo>
+                <a:lnTo>
+                  <a:pt x="4637091" y="0"/>
+                </a:lnTo>
+                <a:lnTo>
+                  <a:pt x="4822569" y="204077"/>
+                </a:lnTo>
+                <a:cubicBezTo>
+                  <a:pt x="5314007" y="799562"/>
+                  <a:pt x="5609220" y="1562987"/>
+                  <a:pt x="5609220" y="2395363"/>
+                </a:cubicBezTo>
+                <a:cubicBezTo>
+                  <a:pt x="5609220" y="4297937"/>
+                  <a:pt x="4066879" y="5840278"/>
+                  <a:pt x="2164305" y="5840278"/>
+                </a:cubicBezTo>
+                <a:cubicBezTo>
+                  <a:pt x="1450840" y="5840278"/>
+                  <a:pt x="788032" y="5623387"/>
+                  <a:pt x="238220" y="5251941"/>
+                </a:cubicBezTo>
+                <a:lnTo>
+                  <a:pt x="0" y="5073803"/>
+                </a:lnTo>
+                <a:close/>
+              </a:path>
+            </a:pathLst>
+          </a:custGeom>
+          <a:solidFill>
+            <a:srgbClr val="FFFFFF">
+              <a:alpha val="80000"/>
+            </a:srgbClr>
+          </a:solidFill>
+          <a:ln>
+            <a:noFill/>
+          </a:ln>
+        </p:spPr>
+        <p:style>
+          <a:lnRef idx="2">
+            <a:schemeClr val="accent1">
+              <a:shade val="50000"/>
+            </a:schemeClr>
+          </a:lnRef>
+          <a:fillRef idx="1">
+            <a:schemeClr val="accent1"/>
+          </a:fillRef>
+          <a:effectRef idx="0">
+            <a:schemeClr val="accent1"/>
+          </a:effectRef>
+          <a:fontRef idx="minor">
+            <a:schemeClr val="lt1"/>
+          </a:fontRef>
+        </p:style>
+        <p:txBody>
+          <a:bodyPr rtlCol="0" anchor="ctr"/>
+          <a:lstStyle/>
+          <a:p>
+            <a:pPr marL="0" marR="0" lvl="0" indent="0" algn="ctr" defTabSz="914400" rtl="0" eaLnBrk="1" fontAlgn="auto" latinLnBrk="0" hangingPunct="1">
+              <a:lnSpc>
+                <a:spcPct val="100000"/>
+              </a:lnSpc>
+              <a:spcBef>
+                <a:spcPts val="0"/>
+              </a:spcBef>
+              <a:spcAft>
+                <a:spcPts val="0"/>
+              </a:spcAft>
+              <a:buClrTx/>
+              <a:buSzTx/>
+              <a:buFontTx/>
+              <a:buNone/>
+              <a:tabLst/>
+              <a:defRPr/>
+            </a:pPr>
+            <a:endParaRPr kumimoji="0" lang="en-US" sz="1800" b="0" i="0" u="none" strike="noStrike" kern="1200" cap="none" spc="0" normalizeH="0" baseline="0" noProof="0">
+              <a:ln>
+                <a:noFill/>
+              </a:ln>
+              <a:solidFill>
+                <a:prstClr val="white"/>
+              </a:solidFill>
+              <a:effectLst/>
+              <a:uLnTx/>
+              <a:uFillTx/>
+              <a:latin typeface="Calibri" panose="020F0502020204030204"/>
+              <a:ea typeface="+mn-ea"/>
+              <a:cs typeface="+mn-cs"/>
+            </a:endParaRPr>
+          </a:p>
+        </p:txBody>
+      </p:sp>
+      <p:pic>
+        <p:nvPicPr>
+          <p:cNvPr id="5122" name="Picture 2" descr="孔夫子做了什么，那么招人恨？ - 知乎">
+            <a:extLst>
+              <a:ext uri="{FF2B5EF4-FFF2-40B4-BE49-F238E27FC236}">
+                <a16:creationId xmlns:a16="http://schemas.microsoft.com/office/drawing/2014/main" id="{A27A14C4-DA7D-2F08-7A3F-05C5DB41778B}"/>
+              </a:ext>
+            </a:extLst>
+          </p:cNvPr>
+          <p:cNvPicPr>
+            <a:picLocks noChangeAspect="1" noChangeArrowheads="1"/>
+          </p:cNvPicPr>
+          <p:nvPr/>
+        </p:nvPicPr>
+        <p:blipFill rotWithShape="1">
+          <a:blip r:embed="rId3">
+            <a:extLst>
+              <a:ext uri="{28A0092B-C50C-407E-A947-70E740481C1C}">
+                <a14:useLocalDpi xmlns:a14="http://schemas.microsoft.com/office/drawing/2010/main" val="0"/>
+              </a:ext>
+            </a:extLst>
+          </a:blip>
+          <a:srcRect l="14879" r="11731" b="1"/>
+          <a:stretch/>
+        </p:blipFill>
+        <p:spPr bwMode="auto">
+          <a:xfrm>
+            <a:off x="6678593" y="-2"/>
+            <a:ext cx="5513407" cy="5729290"/>
+          </a:xfrm>
+          <a:custGeom>
+            <a:avLst/>
+            <a:gdLst/>
+            <a:ahLst/>
+            <a:cxnLst/>
+            <a:rect l="l" t="t" r="r" b="b"/>
+            <a:pathLst>
+              <a:path w="5441859" h="5654940">
+                <a:moveTo>
+                  <a:pt x="1041368" y="0"/>
+                </a:moveTo>
+                <a:lnTo>
+                  <a:pt x="5441859" y="0"/>
+                </a:lnTo>
+                <a:lnTo>
+                  <a:pt x="5441859" y="4820612"/>
+                </a:lnTo>
+                <a:lnTo>
+                  <a:pt x="5285166" y="4957981"/>
+                </a:lnTo>
+                <a:cubicBezTo>
+                  <a:pt x="4729628" y="5394557"/>
+                  <a:pt x="4029081" y="5654940"/>
+                  <a:pt x="3267719" y="5654940"/>
+                </a:cubicBezTo>
+                <a:cubicBezTo>
+                  <a:pt x="1463008" y="5654940"/>
+                  <a:pt x="0" y="4191932"/>
+                  <a:pt x="0" y="2387221"/>
+                </a:cubicBezTo>
+                <a:cubicBezTo>
+                  <a:pt x="0" y="1484866"/>
+                  <a:pt x="365752" y="667936"/>
+                  <a:pt x="957093" y="76595"/>
+                </a:cubicBezTo>
+                <a:close/>
+              </a:path>
+            </a:pathLst>
+          </a:custGeom>
+          <a:noFill/>
+          <a:extLst>
+            <a:ext uri="{909E8E84-426E-40DD-AFC4-6F175D3DCCD1}">
+              <a14:hiddenFill xmlns:a14="http://schemas.microsoft.com/office/drawing/2010/main">
+                <a:solidFill>
+                  <a:srgbClr val="FFFFFF"/>
+                </a:solidFill>
+              </a14:hiddenFill>
+            </a:ext>
+          </a:extLst>
+        </p:spPr>
+      </p:pic>
+    </p:spTree>
+    <p:extLst>
+      <p:ext uri="{BB962C8B-B14F-4D97-AF65-F5344CB8AC3E}">
+        <p14:creationId xmlns:p14="http://schemas.microsoft.com/office/powerpoint/2010/main" val="421364669"/>
+      </p:ext>
+    </p:extLst>
+  </p:cSld>
+  <p:clrMapOvr>
+    <a:overrideClrMapping bg1="dk1" tx1="lt1" bg2="dk2" tx2="lt2" accent1="accent1" accent2="accent2" accent3="accent3" accent4="accent4" accent5="accent5" accent6="accent6" hlink="hlink" folHlink="folHlink"/>
+  </p:clrMapOvr>
+</p:sld>
+</file>
+
+<file path=ppt/slides/slide3.xml><?xml version="1.0" encoding="utf-8"?>
+<p:sld xmlns:a="http://schemas.openxmlformats.org/drawingml/2006/main" xmlns:r="http://schemas.openxmlformats.org/officeDocument/2006/relationships" xmlns:p="http://schemas.openxmlformats.org/presentationml/2006/main">
+  <p:cSld>
+    <p:spTree>
+      <p:nvGrpSpPr>
+        <p:cNvPr id="1" name=""/>
+        <p:cNvGrpSpPr/>
+        <p:nvPr/>
+      </p:nvGrpSpPr>
+      <p:grpSpPr>
+        <a:xfrm>
+          <a:off x="0" y="0"/>
+          <a:ext cx="0" cy="0"/>
+          <a:chOff x="0" y="0"/>
+          <a:chExt cx="0" cy="0"/>
+        </a:xfrm>
+      </p:grpSpPr>
+      <p:sp>
+        <p:nvSpPr>
+          <p:cNvPr id="2" name="Title 1">
+            <a:extLst>
+              <a:ext uri="{FF2B5EF4-FFF2-40B4-BE49-F238E27FC236}">
+                <a16:creationId xmlns:a16="http://schemas.microsoft.com/office/drawing/2014/main" id="{9BCD69F5-8701-6A43-AD28-A6429057023E}"/>
+              </a:ext>
+            </a:extLst>
+          </p:cNvPr>
+          <p:cNvSpPr>
+            <a:spLocks noGrp="1"/>
+          </p:cNvSpPr>
+          <p:nvPr>
+            <p:ph type="title"/>
+          </p:nvPr>
+        </p:nvSpPr>
+        <p:spPr/>
+        <p:txBody>
+          <a:bodyPr/>
+          <a:lstStyle/>
+          <a:p>
+            <a:r>
+              <a:rPr lang="en-CN" dirty="0"/>
+              <a:t>关于课程</a:t>
+            </a:r>
+          </a:p>
+        </p:txBody>
+      </p:sp>
+      <p:sp>
+        <p:nvSpPr>
+          <p:cNvPr id="3" name="Content Placeholder 2">
+            <a:extLst>
+              <a:ext uri="{FF2B5EF4-FFF2-40B4-BE49-F238E27FC236}">
+                <a16:creationId xmlns:a16="http://schemas.microsoft.com/office/drawing/2014/main" id="{F04E21C8-F3E0-4842-8D2F-BEE7238883E4}"/>
+              </a:ext>
+            </a:extLst>
+          </p:cNvPr>
+          <p:cNvSpPr>
+            <a:spLocks noGrp="1"/>
+          </p:cNvSpPr>
+          <p:nvPr>
+            <p:ph idx="1"/>
+          </p:nvPr>
+        </p:nvSpPr>
+        <p:spPr/>
+        <p:txBody>
+          <a:bodyPr/>
+          <a:lstStyle/>
+          <a:p>
+            <a:r>
+              <a:rPr lang="zh-CN" altLang="en-US" dirty="0"/>
+              <a:t>计算机科学与技术专业的专业选修课</a:t>
+            </a:r>
+            <a:endParaRPr lang="en-US" altLang="zh-CN" dirty="0"/>
+          </a:p>
+          <a:p>
+            <a:r>
+              <a:rPr lang="zh-CN" altLang="en-US" dirty="0"/>
+              <a:t>计划时数：</a:t>
+            </a:r>
+            <a:r>
+              <a:rPr lang="en-US" altLang="zh-CN" dirty="0"/>
+              <a:t>48</a:t>
+            </a:r>
+            <a:r>
+              <a:rPr lang="zh-CN" altLang="en-US" dirty="0"/>
+              <a:t>学时，理论讲述 </a:t>
+            </a:r>
+            <a:r>
+              <a:rPr lang="en-US" altLang="zh-CN" dirty="0"/>
+              <a:t>32</a:t>
+            </a:r>
+            <a:r>
+              <a:rPr lang="zh-CN" altLang="en-US" dirty="0"/>
+              <a:t>学时，实验学时 </a:t>
+            </a:r>
+            <a:r>
+              <a:rPr lang="en-US" altLang="zh-CN" dirty="0"/>
+              <a:t>16</a:t>
+            </a:r>
+            <a:r>
+              <a:rPr lang="zh-CN" altLang="en-US" dirty="0"/>
+              <a:t> 学时。</a:t>
+            </a:r>
+            <a:endParaRPr lang="en-US" altLang="zh-CN" dirty="0"/>
+          </a:p>
+          <a:p>
+            <a:r>
+              <a:rPr lang="zh-CN" altLang="en-US" dirty="0"/>
+              <a:t>考核方式：</a:t>
+            </a:r>
+            <a:endParaRPr lang="en-US" altLang="zh-CN" dirty="0"/>
+          </a:p>
+          <a:p>
+            <a:pPr lvl="1"/>
+            <a:r>
+              <a:rPr lang="zh-CN" altLang="en-US" dirty="0"/>
+              <a:t> </a:t>
+            </a:r>
+            <a:r>
+              <a:rPr lang="en-US" altLang="zh-CN" dirty="0"/>
+              <a:t>10%</a:t>
+            </a:r>
+            <a:r>
+              <a:rPr lang="zh-CN" altLang="en-US" dirty="0"/>
+              <a:t> 课堂表现，</a:t>
+            </a:r>
+            <a:r>
+              <a:rPr lang="en-US" altLang="zh-CN" dirty="0"/>
+              <a:t>20%</a:t>
+            </a:r>
+            <a:r>
+              <a:rPr lang="zh-CN" altLang="en-US" dirty="0"/>
+              <a:t>平时作业，</a:t>
+            </a:r>
+            <a:r>
+              <a:rPr lang="en-US" altLang="zh-CN" dirty="0"/>
+              <a:t>70%</a:t>
+            </a:r>
+            <a:r>
+              <a:rPr lang="zh-CN" altLang="en-US" dirty="0"/>
+              <a:t> 期末考试</a:t>
+            </a:r>
+            <a:endParaRPr lang="en-CN" dirty="0"/>
+          </a:p>
+        </p:txBody>
+      </p:sp>
+    </p:spTree>
+    <p:extLst>
+      <p:ext uri="{BB962C8B-B14F-4D97-AF65-F5344CB8AC3E}">
+        <p14:creationId xmlns:p14="http://schemas.microsoft.com/office/powerpoint/2010/main" val="924896234"/>
+      </p:ext>
+    </p:extLst>
+  </p:cSld>
+  <p:clrMapOvr>
+    <a:masterClrMapping/>
+  </p:clrMapOvr>
+</p:sld>
+</file>
+
+<file path=ppt/slides/slide4.xml><?xml version="1.0" encoding="utf-8"?>
+<p:sld xmlns:a="http://schemas.openxmlformats.org/drawingml/2006/main" xmlns:r="http://schemas.openxmlformats.org/officeDocument/2006/relationships" xmlns:p="http://schemas.openxmlformats.org/presentationml/2006/main">
+  <p:cSld>
+    <p:bg>
+      <p:bgPr>
+        <a:solidFill>
+          <a:schemeClr val="bg1"/>
+        </a:solidFill>
+        <a:effectLst/>
+      </p:bgPr>
+    </p:bg>
+    <p:spTree>
+      <p:nvGrpSpPr>
+        <p:cNvPr id="1" name=""/>
+        <p:cNvGrpSpPr/>
+        <p:nvPr/>
+      </p:nvGrpSpPr>
+      <p:grpSpPr>
+        <a:xfrm>
+          <a:off x="0" y="0"/>
+          <a:ext cx="0" cy="0"/>
+          <a:chOff x="0" y="0"/>
+          <a:chExt cx="0" cy="0"/>
+        </a:xfrm>
+      </p:grpSpPr>
+      <p:sp>
+        <p:nvSpPr>
+          <p:cNvPr id="13" name="Rectangle 12">
+            <a:extLst>
+              <a:ext uri="{FF2B5EF4-FFF2-40B4-BE49-F238E27FC236}">
+                <a16:creationId xmlns:a16="http://schemas.microsoft.com/office/drawing/2014/main" id="{B50AB553-2A96-4A92-96F2-93548E096954}"/>
+              </a:ext>
+              <a:ext uri="{C183D7F6-B498-43B3-948B-1728B52AA6E4}">
+                <adec:decorative xmlns:adec="http://schemas.microsoft.com/office/drawing/2017/decorative" val="1"/>
+              </a:ext>
+            </a:extLst>
+          </p:cNvPr>
+          <p:cNvSpPr>
+            <a:spLocks noGrp="1" noRot="1" noChangeAspect="1" noMove="1" noResize="1" noEditPoints="1" noAdjustHandles="1" noChangeArrowheads="1" noChangeShapeType="1" noTextEdit="1"/>
+          </p:cNvSpPr>
+          <p:nvPr>
+            <p:extLst>
+              <p:ext uri="{386F3935-93C4-4BCD-93E2-E3B085C9AB24}">
+                <p16:designElem xmlns:p16="http://schemas.microsoft.com/office/powerpoint/2015/main" val="1"/>
+              </p:ext>
+            </p:extLst>
+          </p:nvPr>
+        </p:nvSpPr>
+        <p:spPr>
+          <a:xfrm>
+            <a:off x="0" y="0"/>
+            <a:ext cx="12192000" cy="6858000"/>
+          </a:xfrm>
+          <a:prstGeom prst="rect">
+            <a:avLst/>
+          </a:prstGeom>
+          <a:gradFill>
+            <a:gsLst>
+              <a:gs pos="10000">
+                <a:schemeClr val="bg2">
+                  <a:alpha val="68000"/>
+                </a:schemeClr>
+              </a:gs>
+              <a:gs pos="85000">
+                <a:schemeClr val="bg2">
+                  <a:alpha val="97000"/>
+                </a:schemeClr>
+              </a:gs>
+            </a:gsLst>
+            <a:path path="circle">
+              <a:fillToRect l="50000" t="50000" r="50000" b="50000"/>
+            </a:path>
+          </a:gradFill>
+          <a:ln>
+            <a:noFill/>
+          </a:ln>
+        </p:spPr>
+        <p:style>
+          <a:lnRef idx="2">
+            <a:schemeClr val="accent1">
+              <a:shade val="50000"/>
+            </a:schemeClr>
+          </a:lnRef>
+          <a:fillRef idx="1">
+            <a:schemeClr val="accent1"/>
+          </a:fillRef>
+          <a:effectRef idx="0">
+            <a:schemeClr val="accent1"/>
+          </a:effectRef>
+          <a:fontRef idx="minor">
+            <a:schemeClr val="lt1"/>
+          </a:fontRef>
+        </p:style>
+        <p:txBody>
+          <a:bodyPr rtlCol="0" anchor="ctr"/>
+          <a:lstStyle/>
+          <a:p>
+            <a:pPr algn="ctr"/>
+            <a:endParaRPr lang="en-US"/>
+          </a:p>
+        </p:txBody>
+      </p:sp>
+      <p:sp>
+        <p:nvSpPr>
+          <p:cNvPr id="2" name="Title 1"/>
+          <p:cNvSpPr>
+            <a:spLocks noGrp="1"/>
+          </p:cNvSpPr>
+          <p:nvPr>
+            <p:ph type="title"/>
+          </p:nvPr>
+        </p:nvSpPr>
+        <p:spPr>
+          <a:xfrm>
+            <a:off x="838200" y="365125"/>
+            <a:ext cx="10515600" cy="1325563"/>
+          </a:xfrm>
+        </p:spPr>
+        <p:txBody>
+          <a:bodyPr>
+            <a:normAutofit/>
+          </a:bodyPr>
+          <a:lstStyle/>
+          <a:p>
+            <a:r>
+              <a:rPr lang="en-US" altLang="zh-CN" sz="4000" dirty="0"/>
+              <a:t>What</a:t>
+            </a:r>
+            <a:r>
+              <a:rPr lang="zh-CN" altLang="en-US" sz="4000" dirty="0"/>
+              <a:t>课程内容</a:t>
+            </a:r>
+          </a:p>
+        </p:txBody>
+      </p:sp>
+      <p:sp>
+        <p:nvSpPr>
+          <p:cNvPr id="17" name="文本框 16">
+            <a:extLst>
+              <a:ext uri="{FF2B5EF4-FFF2-40B4-BE49-F238E27FC236}">
+                <a16:creationId xmlns:a16="http://schemas.microsoft.com/office/drawing/2014/main" id="{7A3A4AC2-DDAC-7D17-393E-5BF419A21CD3}"/>
+              </a:ext>
+            </a:extLst>
+          </p:cNvPr>
+          <p:cNvSpPr txBox="1"/>
+          <p:nvPr/>
+        </p:nvSpPr>
+        <p:spPr>
+          <a:xfrm>
+            <a:off x="838200" y="5909079"/>
+            <a:ext cx="9630508" cy="584775"/>
+          </a:xfrm>
+          <a:prstGeom prst="rect">
+            <a:avLst/>
+          </a:prstGeom>
+          <a:noFill/>
+        </p:spPr>
+        <p:txBody>
+          <a:bodyPr wrap="square">
+            <a:spAutoFit/>
+          </a:bodyPr>
+          <a:lstStyle/>
+          <a:p>
+            <a:pPr marL="0" indent="0">
+              <a:buNone/>
+            </a:pPr>
+            <a:r>
+              <a:rPr lang="zh-CN" altLang="en-US" sz="3200" dirty="0"/>
+              <a:t>先修课程：</a:t>
+            </a:r>
+            <a:r>
+              <a:rPr lang="en-US" altLang="zh-CN" sz="2400" dirty="0">
+                <a:latin typeface="Times New Roman" panose="02020603050405020304" pitchFamily="18" charset="0"/>
+                <a:cs typeface="Times New Roman" panose="02020603050405020304" pitchFamily="18" charset="0"/>
+              </a:rPr>
+              <a:t>Java</a:t>
+            </a:r>
+            <a:r>
+              <a:rPr lang="zh-CN" altLang="en-US" sz="2400" dirty="0">
+                <a:latin typeface="Times New Roman" panose="02020603050405020304" pitchFamily="18" charset="0"/>
+                <a:cs typeface="Times New Roman" panose="02020603050405020304" pitchFamily="18" charset="0"/>
+              </a:rPr>
+              <a:t>，</a:t>
+            </a:r>
+            <a:r>
+              <a:rPr lang="en-US" altLang="zh-CN" sz="2400" dirty="0">
+                <a:latin typeface="Times New Roman" panose="02020603050405020304" pitchFamily="18" charset="0"/>
+                <a:cs typeface="Times New Roman" panose="02020603050405020304" pitchFamily="18" charset="0"/>
+              </a:rPr>
+              <a:t>Linux</a:t>
+            </a:r>
+            <a:r>
+              <a:rPr lang="zh-CN" altLang="en-US" sz="2400" dirty="0">
+                <a:latin typeface="Times New Roman" panose="02020603050405020304" pitchFamily="18" charset="0"/>
+                <a:cs typeface="Times New Roman" panose="02020603050405020304" pitchFamily="18" charset="0"/>
+              </a:rPr>
+              <a:t> </a:t>
+            </a:r>
+            <a:r>
+              <a:rPr lang="en-US" altLang="zh-CN" sz="2400" dirty="0">
+                <a:latin typeface="Times New Roman" panose="02020603050405020304" pitchFamily="18" charset="0"/>
+                <a:cs typeface="Times New Roman" panose="02020603050405020304" pitchFamily="18" charset="0"/>
+              </a:rPr>
+              <a:t>OS</a:t>
+            </a:r>
+            <a:r>
+              <a:rPr lang="zh-CN" altLang="en-US" sz="2400" dirty="0">
+                <a:latin typeface="Times New Roman" panose="02020603050405020304" pitchFamily="18" charset="0"/>
+                <a:cs typeface="Times New Roman" panose="02020603050405020304" pitchFamily="18" charset="0"/>
+              </a:rPr>
+              <a:t>，</a:t>
+            </a:r>
+            <a:r>
+              <a:rPr lang="en-US" altLang="zh-CN" sz="2400" dirty="0">
+                <a:latin typeface="Times New Roman" panose="02020603050405020304" pitchFamily="18" charset="0"/>
+                <a:cs typeface="Times New Roman" panose="02020603050405020304" pitchFamily="18" charset="0"/>
+              </a:rPr>
+              <a:t>Date Structure</a:t>
+            </a:r>
+            <a:r>
+              <a:rPr lang="zh-CN" altLang="en-US" sz="2400" dirty="0">
+                <a:latin typeface="Times New Roman" panose="02020603050405020304" pitchFamily="18" charset="0"/>
+                <a:cs typeface="Times New Roman" panose="02020603050405020304" pitchFamily="18" charset="0"/>
+              </a:rPr>
+              <a:t>，</a:t>
+            </a:r>
+            <a:r>
+              <a:rPr lang="en-US" altLang="zh-CN" sz="2400" dirty="0">
+                <a:latin typeface="Times New Roman" panose="02020603050405020304" pitchFamily="18" charset="0"/>
+                <a:cs typeface="Times New Roman" panose="02020603050405020304" pitchFamily="18" charset="0"/>
+              </a:rPr>
+              <a:t>HTML/CSS/JavaScript</a:t>
+            </a:r>
+            <a:endParaRPr lang="en-US" altLang="zh-CN" dirty="0">
+              <a:latin typeface="Times New Roman" panose="02020603050405020304" pitchFamily="18" charset="0"/>
+              <a:cs typeface="Times New Roman" panose="02020603050405020304" pitchFamily="18" charset="0"/>
+            </a:endParaRPr>
+          </a:p>
+        </p:txBody>
+      </p:sp>
+      <p:pic>
+        <p:nvPicPr>
+          <p:cNvPr id="2058" name="Picture 10" descr="Spring Boot Tutorial">
+            <a:extLst>
+              <a:ext uri="{FF2B5EF4-FFF2-40B4-BE49-F238E27FC236}">
+                <a16:creationId xmlns:a16="http://schemas.microsoft.com/office/drawing/2014/main" id="{25DD3D6F-6602-9359-EC92-23D57DCE9969}"/>
+              </a:ext>
+            </a:extLst>
+          </p:cNvPr>
+          <p:cNvPicPr>
+            <a:picLocks noChangeAspect="1" noChangeArrowheads="1"/>
+          </p:cNvPicPr>
+          <p:nvPr/>
+        </p:nvPicPr>
+        <p:blipFill>
+          <a:blip r:embed="rId2">
+            <a:extLst>
+              <a:ext uri="{28A0092B-C50C-407E-A947-70E740481C1C}">
+                <a14:useLocalDpi xmlns:a14="http://schemas.microsoft.com/office/drawing/2010/main" val="0"/>
+              </a:ext>
+            </a:extLst>
+          </a:blip>
+          <a:srcRect/>
+          <a:stretch>
+            <a:fillRect/>
+          </a:stretch>
+        </p:blipFill>
+        <p:spPr bwMode="auto">
+          <a:xfrm>
+            <a:off x="5745962" y="3356297"/>
+            <a:ext cx="1335256" cy="702086"/>
+          </a:xfrm>
+          <a:prstGeom prst="rect">
+            <a:avLst/>
+          </a:prstGeom>
+          <a:noFill/>
+          <a:extLst>
+            <a:ext uri="{909E8E84-426E-40DD-AFC4-6F175D3DCCD1}">
+              <a14:hiddenFill xmlns:a14="http://schemas.microsoft.com/office/drawing/2010/main">
+                <a:solidFill>
+                  <a:srgbClr val="FFFFFF"/>
+                </a:solidFill>
+              </a14:hiddenFill>
+            </a:ext>
+          </a:extLst>
+        </p:spPr>
+      </p:pic>
+      <p:pic>
+        <p:nvPicPr>
+          <p:cNvPr id="1026" name="Picture 2" descr="Vue.js - Wikipedia">
+            <a:extLst>
+              <a:ext uri="{FF2B5EF4-FFF2-40B4-BE49-F238E27FC236}">
+                <a16:creationId xmlns:a16="http://schemas.microsoft.com/office/drawing/2014/main" id="{B98F25B4-E68D-7E4F-A5D1-FF2E7AFACD39}"/>
+              </a:ext>
+            </a:extLst>
+          </p:cNvPr>
+          <p:cNvPicPr>
+            <a:picLocks noChangeAspect="1" noChangeArrowheads="1"/>
+          </p:cNvPicPr>
+          <p:nvPr/>
+        </p:nvPicPr>
+        <p:blipFill>
+          <a:blip r:embed="rId3">
+            <a:extLst>
+              <a:ext uri="{28A0092B-C50C-407E-A947-70E740481C1C}">
+                <a14:useLocalDpi xmlns:a14="http://schemas.microsoft.com/office/drawing/2010/main" val="0"/>
+              </a:ext>
+            </a:extLst>
+          </a:blip>
+          <a:srcRect/>
+          <a:stretch>
+            <a:fillRect/>
+          </a:stretch>
+        </p:blipFill>
+        <p:spPr bwMode="auto">
+          <a:xfrm>
+            <a:off x="5745962" y="2472156"/>
+            <a:ext cx="1126316" cy="702086"/>
+          </a:xfrm>
+          <a:prstGeom prst="rect">
+            <a:avLst/>
+          </a:prstGeom>
+          <a:noFill/>
+          <a:extLst>
+            <a:ext uri="{909E8E84-426E-40DD-AFC4-6F175D3DCCD1}">
+              <a14:hiddenFill xmlns:a14="http://schemas.microsoft.com/office/drawing/2010/main">
+                <a:solidFill>
+                  <a:srgbClr val="FFFFFF"/>
+                </a:solidFill>
+              </a14:hiddenFill>
+            </a:ext>
+          </a:extLst>
+        </p:spPr>
+      </p:pic>
+      <p:sp>
+        <p:nvSpPr>
+          <p:cNvPr id="4" name="AutoShape 4" descr="Image of Cursor · Download">
+            <a:extLst>
+              <a:ext uri="{FF2B5EF4-FFF2-40B4-BE49-F238E27FC236}">
+                <a16:creationId xmlns:a16="http://schemas.microsoft.com/office/drawing/2014/main" id="{CCDD6B8D-0EE8-5F3D-EF46-015D9C36760D}"/>
+              </a:ext>
+            </a:extLst>
+          </p:cNvPr>
+          <p:cNvSpPr>
+            <a:spLocks noChangeAspect="1" noChangeArrowheads="1"/>
+          </p:cNvSpPr>
+          <p:nvPr/>
+        </p:nvSpPr>
+        <p:spPr bwMode="auto">
+          <a:xfrm>
+            <a:off x="7964231" y="4842882"/>
+            <a:ext cx="540327" cy="540327"/>
+          </a:xfrm>
+          <a:prstGeom prst="rect">
+            <a:avLst/>
+          </a:prstGeom>
+          <a:noFill/>
+          <a:extLst>
+            <a:ext uri="{909E8E84-426E-40DD-AFC4-6F175D3DCCD1}">
+              <a14:hiddenFill xmlns:a14="http://schemas.microsoft.com/office/drawing/2010/main">
+                <a:solidFill>
+                  <a:srgbClr val="FFFFFF"/>
+                </a:solidFill>
+              </a14:hiddenFill>
+            </a:ext>
+          </a:extLst>
+        </p:spPr>
+        <p:txBody>
+          <a:bodyPr vert="horz" wrap="square" lIns="91440" tIns="45720" rIns="91440" bIns="45720" numCol="1" anchor="t" anchorCtr="0" compatLnSpc="1">
+            <a:prstTxWarp prst="textNoShape">
+              <a:avLst/>
+            </a:prstTxWarp>
+          </a:bodyPr>
+          <a:lstStyle/>
+          <a:p>
+            <a:endParaRPr lang="zh-CN" altLang="en-US"/>
+          </a:p>
+        </p:txBody>
+      </p:sp>
+      <p:sp>
+        <p:nvSpPr>
+          <p:cNvPr id="5" name="AutoShape 6" descr="Image of Cursor · Download">
+            <a:extLst>
+              <a:ext uri="{FF2B5EF4-FFF2-40B4-BE49-F238E27FC236}">
+                <a16:creationId xmlns:a16="http://schemas.microsoft.com/office/drawing/2014/main" id="{686389DA-5B72-B5ED-C020-22832D03A2E4}"/>
+              </a:ext>
+            </a:extLst>
+          </p:cNvPr>
+          <p:cNvSpPr>
+            <a:spLocks noChangeAspect="1" noChangeArrowheads="1"/>
+          </p:cNvSpPr>
+          <p:nvPr/>
+        </p:nvSpPr>
+        <p:spPr bwMode="auto">
+          <a:xfrm>
+            <a:off x="10589136" y="4842882"/>
+            <a:ext cx="304800" cy="304800"/>
+          </a:xfrm>
+          <a:prstGeom prst="rect">
+            <a:avLst/>
+          </a:prstGeom>
+          <a:noFill/>
+          <a:extLst>
+            <a:ext uri="{909E8E84-426E-40DD-AFC4-6F175D3DCCD1}">
+              <a14:hiddenFill xmlns:a14="http://schemas.microsoft.com/office/drawing/2010/main">
+                <a:solidFill>
+                  <a:srgbClr val="FFFFFF"/>
+                </a:solidFill>
+              </a14:hiddenFill>
+            </a:ext>
+          </a:extLst>
+        </p:spPr>
+        <p:txBody>
+          <a:bodyPr vert="horz" wrap="square" lIns="91440" tIns="45720" rIns="91440" bIns="45720" numCol="1" anchor="t" anchorCtr="0" compatLnSpc="1">
+            <a:prstTxWarp prst="textNoShape">
+              <a:avLst/>
+            </a:prstTxWarp>
+          </a:bodyPr>
+          <a:lstStyle/>
+          <a:p>
+            <a:endParaRPr lang="zh-CN" altLang="en-US"/>
+          </a:p>
+        </p:txBody>
+      </p:sp>
+      <p:sp>
+        <p:nvSpPr>
+          <p:cNvPr id="8" name="AutoShape 8" descr="Image of Cursor · Download">
+            <a:extLst>
+              <a:ext uri="{FF2B5EF4-FFF2-40B4-BE49-F238E27FC236}">
+                <a16:creationId xmlns:a16="http://schemas.microsoft.com/office/drawing/2014/main" id="{DC0837DA-27E8-E456-2D47-C7842B961F82}"/>
+              </a:ext>
+            </a:extLst>
+          </p:cNvPr>
+          <p:cNvSpPr>
+            <a:spLocks noChangeAspect="1" noChangeArrowheads="1"/>
+          </p:cNvSpPr>
+          <p:nvPr/>
+        </p:nvSpPr>
+        <p:spPr bwMode="auto">
+          <a:xfrm>
+            <a:off x="6096000" y="4720137"/>
+            <a:ext cx="304800" cy="304800"/>
+          </a:xfrm>
+          <a:prstGeom prst="rect">
+            <a:avLst/>
+          </a:prstGeom>
+          <a:noFill/>
+          <a:extLst>
+            <a:ext uri="{909E8E84-426E-40DD-AFC4-6F175D3DCCD1}">
+              <a14:hiddenFill xmlns:a14="http://schemas.microsoft.com/office/drawing/2010/main">
+                <a:solidFill>
+                  <a:srgbClr val="FFFFFF"/>
+                </a:solidFill>
+              </a14:hiddenFill>
+            </a:ext>
+          </a:extLst>
+        </p:spPr>
+        <p:txBody>
+          <a:bodyPr vert="horz" wrap="square" lIns="91440" tIns="45720" rIns="91440" bIns="45720" numCol="1" anchor="t" anchorCtr="0" compatLnSpc="1">
+            <a:prstTxWarp prst="textNoShape">
+              <a:avLst/>
+            </a:prstTxWarp>
+          </a:bodyPr>
+          <a:lstStyle/>
+          <a:p>
+            <a:endParaRPr lang="zh-CN" altLang="en-US"/>
+          </a:p>
+        </p:txBody>
+      </p:sp>
+      <p:graphicFrame>
+        <p:nvGraphicFramePr>
+          <p:cNvPr id="7" name="Content Placeholder 2">
+            <a:extLst>
+              <a:ext uri="{FF2B5EF4-FFF2-40B4-BE49-F238E27FC236}">
+                <a16:creationId xmlns:a16="http://schemas.microsoft.com/office/drawing/2014/main" id="{410B5E0C-F15E-D4B1-4DF9-7445C7171F79}"/>
+              </a:ext>
+            </a:extLst>
+          </p:cNvPr>
+          <p:cNvGraphicFramePr>
+            <a:graphicFrameLocks noGrp="1"/>
+          </p:cNvGraphicFramePr>
+          <p:nvPr>
+            <p:ph idx="1"/>
+            <p:extLst>
+              <p:ext uri="{D42A27DB-BD31-4B8C-83A1-F6EECF244321}">
+                <p14:modId xmlns:p14="http://schemas.microsoft.com/office/powerpoint/2010/main" val="4259727901"/>
+              </p:ext>
+            </p:extLst>
+          </p:nvPr>
+        </p:nvGraphicFramePr>
+        <p:xfrm>
+          <a:off x="1988660" y="2472156"/>
+          <a:ext cx="4424929" cy="2370726"/>
+        </p:xfrm>
+        <a:graphic>
+          <a:graphicData uri="http://schemas.openxmlformats.org/drawingml/2006/diagram">
+            <dgm:relIds xmlns:dgm="http://schemas.openxmlformats.org/drawingml/2006/diagram" xmlns:r="http://schemas.openxmlformats.org/officeDocument/2006/relationships" r:dm="rId4" r:lo="rId5" r:qs="rId6" r:cs="rId7"/>
+          </a:graphicData>
+        </a:graphic>
+      </p:graphicFrame>
+      <p:pic>
+        <p:nvPicPr>
+          <p:cNvPr id="10" name="Picture 10" descr="Cursor · Download">
+            <a:extLst>
+              <a:ext uri="{FF2B5EF4-FFF2-40B4-BE49-F238E27FC236}">
+                <a16:creationId xmlns:a16="http://schemas.microsoft.com/office/drawing/2014/main" id="{F9BA6084-9476-022E-8AF4-200722D220C3}"/>
+              </a:ext>
+            </a:extLst>
+          </p:cNvPr>
+          <p:cNvPicPr>
+            <a:picLocks noChangeAspect="1" noChangeArrowheads="1"/>
+          </p:cNvPicPr>
+          <p:nvPr/>
+        </p:nvPicPr>
+        <p:blipFill>
+          <a:blip r:embed="rId9">
+            <a:extLst>
+              <a:ext uri="{28A0092B-C50C-407E-A947-70E740481C1C}">
+                <a14:useLocalDpi xmlns:a14="http://schemas.microsoft.com/office/drawing/2010/main" val="0"/>
+              </a:ext>
+            </a:extLst>
+          </a:blip>
+          <a:srcRect/>
+          <a:stretch>
+            <a:fillRect/>
+          </a:stretch>
+        </p:blipFill>
+        <p:spPr bwMode="auto">
+          <a:xfrm>
+            <a:off x="5745962" y="4175872"/>
+            <a:ext cx="702086" cy="702086"/>
+          </a:xfrm>
+          <a:prstGeom prst="rect">
+            <a:avLst/>
+          </a:prstGeom>
+          <a:noFill/>
+          <a:extLst>
+            <a:ext uri="{909E8E84-426E-40DD-AFC4-6F175D3DCCD1}">
+              <a14:hiddenFill xmlns:a14="http://schemas.microsoft.com/office/drawing/2010/main">
+                <a:solidFill>
+                  <a:srgbClr val="FFFFFF"/>
+                </a:solidFill>
+              </a14:hiddenFill>
+            </a:ext>
+          </a:extLst>
+        </p:spPr>
+      </p:pic>
+      <p:pic>
+        <p:nvPicPr>
+          <p:cNvPr id="2064" name="Picture 16" descr="Claude Code - DX Connectors">
+            <a:extLst>
+              <a:ext uri="{FF2B5EF4-FFF2-40B4-BE49-F238E27FC236}">
+                <a16:creationId xmlns:a16="http://schemas.microsoft.com/office/drawing/2014/main" id="{1D39D354-26B1-26C5-8BA1-EBC0DA41B7A4}"/>
+              </a:ext>
+            </a:extLst>
+          </p:cNvPr>
+          <p:cNvPicPr>
+            <a:picLocks noChangeAspect="1" noChangeArrowheads="1"/>
+          </p:cNvPicPr>
+          <p:nvPr/>
+        </p:nvPicPr>
+        <p:blipFill>
+          <a:blip r:embed="rId10">
+            <a:extLst>
+              <a:ext uri="{28A0092B-C50C-407E-A947-70E740481C1C}">
+                <a14:useLocalDpi xmlns:a14="http://schemas.microsoft.com/office/drawing/2010/main" val="0"/>
+              </a:ext>
+            </a:extLst>
+          </a:blip>
+          <a:srcRect/>
+          <a:stretch>
+            <a:fillRect/>
+          </a:stretch>
+        </p:blipFill>
+        <p:spPr bwMode="auto">
+          <a:xfrm>
+            <a:off x="6599635" y="4152774"/>
+            <a:ext cx="1195997" cy="702087"/>
+          </a:xfrm>
+          <a:prstGeom prst="rect">
+            <a:avLst/>
+          </a:prstGeom>
+          <a:noFill/>
+          <a:extLst>
+            <a:ext uri="{909E8E84-426E-40DD-AFC4-6F175D3DCCD1}">
+              <a14:hiddenFill xmlns:a14="http://schemas.microsoft.com/office/drawing/2010/main">
+                <a:solidFill>
+                  <a:srgbClr val="FFFFFF"/>
+                </a:solidFill>
+              </a14:hiddenFill>
+            </a:ext>
+          </a:extLst>
+        </p:spPr>
+      </p:pic>
+    </p:spTree>
+  </p:cSld>
+  <p:clrMapOvr>
+    <a:masterClrMapping/>
+  </p:clrMapOvr>
+</p:sld>
+</file>
+
+<file path=ppt/slides/slide5.xml><?xml version="1.0" encoding="utf-8"?>
+<p:sld xmlns:a="http://schemas.openxmlformats.org/drawingml/2006/main" xmlns:r="http://schemas.openxmlformats.org/officeDocument/2006/relationships" xmlns:p="http://schemas.openxmlformats.org/presentationml/2006/main">
+  <p:cSld>
+    <p:spTree>
+      <p:nvGrpSpPr>
+        <p:cNvPr id="1" name=""/>
+        <p:cNvGrpSpPr/>
+        <p:nvPr/>
+      </p:nvGrpSpPr>
+      <p:grpSpPr>
+        <a:xfrm>
+          <a:off x="0" y="0"/>
+          <a:ext cx="0" cy="0"/>
+          <a:chOff x="0" y="0"/>
+          <a:chExt cx="0" cy="0"/>
+        </a:xfrm>
+      </p:grpSpPr>
+      <p:sp>
+        <p:nvSpPr>
+          <p:cNvPr id="2" name="Title 1">
+            <a:extLst>
+              <a:ext uri="{FF2B5EF4-FFF2-40B4-BE49-F238E27FC236}">
+                <a16:creationId xmlns:a16="http://schemas.microsoft.com/office/drawing/2014/main" id="{C8E84B57-3507-1A49-A3D7-7D9E729E9D6A}"/>
+              </a:ext>
+            </a:extLst>
+          </p:cNvPr>
+          <p:cNvSpPr>
+            <a:spLocks noGrp="1"/>
+          </p:cNvSpPr>
+          <p:nvPr>
+            <p:ph type="title"/>
+          </p:nvPr>
+        </p:nvSpPr>
+        <p:spPr/>
+        <p:txBody>
+          <a:bodyPr/>
+          <a:lstStyle/>
+          <a:p>
+            <a:endParaRPr lang="en-CN"/>
+          </a:p>
+        </p:txBody>
+      </p:sp>
+      <p:graphicFrame>
+        <p:nvGraphicFramePr>
+          <p:cNvPr id="5" name="Content Placeholder 2">
+            <a:extLst>
+              <a:ext uri="{FF2B5EF4-FFF2-40B4-BE49-F238E27FC236}">
+                <a16:creationId xmlns:a16="http://schemas.microsoft.com/office/drawing/2014/main" id="{97B2F504-F541-687F-7C60-26C43302065D}"/>
+              </a:ext>
+            </a:extLst>
+          </p:cNvPr>
+          <p:cNvGraphicFramePr>
+            <a:graphicFrameLocks noGrp="1"/>
+          </p:cNvGraphicFramePr>
+          <p:nvPr>
+            <p:ph idx="1"/>
+            <p:extLst>
+              <p:ext uri="{D42A27DB-BD31-4B8C-83A1-F6EECF244321}">
+                <p14:modId xmlns:p14="http://schemas.microsoft.com/office/powerpoint/2010/main" val="3337844988"/>
+              </p:ext>
+            </p:extLst>
+          </p:nvPr>
+        </p:nvGraphicFramePr>
+        <p:xfrm>
+          <a:off x="1981200" y="1600201"/>
+          <a:ext cx="8229600" cy="4525963"/>
+        </p:xfrm>
+        <a:graphic>
+          <a:graphicData uri="http://schemas.openxmlformats.org/drawingml/2006/diagram">
+            <dgm:relIds xmlns:dgm="http://schemas.openxmlformats.org/drawingml/2006/diagram" xmlns:r="http://schemas.openxmlformats.org/officeDocument/2006/relationships" r:dm="rId2" r:lo="rId3" r:qs="rId4" r:cs="rId5"/>
+          </a:graphicData>
+        </a:graphic>
+      </p:graphicFrame>
+    </p:spTree>
+    <p:extLst>
+      <p:ext uri="{BB962C8B-B14F-4D97-AF65-F5344CB8AC3E}">
+        <p14:creationId xmlns:p14="http://schemas.microsoft.com/office/powerpoint/2010/main" val="1369805682"/>
+      </p:ext>
+    </p:extLst>
+  </p:cSld>
+  <p:clrMapOvr>
+    <a:masterClrMapping/>
+  </p:clrMapOvr>
+</p:sld>
+</file>
+
+<file path=ppt/slides/slide6.xml><?xml version="1.0" encoding="utf-8"?>
+<p:sld xmlns:a="http://schemas.openxmlformats.org/drawingml/2006/main" xmlns:r="http://schemas.openxmlformats.org/officeDocument/2006/relationships" xmlns:p="http://schemas.openxmlformats.org/presentationml/2006/main">
+  <p:cSld>
+    <p:bg>
+      <p:bgPr>
+        <a:solidFill>
+          <a:schemeClr val="bg1"/>
+        </a:solidFill>
+        <a:effectLst/>
+      </p:bgPr>
+    </p:bg>
+    <p:spTree>
+      <p:nvGrpSpPr>
+        <p:cNvPr id="1" name=""/>
+        <p:cNvGrpSpPr/>
+        <p:nvPr/>
+      </p:nvGrpSpPr>
+      <p:grpSpPr>
+        <a:xfrm>
+          <a:off x="0" y="0"/>
+          <a:ext cx="0" cy="0"/>
+          <a:chOff x="0" y="0"/>
+          <a:chExt cx="0" cy="0"/>
+        </a:xfrm>
+      </p:grpSpPr>
+      <p:sp useBgFill="1">
+        <p:nvSpPr>
+          <p:cNvPr id="7252" name="Rectangle 7251">
+            <a:extLst>
+              <a:ext uri="{FF2B5EF4-FFF2-40B4-BE49-F238E27FC236}">
+                <a16:creationId xmlns:a16="http://schemas.microsoft.com/office/drawing/2014/main" id="{D009D6D5-DAC2-4A8B-A17A-E206B9012D09}"/>
+              </a:ext>
+              <a:ext uri="{C183D7F6-B498-43B3-948B-1728B52AA6E4}">
+                <adec:decorative xmlns:adec="http://schemas.microsoft.com/office/drawing/2017/decorative" val="1"/>
+              </a:ext>
+            </a:extLst>
+          </p:cNvPr>
+          <p:cNvSpPr>
+            <a:spLocks noGrp="1" noRot="1" noChangeAspect="1" noMove="1" noResize="1" noEditPoints="1" noAdjustHandles="1" noChangeArrowheads="1" noChangeShapeType="1" noTextEdit="1"/>
+          </p:cNvSpPr>
+          <p:nvPr>
+            <p:extLst>
+              <p:ext uri="{386F3935-93C4-4BCD-93E2-E3B085C9AB24}">
+                <p16:designElem xmlns:p16="http://schemas.microsoft.com/office/powerpoint/2015/main" val="1"/>
+              </p:ext>
+            </p:extLst>
+          </p:nvPr>
+        </p:nvSpPr>
+        <p:spPr>
+          <a:xfrm>
+            <a:off x="0" y="0"/>
+            <a:ext cx="12188952" cy="6858000"/>
+          </a:xfrm>
+          <a:prstGeom prst="rect">
+            <a:avLst/>
+          </a:prstGeom>
+          <a:ln>
+            <a:noFill/>
+          </a:ln>
+        </p:spPr>
+        <p:style>
+          <a:lnRef idx="2">
+            <a:schemeClr val="accent1">
+              <a:shade val="50000"/>
+            </a:schemeClr>
+          </a:lnRef>
+          <a:fillRef idx="1">
+            <a:schemeClr val="accent1"/>
+          </a:fillRef>
+          <a:effectRef idx="0">
+            <a:schemeClr val="accent1"/>
+          </a:effectRef>
+          <a:fontRef idx="minor">
+            <a:schemeClr val="lt1"/>
+          </a:fontRef>
+        </p:style>
+        <p:txBody>
+          <a:bodyPr rtlCol="0" anchor="ctr"/>
+          <a:lstStyle/>
+          <a:p>
+            <a:pPr algn="ctr"/>
+            <a:endParaRPr lang="en-US"/>
+          </a:p>
+        </p:txBody>
+      </p:sp>
+      <p:sp>
+        <p:nvSpPr>
+          <p:cNvPr id="2" name="标题 1">
+            <a:extLst>
+              <a:ext uri="{FF2B5EF4-FFF2-40B4-BE49-F238E27FC236}">
+                <a16:creationId xmlns:a16="http://schemas.microsoft.com/office/drawing/2014/main" id="{50F40516-69FC-4A4B-E2B8-16F455F515D7}"/>
+              </a:ext>
+            </a:extLst>
+          </p:cNvPr>
+          <p:cNvSpPr>
+            <a:spLocks noGrp="1"/>
+          </p:cNvSpPr>
+          <p:nvPr>
+            <p:ph type="title"/>
+          </p:nvPr>
+        </p:nvSpPr>
+        <p:spPr>
+          <a:xfrm>
+            <a:off x="838201" y="365125"/>
+            <a:ext cx="5251316" cy="1807305"/>
+          </a:xfrm>
+        </p:spPr>
+        <p:txBody>
+          <a:bodyPr>
+            <a:normAutofit/>
+          </a:bodyPr>
+          <a:lstStyle/>
+          <a:p>
+            <a:r>
+              <a:rPr kumimoji="1" lang="en-US" altLang="zh-CN" dirty="0"/>
+              <a:t>React VS Vue(Vue3)</a:t>
+            </a:r>
+            <a:endParaRPr kumimoji="1" lang="zh-CN" altLang="en-US" dirty="0"/>
+          </a:p>
+        </p:txBody>
+      </p:sp>
+      <p:sp>
+        <p:nvSpPr>
+          <p:cNvPr id="7247" name="内容占位符 2">
+            <a:extLst>
+              <a:ext uri="{FF2B5EF4-FFF2-40B4-BE49-F238E27FC236}">
+                <a16:creationId xmlns:a16="http://schemas.microsoft.com/office/drawing/2014/main" id="{5A625B99-3BA4-E934-8830-EAC8C74A909A}"/>
+              </a:ext>
+            </a:extLst>
+          </p:cNvPr>
+          <p:cNvSpPr>
+            <a:spLocks noGrp="1"/>
+          </p:cNvSpPr>
+          <p:nvPr>
+            <p:ph idx="1"/>
+          </p:nvPr>
+        </p:nvSpPr>
+        <p:spPr>
+          <a:xfrm>
+            <a:off x="838200" y="2333297"/>
+            <a:ext cx="4619621" cy="3843666"/>
+          </a:xfrm>
+        </p:spPr>
+        <p:txBody>
+          <a:bodyPr>
+            <a:normAutofit/>
+          </a:bodyPr>
+          <a:lstStyle/>
+          <a:p>
+            <a:r>
+              <a:rPr kumimoji="1" lang="en-US" altLang="zh-CN" sz="2000" dirty="0"/>
+              <a:t>Vue </a:t>
+            </a:r>
+            <a:r>
+              <a:rPr kumimoji="1" lang="zh-CN" altLang="en-US" sz="2000" dirty="0"/>
+              <a:t>是渐进式</a:t>
+            </a:r>
+            <a:r>
+              <a:rPr kumimoji="1" lang="en" altLang="zh-CN" sz="2000" dirty="0"/>
+              <a:t>JavaScript </a:t>
+            </a:r>
+            <a:r>
+              <a:rPr kumimoji="1" lang="zh-CN" altLang="en-US" sz="2000" dirty="0"/>
+              <a:t>框架，设计理念及文档对国人友好</a:t>
+            </a:r>
+            <a:endParaRPr kumimoji="1" lang="en-US" altLang="zh-CN" sz="2000" dirty="0"/>
+          </a:p>
+          <a:p>
+            <a:pPr lvl="1"/>
+            <a:r>
+              <a:rPr kumimoji="1" lang="zh-CN" altLang="en-US" sz="2000" dirty="0"/>
+              <a:t> 华人尤雨溪所写</a:t>
+            </a:r>
+            <a:endParaRPr kumimoji="1" lang="en-US" altLang="zh-CN" sz="2000" dirty="0"/>
+          </a:p>
+          <a:p>
+            <a:r>
+              <a:rPr kumimoji="1" lang="en-US" altLang="zh-CN" sz="2000" dirty="0"/>
+              <a:t>React</a:t>
+            </a:r>
+            <a:r>
+              <a:rPr kumimoji="1" lang="zh-CN" altLang="en-US" sz="2000" dirty="0"/>
+              <a:t>更加国际化，在就业市场的吸引力更高</a:t>
+            </a:r>
+            <a:endParaRPr kumimoji="1" lang="en-US" altLang="zh-CN" sz="2000" dirty="0"/>
+          </a:p>
+          <a:p>
+            <a:r>
+              <a:rPr kumimoji="1" lang="en-US" altLang="zh-CN" sz="2000" dirty="0"/>
+              <a:t>React</a:t>
+            </a:r>
+            <a:r>
+              <a:rPr kumimoji="1" lang="zh-CN" altLang="en-US" sz="2000" dirty="0"/>
+              <a:t>相对来说生态更加完善</a:t>
+            </a:r>
+            <a:endParaRPr kumimoji="1" lang="en-US" altLang="zh-CN" sz="2000" dirty="0"/>
+          </a:p>
+          <a:p>
+            <a:r>
+              <a:rPr kumimoji="1" lang="zh-CN" altLang="en-US" sz="2000" dirty="0"/>
+              <a:t>学习</a:t>
+            </a:r>
+            <a:r>
+              <a:rPr kumimoji="1" lang="en-US" altLang="zh-CN" sz="2000" dirty="0"/>
+              <a:t>React</a:t>
+            </a:r>
+            <a:r>
+              <a:rPr kumimoji="1" lang="zh-CN" altLang="en-US" sz="2000" dirty="0"/>
+              <a:t>后学习</a:t>
+            </a:r>
+            <a:r>
+              <a:rPr kumimoji="1" lang="en-US" altLang="zh-CN" sz="2000" dirty="0"/>
+              <a:t>Vue</a:t>
+            </a:r>
+            <a:r>
+              <a:rPr kumimoji="1" lang="zh-CN" altLang="en-US" sz="2000" dirty="0"/>
+              <a:t>很简单</a:t>
+            </a:r>
+            <a:endParaRPr kumimoji="1" lang="en-US" altLang="zh-CN" sz="2000" dirty="0"/>
+          </a:p>
+        </p:txBody>
+      </p:sp>
+      <p:pic>
+        <p:nvPicPr>
+          <p:cNvPr id="7172" name="Picture 4">
+            <a:extLst>
+              <a:ext uri="{FF2B5EF4-FFF2-40B4-BE49-F238E27FC236}">
+                <a16:creationId xmlns:a16="http://schemas.microsoft.com/office/drawing/2014/main" id="{A5B2EF6A-8F31-9BD3-FC76-33773A6F8FA2}"/>
+              </a:ext>
+            </a:extLst>
+          </p:cNvPr>
+          <p:cNvPicPr>
+            <a:picLocks noChangeAspect="1" noChangeArrowheads="1"/>
+          </p:cNvPicPr>
+          <p:nvPr/>
+        </p:nvPicPr>
+        <p:blipFill rotWithShape="1">
+          <a:blip r:embed="rId2">
+            <a:extLst>
+              <a:ext uri="{28A0092B-C50C-407E-A947-70E740481C1C}">
+                <a14:useLocalDpi xmlns:a14="http://schemas.microsoft.com/office/drawing/2010/main" val="0"/>
+              </a:ext>
+            </a:extLst>
+          </a:blip>
+          <a:srcRect b="1663"/>
+          <a:stretch/>
+        </p:blipFill>
+        <p:spPr bwMode="auto">
+          <a:xfrm>
+            <a:off x="6229207" y="0"/>
+            <a:ext cx="5962794" cy="6858000"/>
+          </a:xfrm>
+          <a:custGeom>
+            <a:avLst/>
+            <a:gdLst/>
+            <a:ahLst/>
+            <a:cxnLst/>
+            <a:rect l="l" t="t" r="r" b="b"/>
+            <a:pathLst>
+              <a:path w="5962785" h="6858000">
+                <a:moveTo>
+                  <a:pt x="1044839" y="0"/>
+                </a:moveTo>
+                <a:lnTo>
+                  <a:pt x="5962785" y="0"/>
+                </a:lnTo>
+                <a:lnTo>
+                  <a:pt x="5962785" y="6858000"/>
+                </a:lnTo>
+                <a:lnTo>
+                  <a:pt x="1469886" y="6858000"/>
+                </a:lnTo>
+                <a:lnTo>
+                  <a:pt x="1416006" y="6823984"/>
+                </a:lnTo>
+                <a:cubicBezTo>
+                  <a:pt x="1356767" y="6787940"/>
+                  <a:pt x="1296437" y="6755500"/>
+                  <a:pt x="1232473" y="6733873"/>
+                </a:cubicBezTo>
+                <a:cubicBezTo>
+                  <a:pt x="1145250" y="6705037"/>
+                  <a:pt x="1060933" y="6654575"/>
+                  <a:pt x="1075471" y="6503186"/>
+                </a:cubicBezTo>
+                <a:cubicBezTo>
+                  <a:pt x="1078378" y="6459932"/>
+                  <a:pt x="1055118" y="6427493"/>
+                  <a:pt x="1020229" y="6438306"/>
+                </a:cubicBezTo>
+                <a:cubicBezTo>
+                  <a:pt x="953358" y="6459932"/>
+                  <a:pt x="921375" y="6398656"/>
+                  <a:pt x="883579" y="6351798"/>
+                </a:cubicBezTo>
+                <a:cubicBezTo>
+                  <a:pt x="816707" y="6268895"/>
+                  <a:pt x="752743" y="6182387"/>
+                  <a:pt x="645167" y="6167969"/>
+                </a:cubicBezTo>
+                <a:cubicBezTo>
+                  <a:pt x="665519" y="6103088"/>
+                  <a:pt x="700408" y="6110298"/>
+                  <a:pt x="732391" y="6124716"/>
+                </a:cubicBezTo>
+                <a:cubicBezTo>
+                  <a:pt x="816707" y="6160761"/>
+                  <a:pt x="901023" y="6200410"/>
+                  <a:pt x="985339" y="6236455"/>
+                </a:cubicBezTo>
+                <a:cubicBezTo>
+                  <a:pt x="1040581" y="6258081"/>
+                  <a:pt x="1095822" y="6290522"/>
+                  <a:pt x="1168509" y="6265291"/>
+                </a:cubicBezTo>
+                <a:cubicBezTo>
+                  <a:pt x="1104545" y="6135530"/>
+                  <a:pt x="996969" y="6110298"/>
+                  <a:pt x="909746" y="6070649"/>
+                </a:cubicBezTo>
+                <a:cubicBezTo>
+                  <a:pt x="802169" y="6020185"/>
+                  <a:pt x="738206" y="5926470"/>
+                  <a:pt x="659704" y="5818335"/>
+                </a:cubicBezTo>
+                <a:cubicBezTo>
+                  <a:pt x="738206" y="5789500"/>
+                  <a:pt x="787632" y="5868798"/>
+                  <a:pt x="851597" y="5865193"/>
+                </a:cubicBezTo>
+                <a:cubicBezTo>
+                  <a:pt x="854504" y="5854380"/>
+                  <a:pt x="860319" y="5832753"/>
+                  <a:pt x="860319" y="5832753"/>
+                </a:cubicBezTo>
+                <a:cubicBezTo>
+                  <a:pt x="755650" y="5775081"/>
+                  <a:pt x="709132" y="5666947"/>
+                  <a:pt x="691686" y="5533581"/>
+                </a:cubicBezTo>
+                <a:cubicBezTo>
+                  <a:pt x="685872" y="5465095"/>
+                  <a:pt x="648075" y="5443468"/>
+                  <a:pt x="610278" y="5411029"/>
+                </a:cubicBezTo>
+                <a:cubicBezTo>
+                  <a:pt x="482350" y="5299289"/>
+                  <a:pt x="345700" y="5198364"/>
+                  <a:pt x="238123" y="5046976"/>
+                </a:cubicBezTo>
+                <a:cubicBezTo>
+                  <a:pt x="363144" y="5064998"/>
+                  <a:pt x="461997" y="5165924"/>
+                  <a:pt x="592833" y="5209177"/>
+                </a:cubicBezTo>
+                <a:cubicBezTo>
+                  <a:pt x="488165" y="5043371"/>
+                  <a:pt x="351514" y="4956864"/>
+                  <a:pt x="226494" y="4855939"/>
+                </a:cubicBezTo>
+                <a:cubicBezTo>
+                  <a:pt x="168344" y="4809081"/>
+                  <a:pt x="116011" y="4751408"/>
+                  <a:pt x="49139" y="4726177"/>
+                </a:cubicBezTo>
+                <a:cubicBezTo>
+                  <a:pt x="25879" y="4718968"/>
+                  <a:pt x="-14825" y="4700947"/>
+                  <a:pt x="5527" y="4650483"/>
+                </a:cubicBezTo>
+                <a:cubicBezTo>
+                  <a:pt x="22972" y="4607230"/>
+                  <a:pt x="54954" y="4621648"/>
+                  <a:pt x="84029" y="4632460"/>
+                </a:cubicBezTo>
+                <a:cubicBezTo>
+                  <a:pt x="153807" y="4661296"/>
+                  <a:pt x="229401" y="4661296"/>
+                  <a:pt x="325347" y="4661296"/>
+                </a:cubicBezTo>
+                <a:cubicBezTo>
+                  <a:pt x="243939" y="4524326"/>
+                  <a:pt x="95658" y="4567580"/>
+                  <a:pt x="25879" y="4423401"/>
+                </a:cubicBezTo>
+                <a:cubicBezTo>
+                  <a:pt x="113103" y="4398170"/>
+                  <a:pt x="179975" y="4448632"/>
+                  <a:pt x="249753" y="4459446"/>
+                </a:cubicBezTo>
+                <a:cubicBezTo>
+                  <a:pt x="313718" y="4470259"/>
+                  <a:pt x="328254" y="4445028"/>
+                  <a:pt x="313718" y="4365729"/>
+                </a:cubicBezTo>
+                <a:cubicBezTo>
+                  <a:pt x="290458" y="4243177"/>
+                  <a:pt x="325347" y="4181900"/>
+                  <a:pt x="418386" y="4214341"/>
+                </a:cubicBezTo>
+                <a:cubicBezTo>
+                  <a:pt x="505609" y="4246781"/>
+                  <a:pt x="514332" y="4199922"/>
+                  <a:pt x="491072" y="4131438"/>
+                </a:cubicBezTo>
+                <a:cubicBezTo>
+                  <a:pt x="456183" y="4030512"/>
+                  <a:pt x="493979" y="3951214"/>
+                  <a:pt x="520147" y="3864706"/>
+                </a:cubicBezTo>
+                <a:cubicBezTo>
+                  <a:pt x="560851" y="3734945"/>
+                  <a:pt x="543407" y="3670064"/>
+                  <a:pt x="459090" y="3572743"/>
+                </a:cubicBezTo>
+                <a:cubicBezTo>
+                  <a:pt x="409664" y="3518676"/>
+                  <a:pt x="360236" y="3471818"/>
+                  <a:pt x="290458" y="3424959"/>
+                </a:cubicBezTo>
+                <a:cubicBezTo>
+                  <a:pt x="450368" y="3399728"/>
+                  <a:pt x="284643" y="3313221"/>
+                  <a:pt x="339884" y="3259153"/>
+                </a:cubicBezTo>
+                <a:cubicBezTo>
+                  <a:pt x="453275" y="3237527"/>
+                  <a:pt x="543407" y="3410542"/>
+                  <a:pt x="697501" y="3360078"/>
+                </a:cubicBezTo>
+                <a:cubicBezTo>
+                  <a:pt x="511425" y="3212294"/>
+                  <a:pt x="302087" y="3165436"/>
+                  <a:pt x="165437" y="2967190"/>
+                </a:cubicBezTo>
+                <a:cubicBezTo>
+                  <a:pt x="197419" y="2923937"/>
+                  <a:pt x="229401" y="2967190"/>
+                  <a:pt x="255568" y="2949167"/>
+                </a:cubicBezTo>
+                <a:cubicBezTo>
+                  <a:pt x="255568" y="2938354"/>
+                  <a:pt x="560851" y="3006840"/>
+                  <a:pt x="578296" y="2725691"/>
+                </a:cubicBezTo>
+                <a:cubicBezTo>
+                  <a:pt x="584111" y="2725691"/>
+                  <a:pt x="589926" y="2725691"/>
+                  <a:pt x="595740" y="2714876"/>
+                </a:cubicBezTo>
+                <a:cubicBezTo>
+                  <a:pt x="627722" y="2675228"/>
+                  <a:pt x="598648" y="2581510"/>
+                  <a:pt x="650982" y="2574301"/>
+                </a:cubicBezTo>
+                <a:cubicBezTo>
+                  <a:pt x="709132" y="2567092"/>
+                  <a:pt x="764373" y="2534653"/>
+                  <a:pt x="825429" y="2552674"/>
+                </a:cubicBezTo>
+                <a:cubicBezTo>
+                  <a:pt x="871949" y="2567092"/>
+                  <a:pt x="921375" y="2585115"/>
+                  <a:pt x="970802" y="2585115"/>
+                </a:cubicBezTo>
+                <a:cubicBezTo>
+                  <a:pt x="1023136" y="2585115"/>
+                  <a:pt x="1095822" y="2707668"/>
+                  <a:pt x="1127805" y="2545465"/>
+                </a:cubicBezTo>
+                <a:cubicBezTo>
+                  <a:pt x="1127805" y="2538257"/>
+                  <a:pt x="1217936" y="2556280"/>
+                  <a:pt x="1267362" y="2563488"/>
+                </a:cubicBezTo>
+                <a:cubicBezTo>
+                  <a:pt x="1308067" y="2570698"/>
+                  <a:pt x="1357494" y="2603137"/>
+                  <a:pt x="1386568" y="2538257"/>
+                </a:cubicBezTo>
+                <a:cubicBezTo>
+                  <a:pt x="1401105" y="2498607"/>
+                  <a:pt x="1331326" y="2426518"/>
+                  <a:pt x="1270270" y="2419309"/>
+                </a:cubicBezTo>
+                <a:cubicBezTo>
+                  <a:pt x="1215029" y="2412101"/>
+                  <a:pt x="1159787" y="2404892"/>
+                  <a:pt x="1107453" y="2419309"/>
+                </a:cubicBezTo>
+                <a:cubicBezTo>
+                  <a:pt x="1043489" y="2437331"/>
+                  <a:pt x="1008599" y="2408495"/>
+                  <a:pt x="991154" y="2343615"/>
+                </a:cubicBezTo>
+                <a:cubicBezTo>
+                  <a:pt x="970802" y="2275131"/>
+                  <a:pt x="933005" y="2239085"/>
+                  <a:pt x="880671" y="2206645"/>
+                </a:cubicBezTo>
+                <a:cubicBezTo>
+                  <a:pt x="752743" y="2127346"/>
+                  <a:pt x="630630" y="2033629"/>
+                  <a:pt x="491072" y="1986771"/>
+                </a:cubicBezTo>
+                <a:cubicBezTo>
+                  <a:pt x="464905" y="1979562"/>
+                  <a:pt x="432923" y="1965145"/>
+                  <a:pt x="421293" y="1903868"/>
+                </a:cubicBezTo>
+                <a:cubicBezTo>
+                  <a:pt x="799262" y="1997584"/>
+                  <a:pt x="1142342" y="2239085"/>
+                  <a:pt x="1531941" y="2224667"/>
+                </a:cubicBezTo>
+                <a:cubicBezTo>
+                  <a:pt x="1427272" y="2148974"/>
+                  <a:pt x="1302252" y="2145369"/>
+                  <a:pt x="1188861" y="2091301"/>
+                </a:cubicBezTo>
+                <a:cubicBezTo>
+                  <a:pt x="1270270" y="2051652"/>
+                  <a:pt x="1345864" y="2094906"/>
+                  <a:pt x="1421458" y="2116532"/>
+                </a:cubicBezTo>
+                <a:cubicBezTo>
+                  <a:pt x="1485422" y="2134554"/>
+                  <a:pt x="1543571" y="2138160"/>
+                  <a:pt x="1549386" y="2026420"/>
+                </a:cubicBezTo>
+                <a:cubicBezTo>
+                  <a:pt x="1549386" y="2015607"/>
+                  <a:pt x="1549386" y="2008398"/>
+                  <a:pt x="1549386" y="1997584"/>
+                </a:cubicBezTo>
+                <a:cubicBezTo>
+                  <a:pt x="1526126" y="1950727"/>
+                  <a:pt x="1494144" y="1929099"/>
+                  <a:pt x="1453440" y="1914682"/>
+                </a:cubicBezTo>
+                <a:cubicBezTo>
+                  <a:pt x="1430180" y="1907473"/>
+                  <a:pt x="1398198" y="1893056"/>
+                  <a:pt x="1398198" y="1860614"/>
+                </a:cubicBezTo>
+                <a:cubicBezTo>
+                  <a:pt x="1401105" y="1738063"/>
+                  <a:pt x="1322604" y="1702018"/>
+                  <a:pt x="1247011" y="1665972"/>
+                </a:cubicBezTo>
+                <a:cubicBezTo>
+                  <a:pt x="1287715" y="1604696"/>
+                  <a:pt x="1322604" y="1647950"/>
+                  <a:pt x="1354586" y="1644345"/>
+                </a:cubicBezTo>
+                <a:cubicBezTo>
+                  <a:pt x="1374939" y="1640741"/>
+                  <a:pt x="1395290" y="1637138"/>
+                  <a:pt x="1395290" y="1604696"/>
+                </a:cubicBezTo>
+                <a:cubicBezTo>
+                  <a:pt x="1395290" y="1579465"/>
+                  <a:pt x="1386568" y="1547025"/>
+                  <a:pt x="1366216" y="1547025"/>
+                </a:cubicBezTo>
+                <a:cubicBezTo>
+                  <a:pt x="1238288" y="1543420"/>
+                  <a:pt x="1165601" y="1370405"/>
+                  <a:pt x="1031858" y="1370405"/>
+                </a:cubicBezTo>
+                <a:cubicBezTo>
+                  <a:pt x="950450" y="1370405"/>
+                  <a:pt x="1072563" y="1273083"/>
+                  <a:pt x="1005692" y="1233435"/>
+                </a:cubicBezTo>
+                <a:cubicBezTo>
+                  <a:pt x="991154" y="1222621"/>
+                  <a:pt x="1046396" y="1208203"/>
+                  <a:pt x="1069655" y="1211808"/>
+                </a:cubicBezTo>
+                <a:cubicBezTo>
+                  <a:pt x="1092915" y="1215412"/>
+                  <a:pt x="1113268" y="1240644"/>
+                  <a:pt x="1142342" y="1222621"/>
+                </a:cubicBezTo>
+                <a:cubicBezTo>
+                  <a:pt x="1156879" y="1157741"/>
+                  <a:pt x="1119082" y="1132510"/>
+                  <a:pt x="1084193" y="1114487"/>
+                </a:cubicBezTo>
+                <a:cubicBezTo>
+                  <a:pt x="1008599" y="1071234"/>
+                  <a:pt x="933005" y="1020771"/>
+                  <a:pt x="848689" y="1006353"/>
+                </a:cubicBezTo>
+                <a:cubicBezTo>
+                  <a:pt x="819615" y="1002748"/>
+                  <a:pt x="802169" y="984726"/>
+                  <a:pt x="805077" y="948681"/>
+                </a:cubicBezTo>
+                <a:cubicBezTo>
+                  <a:pt x="810892" y="901822"/>
+                  <a:pt x="839967" y="916240"/>
+                  <a:pt x="863226" y="919844"/>
+                </a:cubicBezTo>
+                <a:cubicBezTo>
+                  <a:pt x="877764" y="923450"/>
+                  <a:pt x="892301" y="934263"/>
+                  <a:pt x="906838" y="909031"/>
+                </a:cubicBezTo>
+                <a:cubicBezTo>
+                  <a:pt x="566666" y="653113"/>
+                  <a:pt x="386404" y="667532"/>
+                  <a:pt x="5527" y="458471"/>
+                </a:cubicBezTo>
+                <a:cubicBezTo>
+                  <a:pt x="89843" y="418822"/>
+                  <a:pt x="150900" y="447658"/>
+                  <a:pt x="209049" y="454867"/>
+                </a:cubicBezTo>
+                <a:cubicBezTo>
+                  <a:pt x="354422" y="472890"/>
+                  <a:pt x="264290" y="505329"/>
+                  <a:pt x="409664" y="526956"/>
+                </a:cubicBezTo>
+                <a:cubicBezTo>
+                  <a:pt x="479443" y="537770"/>
+                  <a:pt x="543407" y="573815"/>
+                  <a:pt x="621908" y="516143"/>
+                </a:cubicBezTo>
+                <a:cubicBezTo>
+                  <a:pt x="674242" y="476494"/>
+                  <a:pt x="758558" y="519747"/>
+                  <a:pt x="822522" y="552188"/>
+                </a:cubicBezTo>
+                <a:cubicBezTo>
+                  <a:pt x="874856" y="581024"/>
+                  <a:pt x="927190" y="588232"/>
+                  <a:pt x="996969" y="552188"/>
+                </a:cubicBezTo>
+                <a:cubicBezTo>
+                  <a:pt x="933005" y="530562"/>
+                  <a:pt x="883579" y="512539"/>
+                  <a:pt x="834151" y="498120"/>
+                </a:cubicBezTo>
+                <a:cubicBezTo>
+                  <a:pt x="793447" y="487307"/>
+                  <a:pt x="770187" y="462076"/>
+                  <a:pt x="773095" y="408008"/>
+                </a:cubicBezTo>
+                <a:cubicBezTo>
+                  <a:pt x="773095" y="379172"/>
+                  <a:pt x="764373" y="339523"/>
+                  <a:pt x="793447" y="325106"/>
+                </a:cubicBezTo>
+                <a:cubicBezTo>
+                  <a:pt x="816707" y="310688"/>
+                  <a:pt x="848689" y="325106"/>
+                  <a:pt x="860319" y="350336"/>
+                </a:cubicBezTo>
+                <a:cubicBezTo>
+                  <a:pt x="874856" y="397195"/>
+                  <a:pt x="889393" y="440449"/>
+                  <a:pt x="938820" y="444054"/>
+                </a:cubicBezTo>
+                <a:cubicBezTo>
+                  <a:pt x="1005692" y="451262"/>
+                  <a:pt x="967894" y="422426"/>
+                  <a:pt x="956265" y="386381"/>
+                </a:cubicBezTo>
+                <a:cubicBezTo>
+                  <a:pt x="944635" y="346733"/>
+                  <a:pt x="979525" y="335919"/>
+                  <a:pt x="1002784" y="343127"/>
+                </a:cubicBezTo>
+                <a:cubicBezTo>
+                  <a:pt x="1090008" y="375569"/>
+                  <a:pt x="1180139" y="317897"/>
+                  <a:pt x="1270270" y="364755"/>
+                </a:cubicBezTo>
+                <a:cubicBezTo>
+                  <a:pt x="1247011" y="249411"/>
+                  <a:pt x="1197583" y="198949"/>
+                  <a:pt x="1092915" y="180926"/>
+                </a:cubicBezTo>
+                <a:cubicBezTo>
+                  <a:pt x="1055118" y="177322"/>
+                  <a:pt x="1014414" y="184530"/>
+                  <a:pt x="979525" y="152090"/>
+                </a:cubicBezTo>
+                <a:cubicBezTo>
+                  <a:pt x="959172" y="134068"/>
+                  <a:pt x="938820" y="112441"/>
+                  <a:pt x="953358" y="76396"/>
+                </a:cubicBezTo>
+                <a:cubicBezTo>
+                  <a:pt x="962080" y="51165"/>
+                  <a:pt x="985339" y="51165"/>
+                  <a:pt x="1005692" y="58373"/>
+                </a:cubicBezTo>
+                <a:cubicBezTo>
+                  <a:pt x="1090008" y="98023"/>
+                  <a:pt x="1180139" y="108837"/>
+                  <a:pt x="1267362" y="123254"/>
+                </a:cubicBezTo>
+                <a:cubicBezTo>
+                  <a:pt x="1281900" y="126859"/>
+                  <a:pt x="1296437" y="134068"/>
+                  <a:pt x="1310975" y="98023"/>
+                </a:cubicBezTo>
+                <a:cubicBezTo>
+                  <a:pt x="1260095" y="81803"/>
+                  <a:pt x="1209941" y="62879"/>
+                  <a:pt x="1159787" y="43505"/>
+                </a:cubicBezTo>
+                <a:close/>
+              </a:path>
+            </a:pathLst>
+          </a:custGeom>
+          <a:noFill/>
+          <a:extLst>
+            <a:ext uri="{909E8E84-426E-40DD-AFC4-6F175D3DCCD1}">
+              <a14:hiddenFill xmlns:a14="http://schemas.microsoft.com/office/drawing/2010/main">
+                <a:solidFill>
+                  <a:srgbClr val="FFFFFF"/>
+                </a:solidFill>
+              </a14:hiddenFill>
+            </a:ext>
+          </a:extLst>
+        </p:spPr>
+      </p:pic>
+    </p:spTree>
+    <p:extLst>
+      <p:ext uri="{BB962C8B-B14F-4D97-AF65-F5344CB8AC3E}">
+        <p14:creationId xmlns:p14="http://schemas.microsoft.com/office/powerpoint/2010/main" val="1892552482"/>
+      </p:ext>
+    </p:extLst>
+  </p:cSld>
+  <p:clrMapOvr>
+    <a:masterClrMapping/>
+  </p:clrMapOvr>
+</p:sld>
+</file>
+
+<file path=ppt/slides/slide7.xml><?xml version="1.0" encoding="utf-8"?>
+<p:sld xmlns:a="http://schemas.openxmlformats.org/drawingml/2006/main" xmlns:r="http://schemas.openxmlformats.org/officeDocument/2006/relationships" xmlns:p="http://schemas.openxmlformats.org/presentationml/2006/main">
+  <p:cSld>
+    <p:spTree>
+      <p:nvGrpSpPr>
+        <p:cNvPr id="1" name=""/>
+        <p:cNvGrpSpPr/>
+        <p:nvPr/>
+      </p:nvGrpSpPr>
+      <p:grpSpPr>
+        <a:xfrm>
+          <a:off x="0" y="0"/>
+          <a:ext cx="0" cy="0"/>
+          <a:chOff x="0" y="0"/>
+          <a:chExt cx="0" cy="0"/>
+        </a:xfrm>
+      </p:grpSpPr>
+      <p:sp>
+        <p:nvSpPr>
+          <p:cNvPr id="2" name="标题 1">
+            <a:extLst>
+              <a:ext uri="{FF2B5EF4-FFF2-40B4-BE49-F238E27FC236}">
+                <a16:creationId xmlns:a16="http://schemas.microsoft.com/office/drawing/2014/main" id="{BC780030-872A-5E71-CFD7-2695BD035EB8}"/>
+              </a:ext>
+            </a:extLst>
+          </p:cNvPr>
+          <p:cNvSpPr>
+            <a:spLocks noGrp="1"/>
+          </p:cNvSpPr>
+          <p:nvPr>
+            <p:ph type="title"/>
+          </p:nvPr>
+        </p:nvSpPr>
+        <p:spPr/>
+        <p:txBody>
+          <a:bodyPr/>
+          <a:lstStyle/>
+          <a:p>
+            <a:r>
+              <a:rPr kumimoji="1" lang="en-US" altLang="zh-CN" dirty="0"/>
+              <a:t>Vibe</a:t>
+            </a:r>
+            <a:r>
+              <a:rPr kumimoji="1" lang="zh-CN" altLang="en-US" dirty="0"/>
+              <a:t> </a:t>
+            </a:r>
+            <a:r>
+              <a:rPr kumimoji="1" lang="en-US" altLang="zh-CN" dirty="0"/>
+              <a:t>coding</a:t>
+            </a:r>
+            <a:endParaRPr kumimoji="1" lang="zh-CN" altLang="en-US" dirty="0"/>
+          </a:p>
+        </p:txBody>
+      </p:sp>
+      <p:sp>
+        <p:nvSpPr>
+          <p:cNvPr id="3" name="内容占位符 2">
+            <a:extLst>
+              <a:ext uri="{FF2B5EF4-FFF2-40B4-BE49-F238E27FC236}">
+                <a16:creationId xmlns:a16="http://schemas.microsoft.com/office/drawing/2014/main" id="{EF7C2920-0225-4243-5DFB-401EC1F49C44}"/>
+              </a:ext>
+            </a:extLst>
+          </p:cNvPr>
+          <p:cNvSpPr>
+            <a:spLocks noGrp="1"/>
+          </p:cNvSpPr>
+          <p:nvPr>
+            <p:ph idx="1"/>
+          </p:nvPr>
+        </p:nvSpPr>
+        <p:spPr/>
+        <p:txBody>
+          <a:bodyPr/>
+          <a:lstStyle/>
+          <a:p>
+            <a:endParaRPr kumimoji="1" lang="zh-CN" altLang="en-US"/>
+          </a:p>
+        </p:txBody>
+      </p:sp>
+      <p:pic>
+        <p:nvPicPr>
+          <p:cNvPr id="4" name="图片 3">
+            <a:extLst>
+              <a:ext uri="{FF2B5EF4-FFF2-40B4-BE49-F238E27FC236}">
+                <a16:creationId xmlns:a16="http://schemas.microsoft.com/office/drawing/2014/main" id="{02698204-FFA8-41DA-C59E-A914D1DEB74E}"/>
+              </a:ext>
+            </a:extLst>
+          </p:cNvPr>
+          <p:cNvPicPr>
+            <a:picLocks noChangeAspect="1"/>
+          </p:cNvPicPr>
+          <p:nvPr/>
+        </p:nvPicPr>
+        <p:blipFill>
+          <a:blip r:embed="rId2"/>
+          <a:stretch>
+            <a:fillRect/>
+          </a:stretch>
+        </p:blipFill>
+        <p:spPr>
+          <a:xfrm>
+            <a:off x="788096" y="1527849"/>
+            <a:ext cx="10397646" cy="5390695"/>
+          </a:xfrm>
+          <a:prstGeom prst="rect">
+            <a:avLst/>
+          </a:prstGeom>
+        </p:spPr>
+      </p:pic>
+    </p:spTree>
+    <p:extLst>
+      <p:ext uri="{BB962C8B-B14F-4D97-AF65-F5344CB8AC3E}">
+        <p14:creationId xmlns:p14="http://schemas.microsoft.com/office/powerpoint/2010/main" val="1031368044"/>
+      </p:ext>
+    </p:extLst>
+  </p:cSld>
+  <p:clrMapOvr>
+    <a:masterClrMapping/>
+  </p:clrMapOvr>
+</p:sld>
+</file>
+
+<file path=ppt/slides/slide8.xml><?xml version="1.0" encoding="utf-8"?>
+<p:sld xmlns:a="http://schemas.openxmlformats.org/drawingml/2006/main" xmlns:r="http://schemas.openxmlformats.org/officeDocument/2006/relationships" xmlns:p="http://schemas.openxmlformats.org/presentationml/2006/main">
+  <p:cSld>
+    <p:spTree>
+      <p:nvGrpSpPr>
+        <p:cNvPr id="1" name=""/>
+        <p:cNvGrpSpPr/>
+        <p:nvPr/>
+      </p:nvGrpSpPr>
+      <p:grpSpPr>
+        <a:xfrm>
+          <a:off x="0" y="0"/>
+          <a:ext cx="0" cy="0"/>
+          <a:chOff x="0" y="0"/>
+          <a:chExt cx="0" cy="0"/>
+        </a:xfrm>
+      </p:grpSpPr>
+      <p:sp>
+        <p:nvSpPr>
+          <p:cNvPr id="2" name="标题 1">
+            <a:extLst>
+              <a:ext uri="{FF2B5EF4-FFF2-40B4-BE49-F238E27FC236}">
+                <a16:creationId xmlns:a16="http://schemas.microsoft.com/office/drawing/2014/main" id="{1F9649FF-C0DE-B76A-545C-A8787DB84F9D}"/>
+              </a:ext>
+            </a:extLst>
+          </p:cNvPr>
+          <p:cNvSpPr>
+            <a:spLocks noGrp="1"/>
+          </p:cNvSpPr>
+          <p:nvPr>
+            <p:ph type="title"/>
+          </p:nvPr>
+        </p:nvSpPr>
+        <p:spPr/>
+        <p:txBody>
+          <a:bodyPr/>
+          <a:lstStyle/>
+          <a:p>
+            <a:endParaRPr kumimoji="1" lang="zh-CN" altLang="en-US"/>
+          </a:p>
+        </p:txBody>
+      </p:sp>
+      <p:sp>
+        <p:nvSpPr>
+          <p:cNvPr id="3" name="内容占位符 2">
+            <a:extLst>
+              <a:ext uri="{FF2B5EF4-FFF2-40B4-BE49-F238E27FC236}">
+                <a16:creationId xmlns:a16="http://schemas.microsoft.com/office/drawing/2014/main" id="{47ACC86F-BD18-4186-6E0A-6B3816820301}"/>
+              </a:ext>
+            </a:extLst>
+          </p:cNvPr>
+          <p:cNvSpPr>
+            <a:spLocks noGrp="1"/>
+          </p:cNvSpPr>
+          <p:nvPr>
+            <p:ph idx="1"/>
+          </p:nvPr>
+        </p:nvSpPr>
+        <p:spPr/>
+        <p:txBody>
+          <a:bodyPr/>
+          <a:lstStyle/>
+          <a:p>
+            <a:endParaRPr kumimoji="1" lang="zh-CN" altLang="en-US"/>
+          </a:p>
+        </p:txBody>
+      </p:sp>
+      <p:pic>
+        <p:nvPicPr>
+          <p:cNvPr id="4" name="图片 3">
+            <a:extLst>
+              <a:ext uri="{FF2B5EF4-FFF2-40B4-BE49-F238E27FC236}">
+                <a16:creationId xmlns:a16="http://schemas.microsoft.com/office/drawing/2014/main" id="{32C00D8F-B7A0-A8E8-5FC1-71CB54329231}"/>
+              </a:ext>
+            </a:extLst>
+          </p:cNvPr>
+          <p:cNvPicPr>
+            <a:picLocks noChangeAspect="1"/>
+          </p:cNvPicPr>
+          <p:nvPr/>
+        </p:nvPicPr>
+        <p:blipFill>
+          <a:blip r:embed="rId2"/>
+          <a:stretch>
+            <a:fillRect/>
+          </a:stretch>
+        </p:blipFill>
+        <p:spPr>
+          <a:xfrm>
+            <a:off x="788094" y="899152"/>
+            <a:ext cx="10565705" cy="5328563"/>
+          </a:xfrm>
+          <a:prstGeom prst="rect">
+            <a:avLst/>
+          </a:prstGeom>
+        </p:spPr>
+      </p:pic>
+    </p:spTree>
+    <p:extLst>
+      <p:ext uri="{BB962C8B-B14F-4D97-AF65-F5344CB8AC3E}">
+        <p14:creationId xmlns:p14="http://schemas.microsoft.com/office/powerpoint/2010/main" val="2425082722"/>
+      </p:ext>
+    </p:extLst>
+  </p:cSld>
+  <p:clrMapOvr>
+    <a:masterClrMapping/>
+  </p:clrMapOvr>
+</p:sld>
+</file>
+
+<file path=ppt/slides/slide9.xml><?xml version="1.0" encoding="utf-8"?>
+<p:sld xmlns:a="http://schemas.openxmlformats.org/drawingml/2006/main" xmlns:r="http://schemas.openxmlformats.org/officeDocument/2006/relationships" xmlns:p="http://schemas.openxmlformats.org/presentationml/2006/main">
+  <p:cSld>
+    <p:spTree>
+      <p:nvGrpSpPr>
+        <p:cNvPr id="1" name=""/>
+        <p:cNvGrpSpPr/>
+        <p:nvPr/>
+      </p:nvGrpSpPr>
+      <p:grpSpPr>
+        <a:xfrm>
+          <a:off x="0" y="0"/>
+          <a:ext cx="0" cy="0"/>
+          <a:chOff x="0" y="0"/>
+          <a:chExt cx="0" cy="0"/>
+        </a:xfrm>
+      </p:grpSpPr>
+      <p:sp>
+        <p:nvSpPr>
+          <p:cNvPr id="2" name="标题 1">
+            <a:extLst>
+              <a:ext uri="{FF2B5EF4-FFF2-40B4-BE49-F238E27FC236}">
+                <a16:creationId xmlns:a16="http://schemas.microsoft.com/office/drawing/2014/main" id="{281EB340-DE79-3BF1-C9E4-3EB2786CB08B}"/>
+              </a:ext>
+            </a:extLst>
+          </p:cNvPr>
+          <p:cNvSpPr>
+            <a:spLocks noGrp="1"/>
+          </p:cNvSpPr>
+          <p:nvPr>
+            <p:ph type="title"/>
+          </p:nvPr>
+        </p:nvSpPr>
+        <p:spPr/>
+        <p:txBody>
+          <a:bodyPr/>
+          <a:lstStyle/>
+          <a:p>
+            <a:endParaRPr kumimoji="1" lang="zh-CN" altLang="en-US"/>
+          </a:p>
+        </p:txBody>
+      </p:sp>
+      <p:sp>
+        <p:nvSpPr>
+          <p:cNvPr id="3" name="内容占位符 2">
+            <a:extLst>
+              <a:ext uri="{FF2B5EF4-FFF2-40B4-BE49-F238E27FC236}">
+                <a16:creationId xmlns:a16="http://schemas.microsoft.com/office/drawing/2014/main" id="{569A1CDD-F136-23BB-C760-E9BA9CC2EE3F}"/>
+              </a:ext>
+            </a:extLst>
+          </p:cNvPr>
+          <p:cNvSpPr>
+            <a:spLocks noGrp="1"/>
+          </p:cNvSpPr>
+          <p:nvPr>
+            <p:ph idx="1"/>
+          </p:nvPr>
+        </p:nvSpPr>
+        <p:spPr/>
+        <p:txBody>
+          <a:bodyPr/>
+          <a:lstStyle/>
+          <a:p>
+            <a:endParaRPr kumimoji="1" lang="zh-CN" altLang="en-US"/>
+          </a:p>
+        </p:txBody>
+      </p:sp>
+      <p:pic>
+        <p:nvPicPr>
+          <p:cNvPr id="4" name="图片 3">
+            <a:extLst>
+              <a:ext uri="{FF2B5EF4-FFF2-40B4-BE49-F238E27FC236}">
+                <a16:creationId xmlns:a16="http://schemas.microsoft.com/office/drawing/2014/main" id="{9CEB271D-AC10-CEB2-5422-8606E6DF5FD8}"/>
+              </a:ext>
+            </a:extLst>
+          </p:cNvPr>
+          <p:cNvPicPr>
+            <a:picLocks noChangeAspect="1"/>
+          </p:cNvPicPr>
+          <p:nvPr/>
+        </p:nvPicPr>
+        <p:blipFill>
+          <a:blip r:embed="rId2"/>
+          <a:stretch>
+            <a:fillRect/>
+          </a:stretch>
+        </p:blipFill>
+        <p:spPr>
+          <a:xfrm>
+            <a:off x="838200" y="992709"/>
+            <a:ext cx="8751263" cy="3779707"/>
+          </a:xfrm>
+          <a:prstGeom prst="rect">
+            <a:avLst/>
+          </a:prstGeom>
+        </p:spPr>
+      </p:pic>
+    </p:spTree>
+    <p:extLst>
+      <p:ext uri="{BB962C8B-B14F-4D97-AF65-F5344CB8AC3E}">
+        <p14:creationId xmlns:p14="http://schemas.microsoft.com/office/powerpoint/2010/main" val="899281295"/>
+      </p:ext>
+    </p:extLst>
+  </p:cSld>
+  <p:clrMapOvr>
+    <a:masterClrMapping/>
+  </p:clrMapOvr>
+</p:sld>
+</file>
+
 <file path=ppt/tags/tag1.xml><?xml version="1.0" encoding="utf-8"?>
 <p:tagLst xmlns:a="http://schemas.openxmlformats.org/drawingml/2006/main" xmlns:r="http://schemas.openxmlformats.org/officeDocument/2006/relationships" xmlns:p="http://schemas.openxmlformats.org/presentationml/2006/main">
   <p:tag name="KSO_WM_SLIDE_MODEL_TYPE" val="cover"/>
